--- a/Spring Cloud Stream.pptx
+++ b/Spring Cloud Stream.pptx
@@ -39,6 +39,56 @@
     <p:sldId id="287" r:id="rId33"/>
     <p:sldId id="288" r:id="rId34"/>
     <p:sldId id="289" r:id="rId35"/>
+    <p:sldId id="290" r:id="rId36"/>
+    <p:sldId id="291" r:id="rId37"/>
+    <p:sldId id="292" r:id="rId38"/>
+    <p:sldId id="293" r:id="rId39"/>
+    <p:sldId id="294" r:id="rId40"/>
+    <p:sldId id="295" r:id="rId41"/>
+    <p:sldId id="296" r:id="rId42"/>
+    <p:sldId id="297" r:id="rId43"/>
+    <p:sldId id="298" r:id="rId44"/>
+    <p:sldId id="299" r:id="rId45"/>
+    <p:sldId id="300" r:id="rId46"/>
+    <p:sldId id="301" r:id="rId47"/>
+    <p:sldId id="302" r:id="rId48"/>
+    <p:sldId id="303" r:id="rId49"/>
+    <p:sldId id="304" r:id="rId50"/>
+    <p:sldId id="305" r:id="rId51"/>
+    <p:sldId id="306" r:id="rId52"/>
+    <p:sldId id="307" r:id="rId53"/>
+    <p:sldId id="308" r:id="rId54"/>
+    <p:sldId id="309" r:id="rId55"/>
+    <p:sldId id="310" r:id="rId56"/>
+    <p:sldId id="311" r:id="rId57"/>
+    <p:sldId id="312" r:id="rId58"/>
+    <p:sldId id="313" r:id="rId59"/>
+    <p:sldId id="314" r:id="rId60"/>
+    <p:sldId id="315" r:id="rId61"/>
+    <p:sldId id="316" r:id="rId62"/>
+    <p:sldId id="317" r:id="rId63"/>
+    <p:sldId id="318" r:id="rId64"/>
+    <p:sldId id="319" r:id="rId65"/>
+    <p:sldId id="320" r:id="rId66"/>
+    <p:sldId id="321" r:id="rId67"/>
+    <p:sldId id="322" r:id="rId68"/>
+    <p:sldId id="323" r:id="rId69"/>
+    <p:sldId id="324" r:id="rId70"/>
+    <p:sldId id="325" r:id="rId71"/>
+    <p:sldId id="326" r:id="rId72"/>
+    <p:sldId id="327" r:id="rId73"/>
+    <p:sldId id="328" r:id="rId74"/>
+    <p:sldId id="329" r:id="rId75"/>
+    <p:sldId id="330" r:id="rId76"/>
+    <p:sldId id="331" r:id="rId77"/>
+    <p:sldId id="332" r:id="rId78"/>
+    <p:sldId id="333" r:id="rId79"/>
+    <p:sldId id="334" r:id="rId80"/>
+    <p:sldId id="335" r:id="rId81"/>
+    <p:sldId id="336" r:id="rId82"/>
+    <p:sldId id="337" r:id="rId83"/>
+    <p:sldId id="338" r:id="rId84"/>
+    <p:sldId id="339" r:id="rId85"/>
   </p:sldIdLst>
   <p:sldSz cx="12192000" cy="6858000"/>
   <p:notesSz cx="6858000" cy="9144000"/>
@@ -137,6 +187,11 @@
       </a:defRPr>
     </a:lvl9pPr>
   </p:defaultTextStyle>
+  <p:extLst>
+    <p:ext uri="{EFAFB233-063F-42B5-8137-9DF3F51BA10A}">
+      <p15:sldGuideLst xmlns:p15="http://schemas.microsoft.com/office/powerpoint/2012/main"/>
+    </p:ext>
+  </p:extLst>
 </p:presentation>
 </file>
 
@@ -475,7 +530,7 @@
           <a:p>
             <a:fld id="{F6CD5CD0-6A70-4D3F-8AFB-DE1607D11702}" type="datetimeFigureOut">
               <a:rPr lang="en-IN" smtClean="0"/>
-              <a:t>25-03-2026</a:t>
+              <a:t>26-03-2026</a:t>
             </a:fld>
             <a:endParaRPr lang="en-IN"/>
           </a:p>
@@ -1563,7 +1618,7 @@
           <a:p>
             <a:fld id="{F6CD5CD0-6A70-4D3F-8AFB-DE1607D11702}" type="datetimeFigureOut">
               <a:rPr lang="en-IN" smtClean="0"/>
-              <a:t>25-03-2026</a:t>
+              <a:t>26-03-2026</a:t>
             </a:fld>
             <a:endParaRPr lang="en-IN"/>
           </a:p>
@@ -2543,7 +2598,7 @@
           <a:p>
             <a:fld id="{F6CD5CD0-6A70-4D3F-8AFB-DE1607D11702}" type="datetimeFigureOut">
               <a:rPr lang="en-IN" smtClean="0"/>
-              <a:t>25-03-2026</a:t>
+              <a:t>26-03-2026</a:t>
             </a:fld>
             <a:endParaRPr lang="en-IN"/>
           </a:p>
@@ -3677,7 +3732,7 @@
           <a:p>
             <a:fld id="{F6CD5CD0-6A70-4D3F-8AFB-DE1607D11702}" type="datetimeFigureOut">
               <a:rPr lang="en-IN" smtClean="0"/>
-              <a:t>25-03-2026</a:t>
+              <a:t>26-03-2026</a:t>
             </a:fld>
             <a:endParaRPr lang="en-IN"/>
           </a:p>
@@ -4710,7 +4765,7 @@
           <a:p>
             <a:fld id="{F6CD5CD0-6A70-4D3F-8AFB-DE1607D11702}" type="datetimeFigureOut">
               <a:rPr lang="en-IN" smtClean="0"/>
-              <a:t>25-03-2026</a:t>
+              <a:t>26-03-2026</a:t>
             </a:fld>
             <a:endParaRPr lang="en-IN"/>
           </a:p>
@@ -5370,7 +5425,7 @@
           <a:p>
             <a:fld id="{F6CD5CD0-6A70-4D3F-8AFB-DE1607D11702}" type="datetimeFigureOut">
               <a:rPr lang="en-IN" smtClean="0"/>
-              <a:t>25-03-2026</a:t>
+              <a:t>26-03-2026</a:t>
             </a:fld>
             <a:endParaRPr lang="en-IN"/>
           </a:p>
@@ -6231,7 +6286,7 @@
           <a:p>
             <a:fld id="{F6CD5CD0-6A70-4D3F-8AFB-DE1607D11702}" type="datetimeFigureOut">
               <a:rPr lang="en-IN" smtClean="0"/>
-              <a:t>25-03-2026</a:t>
+              <a:t>26-03-2026</a:t>
             </a:fld>
             <a:endParaRPr lang="en-IN"/>
           </a:p>
@@ -6421,7 +6476,7 @@
           <a:p>
             <a:fld id="{F6CD5CD0-6A70-4D3F-8AFB-DE1607D11702}" type="datetimeFigureOut">
               <a:rPr lang="en-IN" smtClean="0"/>
-              <a:t>25-03-2026</a:t>
+              <a:t>26-03-2026</a:t>
             </a:fld>
             <a:endParaRPr lang="en-IN"/>
           </a:p>
@@ -7393,7 +7448,7 @@
           <a:p>
             <a:fld id="{F6CD5CD0-6A70-4D3F-8AFB-DE1607D11702}" type="datetimeFigureOut">
               <a:rPr lang="en-IN" smtClean="0"/>
-              <a:t>25-03-2026</a:t>
+              <a:t>26-03-2026</a:t>
             </a:fld>
             <a:endParaRPr lang="en-IN"/>
           </a:p>
@@ -7604,7 +7659,7 @@
           <a:p>
             <a:fld id="{F6CD5CD0-6A70-4D3F-8AFB-DE1607D11702}" type="datetimeFigureOut">
               <a:rPr lang="en-IN" smtClean="0"/>
-              <a:t>25-03-2026</a:t>
+              <a:t>26-03-2026</a:t>
             </a:fld>
             <a:endParaRPr lang="en-IN"/>
           </a:p>
@@ -8638,7 +8693,7 @@
           <a:p>
             <a:fld id="{F6CD5CD0-6A70-4D3F-8AFB-DE1607D11702}" type="datetimeFigureOut">
               <a:rPr lang="en-IN" smtClean="0"/>
-              <a:t>25-03-2026</a:t>
+              <a:t>26-03-2026</a:t>
             </a:fld>
             <a:endParaRPr lang="en-IN"/>
           </a:p>
@@ -8910,7 +8965,7 @@
           <a:p>
             <a:fld id="{F6CD5CD0-6A70-4D3F-8AFB-DE1607D11702}" type="datetimeFigureOut">
               <a:rPr lang="en-IN" smtClean="0"/>
-              <a:t>25-03-2026</a:t>
+              <a:t>26-03-2026</a:t>
             </a:fld>
             <a:endParaRPr lang="en-IN"/>
           </a:p>
@@ -9320,7 +9375,7 @@
           <a:p>
             <a:fld id="{F6CD5CD0-6A70-4D3F-8AFB-DE1607D11702}" type="datetimeFigureOut">
               <a:rPr lang="en-IN" smtClean="0"/>
-              <a:t>25-03-2026</a:t>
+              <a:t>26-03-2026</a:t>
             </a:fld>
             <a:endParaRPr lang="en-IN"/>
           </a:p>
@@ -9447,7 +9502,7 @@
           <a:p>
             <a:fld id="{F6CD5CD0-6A70-4D3F-8AFB-DE1607D11702}" type="datetimeFigureOut">
               <a:rPr lang="en-IN" smtClean="0"/>
-              <a:t>25-03-2026</a:t>
+              <a:t>26-03-2026</a:t>
             </a:fld>
             <a:endParaRPr lang="en-IN"/>
           </a:p>
@@ -9542,7 +9597,7 @@
           <a:p>
             <a:fld id="{F6CD5CD0-6A70-4D3F-8AFB-DE1607D11702}" type="datetimeFigureOut">
               <a:rPr lang="en-IN" smtClean="0"/>
-              <a:t>25-03-2026</a:t>
+              <a:t>26-03-2026</a:t>
             </a:fld>
             <a:endParaRPr lang="en-IN"/>
           </a:p>
@@ -10623,7 +10678,7 @@
           <a:p>
             <a:fld id="{F6CD5CD0-6A70-4D3F-8AFB-DE1607D11702}" type="datetimeFigureOut">
               <a:rPr lang="en-IN" smtClean="0"/>
-              <a:t>25-03-2026</a:t>
+              <a:t>26-03-2026</a:t>
             </a:fld>
             <a:endParaRPr lang="en-IN"/>
           </a:p>
@@ -11731,7 +11786,7 @@
           <a:p>
             <a:fld id="{F6CD5CD0-6A70-4D3F-8AFB-DE1607D11702}" type="datetimeFigureOut">
               <a:rPr lang="en-IN" smtClean="0"/>
-              <a:t>25-03-2026</a:t>
+              <a:t>26-03-2026</a:t>
             </a:fld>
             <a:endParaRPr lang="en-IN"/>
           </a:p>
@@ -12728,7 +12783,7 @@
           <a:p>
             <a:fld id="{F6CD5CD0-6A70-4D3F-8AFB-DE1607D11702}" type="datetimeFigureOut">
               <a:rPr lang="en-IN" smtClean="0"/>
-              <a:t>25-03-2026</a:t>
+              <a:t>26-03-2026</a:t>
             </a:fld>
             <a:endParaRPr lang="en-IN"/>
           </a:p>
@@ -18073,6 +18128,897 @@
 </p:sld>
 </file>
 
+<file path=ppt/slides/slide35.xml><?xml version="1.0" encoding="utf-8"?>
+<p:sld xmlns:a="http://schemas.openxmlformats.org/drawingml/2006/main" xmlns:r="http://schemas.openxmlformats.org/officeDocument/2006/relationships" xmlns:p="http://schemas.openxmlformats.org/presentationml/2006/main">
+  <p:cSld>
+    <p:spTree>
+      <p:nvGrpSpPr>
+        <p:cNvPr id="1" name=""/>
+        <p:cNvGrpSpPr/>
+        <p:nvPr/>
+      </p:nvGrpSpPr>
+      <p:grpSpPr>
+        <a:xfrm>
+          <a:off x="0" y="0"/>
+          <a:ext cx="0" cy="0"/>
+          <a:chOff x="0" y="0"/>
+          <a:chExt cx="0" cy="0"/>
+        </a:xfrm>
+      </p:grpSpPr>
+      <p:sp>
+        <p:nvSpPr>
+          <p:cNvPr id="2" name="Title 1">
+            <a:extLst>
+              <a:ext uri="{FF2B5EF4-FFF2-40B4-BE49-F238E27FC236}">
+                <a16:creationId xmlns:a16="http://schemas.microsoft.com/office/drawing/2014/main" id="{C1836D6D-01CE-285B-8A47-11996E706973}"/>
+              </a:ext>
+            </a:extLst>
+          </p:cNvPr>
+          <p:cNvSpPr>
+            <a:spLocks noGrp="1"/>
+          </p:cNvSpPr>
+          <p:nvPr>
+            <p:ph type="ctrTitle"/>
+          </p:nvPr>
+        </p:nvSpPr>
+        <p:spPr/>
+        <p:txBody>
+          <a:bodyPr/>
+          <a:lstStyle/>
+          <a:p>
+            <a:r>
+              <a:rPr lang="en-IN" dirty="0"/>
+              <a:t>Spring Cloud Stream RabbitMQ binder</a:t>
+            </a:r>
+          </a:p>
+        </p:txBody>
+      </p:sp>
+      <p:sp>
+        <p:nvSpPr>
+          <p:cNvPr id="4" name="Subtitle 3">
+            <a:extLst>
+              <a:ext uri="{FF2B5EF4-FFF2-40B4-BE49-F238E27FC236}">
+                <a16:creationId xmlns:a16="http://schemas.microsoft.com/office/drawing/2014/main" id="{DF091CE6-2DF0-A181-B162-9DDCFF0E0268}"/>
+              </a:ext>
+            </a:extLst>
+          </p:cNvPr>
+          <p:cNvSpPr>
+            <a:spLocks noGrp="1"/>
+          </p:cNvSpPr>
+          <p:nvPr>
+            <p:ph type="subTitle" idx="1"/>
+          </p:nvPr>
+        </p:nvSpPr>
+        <p:spPr/>
+        <p:txBody>
+          <a:bodyPr/>
+          <a:lstStyle/>
+          <a:p>
+            <a:endParaRPr lang="en-IN"/>
+          </a:p>
+        </p:txBody>
+      </p:sp>
+    </p:spTree>
+    <p:extLst>
+      <p:ext uri="{BB962C8B-B14F-4D97-AF65-F5344CB8AC3E}">
+        <p14:creationId xmlns:p14="http://schemas.microsoft.com/office/powerpoint/2010/main" val="2254579659"/>
+      </p:ext>
+    </p:extLst>
+  </p:cSld>
+  <p:clrMapOvr>
+    <a:masterClrMapping/>
+  </p:clrMapOvr>
+</p:sld>
+</file>
+
+<file path=ppt/slides/slide36.xml><?xml version="1.0" encoding="utf-8"?>
+<p:sld xmlns:a="http://schemas.openxmlformats.org/drawingml/2006/main" xmlns:r="http://schemas.openxmlformats.org/officeDocument/2006/relationships" xmlns:p="http://schemas.openxmlformats.org/presentationml/2006/main">
+  <p:cSld>
+    <p:spTree>
+      <p:nvGrpSpPr>
+        <p:cNvPr id="1" name=""/>
+        <p:cNvGrpSpPr/>
+        <p:nvPr/>
+      </p:nvGrpSpPr>
+      <p:grpSpPr>
+        <a:xfrm>
+          <a:off x="0" y="0"/>
+          <a:ext cx="0" cy="0"/>
+          <a:chOff x="0" y="0"/>
+          <a:chExt cx="0" cy="0"/>
+        </a:xfrm>
+      </p:grpSpPr>
+      <p:sp>
+        <p:nvSpPr>
+          <p:cNvPr id="2" name="Title 1">
+            <a:extLst>
+              <a:ext uri="{FF2B5EF4-FFF2-40B4-BE49-F238E27FC236}">
+                <a16:creationId xmlns:a16="http://schemas.microsoft.com/office/drawing/2014/main" id="{810F4CAC-48EA-B98E-8D6D-3E8F123DC113}"/>
+              </a:ext>
+            </a:extLst>
+          </p:cNvPr>
+          <p:cNvSpPr>
+            <a:spLocks noGrp="1"/>
+          </p:cNvSpPr>
+          <p:nvPr>
+            <p:ph type="title"/>
+          </p:nvPr>
+        </p:nvSpPr>
+        <p:spPr/>
+        <p:txBody>
+          <a:bodyPr/>
+          <a:lstStyle/>
+          <a:p>
+            <a:r>
+              <a:rPr lang="en-IN" dirty="0"/>
+              <a:t>Spring Cloud Stream RabbitMQ binder</a:t>
+            </a:r>
+          </a:p>
+        </p:txBody>
+      </p:sp>
+      <p:sp>
+        <p:nvSpPr>
+          <p:cNvPr id="3" name="Content Placeholder 2">
+            <a:extLst>
+              <a:ext uri="{FF2B5EF4-FFF2-40B4-BE49-F238E27FC236}">
+                <a16:creationId xmlns:a16="http://schemas.microsoft.com/office/drawing/2014/main" id="{15E5959D-6440-79EB-DE97-78997198F2D9}"/>
+              </a:ext>
+            </a:extLst>
+          </p:cNvPr>
+          <p:cNvSpPr>
+            <a:spLocks noGrp="1"/>
+          </p:cNvSpPr>
+          <p:nvPr>
+            <p:ph idx="1"/>
+          </p:nvPr>
+        </p:nvSpPr>
+        <p:spPr>
+          <a:xfrm>
+            <a:off x="1154954" y="2603499"/>
+            <a:ext cx="10473085" cy="3895097"/>
+          </a:xfrm>
+        </p:spPr>
+        <p:txBody>
+          <a:bodyPr/>
+          <a:lstStyle/>
+          <a:p>
+            <a:pPr marL="0" indent="0">
+              <a:buNone/>
+            </a:pPr>
+            <a:r>
+              <a:rPr lang="en-US" dirty="0"/>
+              <a:t>combining two layers:</a:t>
+            </a:r>
+          </a:p>
+          <a:p>
+            <a:r>
+              <a:rPr lang="en-US" dirty="0"/>
+              <a:t>Spring Integration = internal processing pipeline</a:t>
+            </a:r>
+            <a:br>
+              <a:rPr lang="en-US" dirty="0"/>
+            </a:br>
+            <a:r>
+              <a:rPr lang="en-US" dirty="0"/>
+              <a:t>Spring Cloud Stream (Rabbit Binder) = external communication</a:t>
+            </a:r>
+          </a:p>
+          <a:p>
+            <a:endParaRPr lang="en-US" dirty="0"/>
+          </a:p>
+          <a:p>
+            <a:r>
+              <a:rPr lang="en-US" b="1" dirty="0"/>
+              <a:t>Spring Integration does the “thinking”</a:t>
+            </a:r>
+            <a:br>
+              <a:rPr lang="en-US" dirty="0"/>
+            </a:br>
+            <a:r>
+              <a:rPr lang="en-US" b="1" dirty="0"/>
+              <a:t>Spring Cloud Stream does the “talking”</a:t>
+            </a:r>
+            <a:endParaRPr lang="en-US" dirty="0"/>
+          </a:p>
+          <a:p>
+            <a:endParaRPr lang="en-IN" dirty="0"/>
+          </a:p>
+        </p:txBody>
+      </p:sp>
+    </p:spTree>
+    <p:extLst>
+      <p:ext uri="{BB962C8B-B14F-4D97-AF65-F5344CB8AC3E}">
+        <p14:creationId xmlns:p14="http://schemas.microsoft.com/office/powerpoint/2010/main" val="1793309000"/>
+      </p:ext>
+    </p:extLst>
+  </p:cSld>
+  <p:clrMapOvr>
+    <a:masterClrMapping/>
+  </p:clrMapOvr>
+</p:sld>
+</file>
+
+<file path=ppt/slides/slide37.xml><?xml version="1.0" encoding="utf-8"?>
+<p:sld xmlns:a="http://schemas.openxmlformats.org/drawingml/2006/main" xmlns:r="http://schemas.openxmlformats.org/officeDocument/2006/relationships" xmlns:p="http://schemas.openxmlformats.org/presentationml/2006/main">
+  <p:cSld>
+    <p:spTree>
+      <p:nvGrpSpPr>
+        <p:cNvPr id="1" name=""/>
+        <p:cNvGrpSpPr/>
+        <p:nvPr/>
+      </p:nvGrpSpPr>
+      <p:grpSpPr>
+        <a:xfrm>
+          <a:off x="0" y="0"/>
+          <a:ext cx="0" cy="0"/>
+          <a:chOff x="0" y="0"/>
+          <a:chExt cx="0" cy="0"/>
+        </a:xfrm>
+      </p:grpSpPr>
+      <p:sp>
+        <p:nvSpPr>
+          <p:cNvPr id="5" name="TextBox 4">
+            <a:extLst>
+              <a:ext uri="{FF2B5EF4-FFF2-40B4-BE49-F238E27FC236}">
+                <a16:creationId xmlns:a16="http://schemas.microsoft.com/office/drawing/2014/main" id="{1DAAFFC6-763F-5015-FE40-5F186F7F54E1}"/>
+              </a:ext>
+            </a:extLst>
+          </p:cNvPr>
+          <p:cNvSpPr txBox="1"/>
+          <p:nvPr/>
+        </p:nvSpPr>
+        <p:spPr>
+          <a:xfrm>
+            <a:off x="3047593" y="745231"/>
+            <a:ext cx="6095184" cy="5355312"/>
+          </a:xfrm>
+          <a:prstGeom prst="rect">
+            <a:avLst/>
+          </a:prstGeom>
+          <a:noFill/>
+        </p:spPr>
+        <p:txBody>
+          <a:bodyPr wrap="square">
+            <a:spAutoFit/>
+          </a:bodyPr>
+          <a:lstStyle/>
+          <a:p>
+            <a:r>
+              <a:rPr lang="en-IN" dirty="0"/>
+              <a:t>[REST API]</a:t>
+            </a:r>
+          </a:p>
+          <a:p>
+            <a:r>
+              <a:rPr lang="en-IN" dirty="0"/>
+              <a:t>     ↓</a:t>
+            </a:r>
+          </a:p>
+          <a:p>
+            <a:r>
+              <a:rPr lang="en-IN" dirty="0"/>
+              <a:t>Spring Integration Flow (transform, filter, route)</a:t>
+            </a:r>
+          </a:p>
+          <a:p>
+            <a:r>
+              <a:rPr lang="en-IN" dirty="0"/>
+              <a:t>     ↓</a:t>
+            </a:r>
+          </a:p>
+          <a:p>
+            <a:r>
+              <a:rPr lang="en-IN" dirty="0" err="1"/>
+              <a:t>MessageChannel</a:t>
+            </a:r>
+            <a:r>
+              <a:rPr lang="en-IN" dirty="0"/>
+              <a:t> (output)</a:t>
+            </a:r>
+          </a:p>
+          <a:p>
+            <a:r>
+              <a:rPr lang="en-IN" dirty="0"/>
+              <a:t>     ↓</a:t>
+            </a:r>
+          </a:p>
+          <a:p>
+            <a:r>
+              <a:rPr lang="en-IN" dirty="0"/>
+              <a:t>Spring Cloud Stream Binder</a:t>
+            </a:r>
+          </a:p>
+          <a:p>
+            <a:r>
+              <a:rPr lang="en-IN" dirty="0"/>
+              <a:t>     ↓</a:t>
+            </a:r>
+          </a:p>
+          <a:p>
+            <a:r>
+              <a:rPr lang="en-IN" dirty="0"/>
+              <a:t>RabbitMQ Exchange</a:t>
+            </a:r>
+          </a:p>
+          <a:p>
+            <a:r>
+              <a:rPr lang="en-IN" dirty="0"/>
+              <a:t>     ↓</a:t>
+            </a:r>
+          </a:p>
+          <a:p>
+            <a:r>
+              <a:rPr lang="en-IN" dirty="0"/>
+              <a:t>Queue (group)</a:t>
+            </a:r>
+          </a:p>
+          <a:p>
+            <a:r>
+              <a:rPr lang="en-IN" dirty="0"/>
+              <a:t>     ↓</a:t>
+            </a:r>
+          </a:p>
+          <a:p>
+            <a:r>
+              <a:rPr lang="en-IN" dirty="0"/>
+              <a:t>Spring Cloud Stream Binder</a:t>
+            </a:r>
+          </a:p>
+          <a:p>
+            <a:r>
+              <a:rPr lang="en-IN" dirty="0"/>
+              <a:t>     ↓</a:t>
+            </a:r>
+          </a:p>
+          <a:p>
+            <a:r>
+              <a:rPr lang="en-IN" dirty="0" err="1"/>
+              <a:t>MessageChannel</a:t>
+            </a:r>
+            <a:r>
+              <a:rPr lang="en-IN" dirty="0"/>
+              <a:t> (input)</a:t>
+            </a:r>
+          </a:p>
+          <a:p>
+            <a:r>
+              <a:rPr lang="en-IN" dirty="0"/>
+              <a:t>     ↓</a:t>
+            </a:r>
+          </a:p>
+          <a:p>
+            <a:r>
+              <a:rPr lang="en-IN" dirty="0"/>
+              <a:t>Spring Integration Flow (process)</a:t>
+            </a:r>
+          </a:p>
+          <a:p>
+            <a:r>
+              <a:rPr lang="en-IN" dirty="0"/>
+              <a:t>     ↓</a:t>
+            </a:r>
+          </a:p>
+          <a:p>
+            <a:r>
+              <a:rPr lang="en-IN" dirty="0"/>
+              <a:t>Business Logic</a:t>
+            </a:r>
+          </a:p>
+        </p:txBody>
+      </p:sp>
+    </p:spTree>
+    <p:extLst>
+      <p:ext uri="{BB962C8B-B14F-4D97-AF65-F5344CB8AC3E}">
+        <p14:creationId xmlns:p14="http://schemas.microsoft.com/office/powerpoint/2010/main" val="2497030991"/>
+      </p:ext>
+    </p:extLst>
+  </p:cSld>
+  <p:clrMapOvr>
+    <a:masterClrMapping/>
+  </p:clrMapOvr>
+</p:sld>
+</file>
+
+<file path=ppt/slides/slide38.xml><?xml version="1.0" encoding="utf-8"?>
+<p:sld xmlns:a="http://schemas.openxmlformats.org/drawingml/2006/main" xmlns:r="http://schemas.openxmlformats.org/officeDocument/2006/relationships" xmlns:p="http://schemas.openxmlformats.org/presentationml/2006/main">
+  <p:cSld>
+    <p:spTree>
+      <p:nvGrpSpPr>
+        <p:cNvPr id="1" name="">
+          <a:extLst>
+            <a:ext uri="{FF2B5EF4-FFF2-40B4-BE49-F238E27FC236}">
+              <a16:creationId xmlns:a16="http://schemas.microsoft.com/office/drawing/2014/main" id="{E6088FFB-F27A-4094-24E9-E47A778D0C1D}"/>
+            </a:ext>
+          </a:extLst>
+        </p:cNvPr>
+        <p:cNvGrpSpPr/>
+        <p:nvPr/>
+      </p:nvGrpSpPr>
+      <p:grpSpPr>
+        <a:xfrm>
+          <a:off x="0" y="0"/>
+          <a:ext cx="0" cy="0"/>
+          <a:chOff x="0" y="0"/>
+          <a:chExt cx="0" cy="0"/>
+        </a:xfrm>
+      </p:grpSpPr>
+      <p:sp>
+        <p:nvSpPr>
+          <p:cNvPr id="2" name="Title 1">
+            <a:extLst>
+              <a:ext uri="{FF2B5EF4-FFF2-40B4-BE49-F238E27FC236}">
+                <a16:creationId xmlns:a16="http://schemas.microsoft.com/office/drawing/2014/main" id="{C8309C84-5A2E-441F-B789-BE1AABFE57AB}"/>
+              </a:ext>
+            </a:extLst>
+          </p:cNvPr>
+          <p:cNvSpPr>
+            <a:spLocks noGrp="1"/>
+          </p:cNvSpPr>
+          <p:nvPr>
+            <p:ph type="title"/>
+          </p:nvPr>
+        </p:nvSpPr>
+        <p:spPr/>
+        <p:txBody>
+          <a:bodyPr/>
+          <a:lstStyle/>
+          <a:p>
+            <a:r>
+              <a:rPr lang="en-IN" b="1" dirty="0"/>
+              <a:t>Producer Service (Integration → RabbitMQ)</a:t>
+            </a:r>
+            <a:endParaRPr lang="en-IN" dirty="0"/>
+          </a:p>
+        </p:txBody>
+      </p:sp>
+      <p:sp>
+        <p:nvSpPr>
+          <p:cNvPr id="3" name="Content Placeholder 2">
+            <a:extLst>
+              <a:ext uri="{FF2B5EF4-FFF2-40B4-BE49-F238E27FC236}">
+                <a16:creationId xmlns:a16="http://schemas.microsoft.com/office/drawing/2014/main" id="{96195451-9B16-76E6-7D6A-DE85CC264ABD}"/>
+              </a:ext>
+            </a:extLst>
+          </p:cNvPr>
+          <p:cNvSpPr>
+            <a:spLocks noGrp="1"/>
+          </p:cNvSpPr>
+          <p:nvPr>
+            <p:ph idx="1"/>
+          </p:nvPr>
+        </p:nvSpPr>
+        <p:spPr>
+          <a:xfrm>
+            <a:off x="1154954" y="2603500"/>
+            <a:ext cx="10394847" cy="3743512"/>
+          </a:xfrm>
+        </p:spPr>
+        <p:txBody>
+          <a:bodyPr>
+            <a:normAutofit/>
+          </a:bodyPr>
+          <a:lstStyle/>
+          <a:p>
+            <a:pPr marL="0" indent="0">
+              <a:buNone/>
+            </a:pPr>
+            <a:r>
+              <a:rPr lang="en-IN" b="1" dirty="0"/>
+              <a:t> Step 1: Integration Flow</a:t>
+            </a:r>
+          </a:p>
+          <a:p>
+            <a:r>
+              <a:rPr lang="en-IN" dirty="0"/>
+              <a:t>@Bean</a:t>
+            </a:r>
+            <a:br>
+              <a:rPr lang="en-IN" dirty="0"/>
+            </a:br>
+            <a:r>
+              <a:rPr lang="en-IN" dirty="0"/>
+              <a:t>public </a:t>
+            </a:r>
+            <a:r>
+              <a:rPr lang="en-IN" dirty="0" err="1"/>
+              <a:t>IntegrationFlow</a:t>
+            </a:r>
+            <a:r>
+              <a:rPr lang="en-IN" dirty="0"/>
+              <a:t> </a:t>
+            </a:r>
+            <a:r>
+              <a:rPr lang="en-IN" dirty="0" err="1"/>
+              <a:t>orderFlow</a:t>
+            </a:r>
+            <a:r>
+              <a:rPr lang="en-IN" dirty="0"/>
+              <a:t>() {</a:t>
+            </a:r>
+            <a:br>
+              <a:rPr lang="en-IN" dirty="0"/>
+            </a:br>
+            <a:r>
+              <a:rPr lang="en-IN" dirty="0"/>
+              <a:t>    return </a:t>
+            </a:r>
+            <a:r>
+              <a:rPr lang="en-IN" dirty="0" err="1"/>
+              <a:t>IntegrationFlows.from</a:t>
+            </a:r>
+            <a:r>
+              <a:rPr lang="en-IN" dirty="0"/>
+              <a:t>("</a:t>
+            </a:r>
+            <a:r>
+              <a:rPr lang="en-IN" dirty="0" err="1"/>
+              <a:t>orderChannel</a:t>
+            </a:r>
+            <a:r>
+              <a:rPr lang="en-IN" dirty="0"/>
+              <a:t>")</a:t>
+            </a:r>
+            <a:br>
+              <a:rPr lang="en-IN" dirty="0"/>
+            </a:br>
+            <a:r>
+              <a:rPr lang="en-IN" dirty="0"/>
+              <a:t>        .transform(order -&gt; enrich(order))</a:t>
+            </a:r>
+            <a:br>
+              <a:rPr lang="en-IN" dirty="0"/>
+            </a:br>
+            <a:r>
+              <a:rPr lang="en-IN" dirty="0"/>
+              <a:t>        .filter(order -&gt; </a:t>
+            </a:r>
+            <a:r>
+              <a:rPr lang="en-IN" dirty="0" err="1"/>
+              <a:t>order.isValid</a:t>
+            </a:r>
+            <a:r>
+              <a:rPr lang="en-IN" dirty="0"/>
+              <a:t>())</a:t>
+            </a:r>
+            <a:br>
+              <a:rPr lang="en-IN" dirty="0"/>
+            </a:br>
+            <a:r>
+              <a:rPr lang="en-IN" dirty="0"/>
+              <a:t>        .handle(message -&gt; {</a:t>
+            </a:r>
+            <a:br>
+              <a:rPr lang="en-IN" dirty="0"/>
+            </a:br>
+            <a:r>
+              <a:rPr lang="en-IN" dirty="0"/>
+              <a:t>            // send to stream output</a:t>
+            </a:r>
+            <a:br>
+              <a:rPr lang="en-IN" dirty="0"/>
+            </a:br>
+            <a:r>
+              <a:rPr lang="en-IN" dirty="0"/>
+              <a:t>        })</a:t>
+            </a:r>
+            <a:br>
+              <a:rPr lang="en-IN" dirty="0"/>
+            </a:br>
+            <a:r>
+              <a:rPr lang="en-IN" dirty="0"/>
+              <a:t>        .get();</a:t>
+            </a:r>
+            <a:br>
+              <a:rPr lang="en-IN" dirty="0"/>
+            </a:br>
+            <a:r>
+              <a:rPr lang="en-IN" dirty="0"/>
+              <a:t>}</a:t>
+            </a:r>
+          </a:p>
+          <a:p>
+            <a:endParaRPr lang="en-IN" dirty="0"/>
+          </a:p>
+        </p:txBody>
+      </p:sp>
+    </p:spTree>
+    <p:extLst>
+      <p:ext uri="{BB962C8B-B14F-4D97-AF65-F5344CB8AC3E}">
+        <p14:creationId xmlns:p14="http://schemas.microsoft.com/office/powerpoint/2010/main" val="2798347494"/>
+      </p:ext>
+    </p:extLst>
+  </p:cSld>
+  <p:clrMapOvr>
+    <a:masterClrMapping/>
+  </p:clrMapOvr>
+</p:sld>
+</file>
+
+<file path=ppt/slides/slide39.xml><?xml version="1.0" encoding="utf-8"?>
+<p:sld xmlns:a="http://schemas.openxmlformats.org/drawingml/2006/main" xmlns:r="http://schemas.openxmlformats.org/officeDocument/2006/relationships" xmlns:p="http://schemas.openxmlformats.org/presentationml/2006/main">
+  <p:cSld>
+    <p:spTree>
+      <p:nvGrpSpPr>
+        <p:cNvPr id="1" name="">
+          <a:extLst>
+            <a:ext uri="{FF2B5EF4-FFF2-40B4-BE49-F238E27FC236}">
+              <a16:creationId xmlns:a16="http://schemas.microsoft.com/office/drawing/2014/main" id="{B63D38FF-1DCE-6ABD-0BC0-1EDC72E9B02F}"/>
+            </a:ext>
+          </a:extLst>
+        </p:cNvPr>
+        <p:cNvGrpSpPr/>
+        <p:nvPr/>
+      </p:nvGrpSpPr>
+      <p:grpSpPr>
+        <a:xfrm>
+          <a:off x="0" y="0"/>
+          <a:ext cx="0" cy="0"/>
+          <a:chOff x="0" y="0"/>
+          <a:chExt cx="0" cy="0"/>
+        </a:xfrm>
+      </p:grpSpPr>
+      <p:sp>
+        <p:nvSpPr>
+          <p:cNvPr id="2" name="Title 1">
+            <a:extLst>
+              <a:ext uri="{FF2B5EF4-FFF2-40B4-BE49-F238E27FC236}">
+                <a16:creationId xmlns:a16="http://schemas.microsoft.com/office/drawing/2014/main" id="{689B8303-C04C-2090-ECE3-405B05E5FEDD}"/>
+              </a:ext>
+            </a:extLst>
+          </p:cNvPr>
+          <p:cNvSpPr>
+            <a:spLocks noGrp="1"/>
+          </p:cNvSpPr>
+          <p:nvPr>
+            <p:ph type="title"/>
+          </p:nvPr>
+        </p:nvSpPr>
+        <p:spPr/>
+        <p:txBody>
+          <a:bodyPr/>
+          <a:lstStyle/>
+          <a:p>
+            <a:r>
+              <a:rPr lang="en-IN" b="1" dirty="0"/>
+              <a:t>Producer Service (Integration → RabbitMQ)</a:t>
+            </a:r>
+            <a:endParaRPr lang="en-IN" dirty="0"/>
+          </a:p>
+        </p:txBody>
+      </p:sp>
+      <p:sp>
+        <p:nvSpPr>
+          <p:cNvPr id="3" name="Content Placeholder 2">
+            <a:extLst>
+              <a:ext uri="{FF2B5EF4-FFF2-40B4-BE49-F238E27FC236}">
+                <a16:creationId xmlns:a16="http://schemas.microsoft.com/office/drawing/2014/main" id="{02DCF64A-B8E0-06D7-66C6-622EA206DBC7}"/>
+              </a:ext>
+            </a:extLst>
+          </p:cNvPr>
+          <p:cNvSpPr>
+            <a:spLocks noGrp="1"/>
+          </p:cNvSpPr>
+          <p:nvPr>
+            <p:ph idx="1"/>
+          </p:nvPr>
+        </p:nvSpPr>
+        <p:spPr>
+          <a:xfrm>
+            <a:off x="1154954" y="2603500"/>
+            <a:ext cx="10394847" cy="3743512"/>
+          </a:xfrm>
+        </p:spPr>
+        <p:txBody>
+          <a:bodyPr/>
+          <a:lstStyle/>
+          <a:p>
+            <a:pPr marL="0" indent="0">
+              <a:buNone/>
+            </a:pPr>
+            <a:r>
+              <a:rPr lang="en-IN" b="1" dirty="0"/>
+              <a:t>Step 2: Bridge to Spring Cloud Stream</a:t>
+            </a:r>
+          </a:p>
+          <a:p>
+            <a:r>
+              <a:rPr lang="en-IN" dirty="0"/>
+              <a:t>Connect Integration → Stream using a </a:t>
+            </a:r>
+            <a:r>
+              <a:rPr lang="en-IN" b="1" dirty="0" err="1"/>
+              <a:t>MessageChannel</a:t>
+            </a:r>
+            <a:r>
+              <a:rPr lang="en-IN" b="1" dirty="0"/>
+              <a:t> bridge</a:t>
+            </a:r>
+            <a:endParaRPr lang="en-IN" dirty="0"/>
+          </a:p>
+          <a:p>
+            <a:pPr marL="0" indent="0">
+              <a:buNone/>
+            </a:pPr>
+            <a:r>
+              <a:rPr lang="en-IN" b="1" dirty="0">
+                <a:solidFill>
+                  <a:srgbClr val="C00000"/>
+                </a:solidFill>
+              </a:rPr>
+              <a:t>@Bean</a:t>
+            </a:r>
+            <a:br>
+              <a:rPr lang="en-IN" b="1" dirty="0">
+                <a:solidFill>
+                  <a:srgbClr val="C00000"/>
+                </a:solidFill>
+              </a:rPr>
+            </a:br>
+            <a:r>
+              <a:rPr lang="en-IN" b="1" dirty="0">
+                <a:solidFill>
+                  <a:srgbClr val="C00000"/>
+                </a:solidFill>
+              </a:rPr>
+              <a:t>public </a:t>
+            </a:r>
+            <a:r>
+              <a:rPr lang="en-IN" b="1" dirty="0" err="1">
+                <a:solidFill>
+                  <a:srgbClr val="C00000"/>
+                </a:solidFill>
+              </a:rPr>
+              <a:t>IntegrationFlow</a:t>
+            </a:r>
+            <a:r>
+              <a:rPr lang="en-IN" b="1" dirty="0">
+                <a:solidFill>
+                  <a:srgbClr val="C00000"/>
+                </a:solidFill>
+              </a:rPr>
+              <a:t> </a:t>
+            </a:r>
+            <a:r>
+              <a:rPr lang="en-IN" b="1" dirty="0" err="1">
+                <a:solidFill>
+                  <a:srgbClr val="C00000"/>
+                </a:solidFill>
+              </a:rPr>
+              <a:t>outboundFlow</a:t>
+            </a:r>
+            <a:r>
+              <a:rPr lang="en-IN" b="1" dirty="0">
+                <a:solidFill>
+                  <a:srgbClr val="C00000"/>
+                </a:solidFill>
+              </a:rPr>
+              <a:t>() {</a:t>
+            </a:r>
+            <a:br>
+              <a:rPr lang="en-IN" b="1" dirty="0">
+                <a:solidFill>
+                  <a:srgbClr val="C00000"/>
+                </a:solidFill>
+              </a:rPr>
+            </a:br>
+            <a:r>
+              <a:rPr lang="en-IN" b="1" dirty="0">
+                <a:solidFill>
+                  <a:srgbClr val="C00000"/>
+                </a:solidFill>
+              </a:rPr>
+              <a:t>    return </a:t>
+            </a:r>
+            <a:r>
+              <a:rPr lang="en-IN" b="1" dirty="0" err="1">
+                <a:solidFill>
+                  <a:srgbClr val="C00000"/>
+                </a:solidFill>
+              </a:rPr>
+              <a:t>IntegrationFlows.from</a:t>
+            </a:r>
+            <a:r>
+              <a:rPr lang="en-IN" b="1" dirty="0">
+                <a:solidFill>
+                  <a:srgbClr val="C00000"/>
+                </a:solidFill>
+              </a:rPr>
+              <a:t>("</a:t>
+            </a:r>
+            <a:r>
+              <a:rPr lang="en-IN" b="1" dirty="0" err="1">
+                <a:solidFill>
+                  <a:srgbClr val="C00000"/>
+                </a:solidFill>
+              </a:rPr>
+              <a:t>orderChannel</a:t>
+            </a:r>
+            <a:r>
+              <a:rPr lang="en-IN" b="1" dirty="0">
+                <a:solidFill>
+                  <a:srgbClr val="C00000"/>
+                </a:solidFill>
+              </a:rPr>
+              <a:t>")</a:t>
+            </a:r>
+            <a:br>
+              <a:rPr lang="en-IN" b="1" dirty="0">
+                <a:solidFill>
+                  <a:srgbClr val="C00000"/>
+                </a:solidFill>
+              </a:rPr>
+            </a:br>
+            <a:r>
+              <a:rPr lang="en-IN" b="1" dirty="0">
+                <a:solidFill>
+                  <a:srgbClr val="C00000"/>
+                </a:solidFill>
+              </a:rPr>
+              <a:t>        .channel("order-out-0") // binding name</a:t>
+            </a:r>
+            <a:br>
+              <a:rPr lang="en-IN" b="1" dirty="0">
+                <a:solidFill>
+                  <a:srgbClr val="C00000"/>
+                </a:solidFill>
+              </a:rPr>
+            </a:br>
+            <a:r>
+              <a:rPr lang="en-IN" b="1" dirty="0">
+                <a:solidFill>
+                  <a:srgbClr val="C00000"/>
+                </a:solidFill>
+              </a:rPr>
+              <a:t>        .get();</a:t>
+            </a:r>
+            <a:br>
+              <a:rPr lang="en-IN" b="1" dirty="0">
+                <a:solidFill>
+                  <a:srgbClr val="C00000"/>
+                </a:solidFill>
+              </a:rPr>
+            </a:br>
+            <a:r>
+              <a:rPr lang="en-IN" b="1" dirty="0">
+                <a:solidFill>
+                  <a:srgbClr val="C00000"/>
+                </a:solidFill>
+              </a:rPr>
+              <a:t>}</a:t>
+            </a:r>
+          </a:p>
+          <a:p>
+            <a:r>
+              <a:rPr lang="en-IN" dirty="0"/>
+              <a:t> order-out-0 is a </a:t>
+            </a:r>
+            <a:r>
+              <a:rPr lang="en-IN" b="1" dirty="0"/>
+              <a:t>Spring Cloud Stream output binding</a:t>
+            </a:r>
+            <a:endParaRPr lang="en-IN" dirty="0"/>
+          </a:p>
+          <a:p>
+            <a:pPr marL="0" indent="0">
+              <a:buNone/>
+            </a:pPr>
+            <a:endParaRPr lang="en-IN" dirty="0"/>
+          </a:p>
+        </p:txBody>
+      </p:sp>
+    </p:spTree>
+    <p:extLst>
+      <p:ext uri="{BB962C8B-B14F-4D97-AF65-F5344CB8AC3E}">
+        <p14:creationId xmlns:p14="http://schemas.microsoft.com/office/powerpoint/2010/main" val="1186348188"/>
+      </p:ext>
+    </p:extLst>
+  </p:cSld>
+  <p:clrMapOvr>
+    <a:masterClrMapping/>
+  </p:clrMapOvr>
+</p:sld>
+</file>
+
 <file path=ppt/slides/slide4.xml><?xml version="1.0" encoding="utf-8"?>
 <p:sld xmlns:a="http://schemas.openxmlformats.org/drawingml/2006/main" xmlns:r="http://schemas.openxmlformats.org/officeDocument/2006/relationships" xmlns:p="http://schemas.openxmlformats.org/presentationml/2006/main">
   <p:cSld>
@@ -18277,6 +19223,1780 @@
     <p:extLst>
       <p:ext uri="{BB962C8B-B14F-4D97-AF65-F5344CB8AC3E}">
         <p14:creationId xmlns:p14="http://schemas.microsoft.com/office/powerpoint/2010/main" val="2878485018"/>
+      </p:ext>
+    </p:extLst>
+  </p:cSld>
+  <p:clrMapOvr>
+    <a:masterClrMapping/>
+  </p:clrMapOvr>
+</p:sld>
+</file>
+
+<file path=ppt/slides/slide40.xml><?xml version="1.0" encoding="utf-8"?>
+<p:sld xmlns:a="http://schemas.openxmlformats.org/drawingml/2006/main" xmlns:r="http://schemas.openxmlformats.org/officeDocument/2006/relationships" xmlns:p="http://schemas.openxmlformats.org/presentationml/2006/main">
+  <p:cSld>
+    <p:spTree>
+      <p:nvGrpSpPr>
+        <p:cNvPr id="1" name="">
+          <a:extLst>
+            <a:ext uri="{FF2B5EF4-FFF2-40B4-BE49-F238E27FC236}">
+              <a16:creationId xmlns:a16="http://schemas.microsoft.com/office/drawing/2014/main" id="{8D57F1DE-05D9-D180-8540-48D18287E785}"/>
+            </a:ext>
+          </a:extLst>
+        </p:cNvPr>
+        <p:cNvGrpSpPr/>
+        <p:nvPr/>
+      </p:nvGrpSpPr>
+      <p:grpSpPr>
+        <a:xfrm>
+          <a:off x="0" y="0"/>
+          <a:ext cx="0" cy="0"/>
+          <a:chOff x="0" y="0"/>
+          <a:chExt cx="0" cy="0"/>
+        </a:xfrm>
+      </p:grpSpPr>
+      <p:sp>
+        <p:nvSpPr>
+          <p:cNvPr id="2" name="Title 1">
+            <a:extLst>
+              <a:ext uri="{FF2B5EF4-FFF2-40B4-BE49-F238E27FC236}">
+                <a16:creationId xmlns:a16="http://schemas.microsoft.com/office/drawing/2014/main" id="{79B52705-8145-88AE-C967-BBFEE051E4B9}"/>
+              </a:ext>
+            </a:extLst>
+          </p:cNvPr>
+          <p:cNvSpPr>
+            <a:spLocks noGrp="1"/>
+          </p:cNvSpPr>
+          <p:nvPr>
+            <p:ph type="title"/>
+          </p:nvPr>
+        </p:nvSpPr>
+        <p:spPr/>
+        <p:txBody>
+          <a:bodyPr/>
+          <a:lstStyle/>
+          <a:p>
+            <a:r>
+              <a:rPr lang="en-IN" b="1" dirty="0"/>
+              <a:t>Producer Service (Integration → RabbitMQ)</a:t>
+            </a:r>
+            <a:endParaRPr lang="en-IN" dirty="0"/>
+          </a:p>
+        </p:txBody>
+      </p:sp>
+      <p:sp>
+        <p:nvSpPr>
+          <p:cNvPr id="3" name="Content Placeholder 2">
+            <a:extLst>
+              <a:ext uri="{FF2B5EF4-FFF2-40B4-BE49-F238E27FC236}">
+                <a16:creationId xmlns:a16="http://schemas.microsoft.com/office/drawing/2014/main" id="{3E4D5EF2-3F33-8C89-067E-C0ED31AC6146}"/>
+              </a:ext>
+            </a:extLst>
+          </p:cNvPr>
+          <p:cNvSpPr>
+            <a:spLocks noGrp="1"/>
+          </p:cNvSpPr>
+          <p:nvPr>
+            <p:ph idx="1"/>
+          </p:nvPr>
+        </p:nvSpPr>
+        <p:spPr>
+          <a:xfrm>
+            <a:off x="1154954" y="2603500"/>
+            <a:ext cx="10394847" cy="3743512"/>
+          </a:xfrm>
+        </p:spPr>
+        <p:txBody>
+          <a:bodyPr/>
+          <a:lstStyle/>
+          <a:p>
+            <a:pPr marL="0" indent="0">
+              <a:buNone/>
+            </a:pPr>
+            <a:r>
+              <a:rPr lang="en-US" b="1" dirty="0"/>
+              <a:t>Step 3: Stream Configuration</a:t>
+            </a:r>
+          </a:p>
+          <a:p>
+            <a:r>
+              <a:rPr lang="en-US" dirty="0"/>
+              <a:t>spring:</a:t>
+            </a:r>
+            <a:br>
+              <a:rPr lang="en-US" dirty="0"/>
+            </a:br>
+            <a:r>
+              <a:rPr lang="en-US" dirty="0"/>
+              <a:t>  cloud:</a:t>
+            </a:r>
+            <a:br>
+              <a:rPr lang="en-US" dirty="0"/>
+            </a:br>
+            <a:r>
+              <a:rPr lang="en-US" dirty="0"/>
+              <a:t>    stream:</a:t>
+            </a:r>
+            <a:br>
+              <a:rPr lang="en-US" dirty="0"/>
+            </a:br>
+            <a:r>
+              <a:rPr lang="en-US" dirty="0"/>
+              <a:t>      bindings:</a:t>
+            </a:r>
+            <a:br>
+              <a:rPr lang="en-US" dirty="0"/>
+            </a:br>
+            <a:r>
+              <a:rPr lang="en-US" dirty="0"/>
+              <a:t>        order-out-0:</a:t>
+            </a:r>
+            <a:br>
+              <a:rPr lang="en-US" dirty="0"/>
+            </a:br>
+            <a:r>
+              <a:rPr lang="en-US" dirty="0"/>
+              <a:t>          destination: orders</a:t>
+            </a:r>
+            <a:br>
+              <a:rPr lang="en-US" dirty="0"/>
+            </a:br>
+            <a:r>
+              <a:rPr lang="en-US" dirty="0"/>
+              <a:t>      rabbit:</a:t>
+            </a:r>
+            <a:br>
+              <a:rPr lang="en-US" dirty="0"/>
+            </a:br>
+            <a:r>
+              <a:rPr lang="en-US" dirty="0"/>
+              <a:t>        bindings:</a:t>
+            </a:r>
+            <a:br>
+              <a:rPr lang="en-US" dirty="0"/>
+            </a:br>
+            <a:r>
+              <a:rPr lang="en-US" dirty="0"/>
+              <a:t>          order-out-0:</a:t>
+            </a:r>
+            <a:br>
+              <a:rPr lang="en-US" dirty="0"/>
+            </a:br>
+            <a:r>
+              <a:rPr lang="en-US" dirty="0"/>
+              <a:t>            producer:</a:t>
+            </a:r>
+            <a:br>
+              <a:rPr lang="en-US" dirty="0"/>
+            </a:br>
+            <a:r>
+              <a:rPr lang="en-US" dirty="0"/>
+              <a:t>              </a:t>
+            </a:r>
+            <a:r>
+              <a:rPr lang="en-US" dirty="0" err="1"/>
+              <a:t>routingKeyExpression</a:t>
+            </a:r>
+            <a:r>
+              <a:rPr lang="en-US" dirty="0"/>
+              <a:t>: '''</a:t>
+            </a:r>
+            <a:r>
+              <a:rPr lang="en-US" dirty="0" err="1"/>
+              <a:t>order.created</a:t>
+            </a:r>
+            <a:r>
+              <a:rPr lang="en-US" dirty="0"/>
+              <a:t>'''</a:t>
+            </a:r>
+          </a:p>
+          <a:p>
+            <a:endParaRPr lang="en-IN" dirty="0"/>
+          </a:p>
+        </p:txBody>
+      </p:sp>
+    </p:spTree>
+    <p:extLst>
+      <p:ext uri="{BB962C8B-B14F-4D97-AF65-F5344CB8AC3E}">
+        <p14:creationId xmlns:p14="http://schemas.microsoft.com/office/powerpoint/2010/main" val="3494164828"/>
+      </p:ext>
+    </p:extLst>
+  </p:cSld>
+  <p:clrMapOvr>
+    <a:masterClrMapping/>
+  </p:clrMapOvr>
+</p:sld>
+</file>
+
+<file path=ppt/slides/slide41.xml><?xml version="1.0" encoding="utf-8"?>
+<p:sld xmlns:a="http://schemas.openxmlformats.org/drawingml/2006/main" xmlns:r="http://schemas.openxmlformats.org/officeDocument/2006/relationships" xmlns:p="http://schemas.openxmlformats.org/presentationml/2006/main">
+  <p:cSld>
+    <p:spTree>
+      <p:nvGrpSpPr>
+        <p:cNvPr id="1" name="">
+          <a:extLst>
+            <a:ext uri="{FF2B5EF4-FFF2-40B4-BE49-F238E27FC236}">
+              <a16:creationId xmlns:a16="http://schemas.microsoft.com/office/drawing/2014/main" id="{DB6897D6-06F8-8D5E-0DE9-9C09A0656A3E}"/>
+            </a:ext>
+          </a:extLst>
+        </p:cNvPr>
+        <p:cNvGrpSpPr/>
+        <p:nvPr/>
+      </p:nvGrpSpPr>
+      <p:grpSpPr>
+        <a:xfrm>
+          <a:off x="0" y="0"/>
+          <a:ext cx="0" cy="0"/>
+          <a:chOff x="0" y="0"/>
+          <a:chExt cx="0" cy="0"/>
+        </a:xfrm>
+      </p:grpSpPr>
+      <p:sp>
+        <p:nvSpPr>
+          <p:cNvPr id="2" name="Title 1">
+            <a:extLst>
+              <a:ext uri="{FF2B5EF4-FFF2-40B4-BE49-F238E27FC236}">
+                <a16:creationId xmlns:a16="http://schemas.microsoft.com/office/drawing/2014/main" id="{728A33D3-9797-4ADF-D3B1-6B16FBBD5A61}"/>
+              </a:ext>
+            </a:extLst>
+          </p:cNvPr>
+          <p:cNvSpPr>
+            <a:spLocks noGrp="1"/>
+          </p:cNvSpPr>
+          <p:nvPr>
+            <p:ph type="title"/>
+          </p:nvPr>
+        </p:nvSpPr>
+        <p:spPr/>
+        <p:txBody>
+          <a:bodyPr/>
+          <a:lstStyle/>
+          <a:p>
+            <a:r>
+              <a:rPr lang="en-IN" b="1" dirty="0"/>
+              <a:t>Consumer Service (RabbitMQ → Integration)</a:t>
+            </a:r>
+            <a:endParaRPr lang="en-IN" dirty="0"/>
+          </a:p>
+        </p:txBody>
+      </p:sp>
+      <p:sp>
+        <p:nvSpPr>
+          <p:cNvPr id="3" name="Content Placeholder 2">
+            <a:extLst>
+              <a:ext uri="{FF2B5EF4-FFF2-40B4-BE49-F238E27FC236}">
+                <a16:creationId xmlns:a16="http://schemas.microsoft.com/office/drawing/2014/main" id="{C092804A-F39F-1D65-E058-B608BEBB1881}"/>
+              </a:ext>
+            </a:extLst>
+          </p:cNvPr>
+          <p:cNvSpPr>
+            <a:spLocks noGrp="1"/>
+          </p:cNvSpPr>
+          <p:nvPr>
+            <p:ph idx="1"/>
+          </p:nvPr>
+        </p:nvSpPr>
+        <p:spPr>
+          <a:xfrm>
+            <a:off x="1154954" y="2603500"/>
+            <a:ext cx="10394847" cy="3743512"/>
+          </a:xfrm>
+        </p:spPr>
+        <p:txBody>
+          <a:bodyPr>
+            <a:normAutofit lnSpcReduction="10000"/>
+          </a:bodyPr>
+          <a:lstStyle/>
+          <a:p>
+            <a:pPr marL="0" indent="0">
+              <a:buNone/>
+            </a:pPr>
+            <a:r>
+              <a:rPr lang="en-IN" b="1" dirty="0"/>
+              <a:t>Step 1: Stream Consumer Binding</a:t>
+            </a:r>
+          </a:p>
+          <a:p>
+            <a:pPr marL="0" indent="0">
+              <a:buNone/>
+            </a:pPr>
+            <a:r>
+              <a:rPr lang="en-IN" b="1" dirty="0"/>
+              <a:t>spring:</a:t>
+            </a:r>
+            <a:br>
+              <a:rPr lang="en-IN" b="1" dirty="0"/>
+            </a:br>
+            <a:r>
+              <a:rPr lang="en-IN" b="1" dirty="0"/>
+              <a:t>  cloud:</a:t>
+            </a:r>
+            <a:br>
+              <a:rPr lang="en-IN" b="1" dirty="0"/>
+            </a:br>
+            <a:r>
+              <a:rPr lang="en-IN" b="1" dirty="0"/>
+              <a:t>    stream:</a:t>
+            </a:r>
+            <a:br>
+              <a:rPr lang="en-IN" b="1" dirty="0"/>
+            </a:br>
+            <a:r>
+              <a:rPr lang="en-IN" b="1" dirty="0"/>
+              <a:t>      bindings:</a:t>
+            </a:r>
+            <a:br>
+              <a:rPr lang="en-IN" b="1" dirty="0"/>
+            </a:br>
+            <a:r>
+              <a:rPr lang="en-IN" b="1" dirty="0"/>
+              <a:t>        order-in-0:</a:t>
+            </a:r>
+            <a:br>
+              <a:rPr lang="en-IN" b="1" dirty="0"/>
+            </a:br>
+            <a:r>
+              <a:rPr lang="en-IN" b="1" dirty="0"/>
+              <a:t>          destination: orders</a:t>
+            </a:r>
+            <a:br>
+              <a:rPr lang="en-IN" b="1" dirty="0"/>
+            </a:br>
+            <a:r>
+              <a:rPr lang="en-IN" b="1" dirty="0"/>
+              <a:t>          group: inventory</a:t>
+            </a:r>
+            <a:br>
+              <a:rPr lang="en-IN" b="1" dirty="0"/>
+            </a:br>
+            <a:r>
+              <a:rPr lang="en-IN" b="1" dirty="0"/>
+              <a:t>      rabbit:</a:t>
+            </a:r>
+            <a:br>
+              <a:rPr lang="en-IN" b="1" dirty="0"/>
+            </a:br>
+            <a:r>
+              <a:rPr lang="en-IN" b="1" dirty="0"/>
+              <a:t>        bindings:</a:t>
+            </a:r>
+            <a:br>
+              <a:rPr lang="en-IN" b="1" dirty="0"/>
+            </a:br>
+            <a:r>
+              <a:rPr lang="en-IN" b="1" dirty="0"/>
+              <a:t>          order-in-0:</a:t>
+            </a:r>
+            <a:br>
+              <a:rPr lang="en-IN" b="1" dirty="0"/>
+            </a:br>
+            <a:r>
+              <a:rPr lang="en-IN" b="1" dirty="0"/>
+              <a:t>            consumer:</a:t>
+            </a:r>
+            <a:br>
+              <a:rPr lang="en-IN" b="1" dirty="0"/>
+            </a:br>
+            <a:r>
+              <a:rPr lang="en-IN" b="1" dirty="0"/>
+              <a:t>              </a:t>
+            </a:r>
+            <a:r>
+              <a:rPr lang="en-IN" b="1" dirty="0" err="1"/>
+              <a:t>bindingRoutingKey</a:t>
+            </a:r>
+            <a:r>
+              <a:rPr lang="en-IN" b="1" dirty="0"/>
+              <a:t>: order.*</a:t>
+            </a:r>
+          </a:p>
+          <a:p>
+            <a:endParaRPr lang="en-IN" dirty="0"/>
+          </a:p>
+        </p:txBody>
+      </p:sp>
+    </p:spTree>
+    <p:extLst>
+      <p:ext uri="{BB962C8B-B14F-4D97-AF65-F5344CB8AC3E}">
+        <p14:creationId xmlns:p14="http://schemas.microsoft.com/office/powerpoint/2010/main" val="734106403"/>
+      </p:ext>
+    </p:extLst>
+  </p:cSld>
+  <p:clrMapOvr>
+    <a:masterClrMapping/>
+  </p:clrMapOvr>
+</p:sld>
+</file>
+
+<file path=ppt/slides/slide42.xml><?xml version="1.0" encoding="utf-8"?>
+<p:sld xmlns:a="http://schemas.openxmlformats.org/drawingml/2006/main" xmlns:r="http://schemas.openxmlformats.org/officeDocument/2006/relationships" xmlns:p="http://schemas.openxmlformats.org/presentationml/2006/main">
+  <p:cSld>
+    <p:spTree>
+      <p:nvGrpSpPr>
+        <p:cNvPr id="1" name="">
+          <a:extLst>
+            <a:ext uri="{FF2B5EF4-FFF2-40B4-BE49-F238E27FC236}">
+              <a16:creationId xmlns:a16="http://schemas.microsoft.com/office/drawing/2014/main" id="{4617E259-456D-760A-5A8B-C43AC274DFE1}"/>
+            </a:ext>
+          </a:extLst>
+        </p:cNvPr>
+        <p:cNvGrpSpPr/>
+        <p:nvPr/>
+      </p:nvGrpSpPr>
+      <p:grpSpPr>
+        <a:xfrm>
+          <a:off x="0" y="0"/>
+          <a:ext cx="0" cy="0"/>
+          <a:chOff x="0" y="0"/>
+          <a:chExt cx="0" cy="0"/>
+        </a:xfrm>
+      </p:grpSpPr>
+      <p:sp>
+        <p:nvSpPr>
+          <p:cNvPr id="2" name="Title 1">
+            <a:extLst>
+              <a:ext uri="{FF2B5EF4-FFF2-40B4-BE49-F238E27FC236}">
+                <a16:creationId xmlns:a16="http://schemas.microsoft.com/office/drawing/2014/main" id="{64057627-B06F-425A-3369-8A62C0D88CCB}"/>
+              </a:ext>
+            </a:extLst>
+          </p:cNvPr>
+          <p:cNvSpPr>
+            <a:spLocks noGrp="1"/>
+          </p:cNvSpPr>
+          <p:nvPr>
+            <p:ph type="title"/>
+          </p:nvPr>
+        </p:nvSpPr>
+        <p:spPr/>
+        <p:txBody>
+          <a:bodyPr/>
+          <a:lstStyle/>
+          <a:p>
+            <a:r>
+              <a:rPr lang="en-IN" b="1" dirty="0"/>
+              <a:t>Consumer Service (RabbitMQ → Integration)</a:t>
+            </a:r>
+            <a:endParaRPr lang="en-IN" dirty="0"/>
+          </a:p>
+        </p:txBody>
+      </p:sp>
+      <p:sp>
+        <p:nvSpPr>
+          <p:cNvPr id="3" name="Content Placeholder 2">
+            <a:extLst>
+              <a:ext uri="{FF2B5EF4-FFF2-40B4-BE49-F238E27FC236}">
+                <a16:creationId xmlns:a16="http://schemas.microsoft.com/office/drawing/2014/main" id="{603DBC65-EEDC-6A42-8872-FEBA7DB34097}"/>
+              </a:ext>
+            </a:extLst>
+          </p:cNvPr>
+          <p:cNvSpPr>
+            <a:spLocks noGrp="1"/>
+          </p:cNvSpPr>
+          <p:nvPr>
+            <p:ph idx="1"/>
+          </p:nvPr>
+        </p:nvSpPr>
+        <p:spPr>
+          <a:xfrm>
+            <a:off x="1154954" y="2603500"/>
+            <a:ext cx="10394847" cy="3743512"/>
+          </a:xfrm>
+        </p:spPr>
+        <p:txBody>
+          <a:bodyPr/>
+          <a:lstStyle/>
+          <a:p>
+            <a:pPr marL="0" indent="0">
+              <a:buNone/>
+            </a:pPr>
+            <a:r>
+              <a:rPr lang="en-IN" b="1" dirty="0"/>
+              <a:t>Step 2: Bridge to Integration Flow</a:t>
+            </a:r>
+          </a:p>
+          <a:p>
+            <a:pPr marL="0" indent="0">
+              <a:buNone/>
+            </a:pPr>
+            <a:r>
+              <a:rPr lang="en-IN" b="1" dirty="0">
+                <a:solidFill>
+                  <a:srgbClr val="C00000"/>
+                </a:solidFill>
+              </a:rPr>
+              <a:t>@Bean</a:t>
+            </a:r>
+            <a:br>
+              <a:rPr lang="en-IN" b="1" dirty="0">
+                <a:solidFill>
+                  <a:srgbClr val="C00000"/>
+                </a:solidFill>
+              </a:rPr>
+            </a:br>
+            <a:r>
+              <a:rPr lang="en-IN" b="1" dirty="0">
+                <a:solidFill>
+                  <a:srgbClr val="C00000"/>
+                </a:solidFill>
+              </a:rPr>
+              <a:t>public </a:t>
+            </a:r>
+            <a:r>
+              <a:rPr lang="en-IN" b="1" dirty="0" err="1">
+                <a:solidFill>
+                  <a:srgbClr val="C00000"/>
+                </a:solidFill>
+              </a:rPr>
+              <a:t>IntegrationFlow</a:t>
+            </a:r>
+            <a:r>
+              <a:rPr lang="en-IN" b="1" dirty="0">
+                <a:solidFill>
+                  <a:srgbClr val="C00000"/>
+                </a:solidFill>
+              </a:rPr>
+              <a:t> </a:t>
+            </a:r>
+            <a:r>
+              <a:rPr lang="en-IN" b="1" dirty="0" err="1">
+                <a:solidFill>
+                  <a:srgbClr val="C00000"/>
+                </a:solidFill>
+              </a:rPr>
+              <a:t>inboundFlow</a:t>
+            </a:r>
+            <a:r>
+              <a:rPr lang="en-IN" b="1" dirty="0">
+                <a:solidFill>
+                  <a:srgbClr val="C00000"/>
+                </a:solidFill>
+              </a:rPr>
+              <a:t>() {</a:t>
+            </a:r>
+            <a:br>
+              <a:rPr lang="en-IN" b="1" dirty="0">
+                <a:solidFill>
+                  <a:srgbClr val="C00000"/>
+                </a:solidFill>
+              </a:rPr>
+            </a:br>
+            <a:r>
+              <a:rPr lang="en-IN" b="1" dirty="0">
+                <a:solidFill>
+                  <a:srgbClr val="C00000"/>
+                </a:solidFill>
+              </a:rPr>
+              <a:t>    return </a:t>
+            </a:r>
+            <a:r>
+              <a:rPr lang="en-IN" b="1" dirty="0" err="1">
+                <a:solidFill>
+                  <a:srgbClr val="C00000"/>
+                </a:solidFill>
+              </a:rPr>
+              <a:t>IntegrationFlows.from</a:t>
+            </a:r>
+            <a:r>
+              <a:rPr lang="en-IN" b="1" dirty="0">
+                <a:solidFill>
+                  <a:srgbClr val="C00000"/>
+                </a:solidFill>
+              </a:rPr>
+              <a:t>("order-in-0")</a:t>
+            </a:r>
+            <a:br>
+              <a:rPr lang="en-IN" b="1" dirty="0">
+                <a:solidFill>
+                  <a:srgbClr val="C00000"/>
+                </a:solidFill>
+              </a:rPr>
+            </a:br>
+            <a:r>
+              <a:rPr lang="en-IN" b="1" dirty="0">
+                <a:solidFill>
+                  <a:srgbClr val="C00000"/>
+                </a:solidFill>
+              </a:rPr>
+              <a:t>        .transform(message -&gt; convert(message))</a:t>
+            </a:r>
+            <a:br>
+              <a:rPr lang="en-IN" b="1" dirty="0">
+                <a:solidFill>
+                  <a:srgbClr val="C00000"/>
+                </a:solidFill>
+              </a:rPr>
+            </a:br>
+            <a:r>
+              <a:rPr lang="en-IN" b="1" dirty="0">
+                <a:solidFill>
+                  <a:srgbClr val="C00000"/>
+                </a:solidFill>
+              </a:rPr>
+              <a:t>        .handle(</a:t>
+            </a:r>
+            <a:r>
+              <a:rPr lang="en-IN" b="1" dirty="0" err="1">
+                <a:solidFill>
+                  <a:srgbClr val="C00000"/>
+                </a:solidFill>
+              </a:rPr>
+              <a:t>orderService</a:t>
+            </a:r>
+            <a:r>
+              <a:rPr lang="en-IN" b="1" dirty="0">
+                <a:solidFill>
+                  <a:srgbClr val="C00000"/>
+                </a:solidFill>
+              </a:rPr>
+              <a:t>, "</a:t>
+            </a:r>
+            <a:r>
+              <a:rPr lang="en-IN" b="1" dirty="0" err="1">
+                <a:solidFill>
+                  <a:srgbClr val="C00000"/>
+                </a:solidFill>
+              </a:rPr>
+              <a:t>processOrder</a:t>
+            </a:r>
+            <a:r>
+              <a:rPr lang="en-IN" b="1" dirty="0">
+                <a:solidFill>
+                  <a:srgbClr val="C00000"/>
+                </a:solidFill>
+              </a:rPr>
+              <a:t>")</a:t>
+            </a:r>
+            <a:br>
+              <a:rPr lang="en-IN" b="1" dirty="0">
+                <a:solidFill>
+                  <a:srgbClr val="C00000"/>
+                </a:solidFill>
+              </a:rPr>
+            </a:br>
+            <a:r>
+              <a:rPr lang="en-IN" b="1" dirty="0">
+                <a:solidFill>
+                  <a:srgbClr val="C00000"/>
+                </a:solidFill>
+              </a:rPr>
+              <a:t>        .get();</a:t>
+            </a:r>
+            <a:br>
+              <a:rPr lang="en-IN" b="1" dirty="0">
+                <a:solidFill>
+                  <a:srgbClr val="C00000"/>
+                </a:solidFill>
+              </a:rPr>
+            </a:br>
+            <a:r>
+              <a:rPr lang="en-IN" b="1" dirty="0">
+                <a:solidFill>
+                  <a:srgbClr val="C00000"/>
+                </a:solidFill>
+              </a:rPr>
+              <a:t>}</a:t>
+            </a:r>
+          </a:p>
+          <a:p>
+            <a:endParaRPr lang="en-IN" dirty="0"/>
+          </a:p>
+        </p:txBody>
+      </p:sp>
+    </p:spTree>
+    <p:extLst>
+      <p:ext uri="{BB962C8B-B14F-4D97-AF65-F5344CB8AC3E}">
+        <p14:creationId xmlns:p14="http://schemas.microsoft.com/office/powerpoint/2010/main" val="2494226896"/>
+      </p:ext>
+    </p:extLst>
+  </p:cSld>
+  <p:clrMapOvr>
+    <a:masterClrMapping/>
+  </p:clrMapOvr>
+</p:sld>
+</file>
+
+<file path=ppt/slides/slide43.xml><?xml version="1.0" encoding="utf-8"?>
+<p:sld xmlns:a="http://schemas.openxmlformats.org/drawingml/2006/main" xmlns:r="http://schemas.openxmlformats.org/officeDocument/2006/relationships" xmlns:p="http://schemas.openxmlformats.org/presentationml/2006/main">
+  <p:cSld>
+    <p:spTree>
+      <p:nvGrpSpPr>
+        <p:cNvPr id="1" name="">
+          <a:extLst>
+            <a:ext uri="{FF2B5EF4-FFF2-40B4-BE49-F238E27FC236}">
+              <a16:creationId xmlns:a16="http://schemas.microsoft.com/office/drawing/2014/main" id="{B579A4A9-86F8-7B6B-6544-17BF925A8145}"/>
+            </a:ext>
+          </a:extLst>
+        </p:cNvPr>
+        <p:cNvGrpSpPr/>
+        <p:nvPr/>
+      </p:nvGrpSpPr>
+      <p:grpSpPr>
+        <a:xfrm>
+          <a:off x="0" y="0"/>
+          <a:ext cx="0" cy="0"/>
+          <a:chOff x="0" y="0"/>
+          <a:chExt cx="0" cy="0"/>
+        </a:xfrm>
+      </p:grpSpPr>
+      <p:sp>
+        <p:nvSpPr>
+          <p:cNvPr id="2" name="Title 1">
+            <a:extLst>
+              <a:ext uri="{FF2B5EF4-FFF2-40B4-BE49-F238E27FC236}">
+                <a16:creationId xmlns:a16="http://schemas.microsoft.com/office/drawing/2014/main" id="{8A1E1B6F-F3D2-10A9-BFBD-EEC9897BE868}"/>
+              </a:ext>
+            </a:extLst>
+          </p:cNvPr>
+          <p:cNvSpPr>
+            <a:spLocks noGrp="1"/>
+          </p:cNvSpPr>
+          <p:nvPr>
+            <p:ph type="title"/>
+          </p:nvPr>
+        </p:nvSpPr>
+        <p:spPr/>
+        <p:txBody>
+          <a:bodyPr/>
+          <a:lstStyle/>
+          <a:p>
+            <a:r>
+              <a:rPr lang="en-IN" b="1" dirty="0"/>
+              <a:t>Full Flow</a:t>
+            </a:r>
+            <a:endParaRPr lang="en-IN" dirty="0"/>
+          </a:p>
+        </p:txBody>
+      </p:sp>
+      <p:sp>
+        <p:nvSpPr>
+          <p:cNvPr id="3" name="Content Placeholder 2">
+            <a:extLst>
+              <a:ext uri="{FF2B5EF4-FFF2-40B4-BE49-F238E27FC236}">
+                <a16:creationId xmlns:a16="http://schemas.microsoft.com/office/drawing/2014/main" id="{EE6C0D44-5A29-19E1-9ED1-425D472B2B69}"/>
+              </a:ext>
+            </a:extLst>
+          </p:cNvPr>
+          <p:cNvSpPr>
+            <a:spLocks noGrp="1"/>
+          </p:cNvSpPr>
+          <p:nvPr>
+            <p:ph idx="1"/>
+          </p:nvPr>
+        </p:nvSpPr>
+        <p:spPr>
+          <a:xfrm>
+            <a:off x="1154954" y="2603500"/>
+            <a:ext cx="10394847" cy="3743512"/>
+          </a:xfrm>
+        </p:spPr>
+        <p:txBody>
+          <a:bodyPr>
+            <a:normAutofit fontScale="92500" lnSpcReduction="10000"/>
+          </a:bodyPr>
+          <a:lstStyle/>
+          <a:p>
+            <a:pPr marL="0" indent="0">
+              <a:buNone/>
+            </a:pPr>
+            <a:r>
+              <a:rPr lang="en-IN" b="1" dirty="0"/>
+              <a:t>📤 Producer Side</a:t>
+            </a:r>
+          </a:p>
+          <a:p>
+            <a:r>
+              <a:rPr lang="en-IN" dirty="0"/>
+              <a:t>REST API → </a:t>
+            </a:r>
+            <a:r>
+              <a:rPr lang="en-IN" dirty="0" err="1"/>
+              <a:t>orderChannel</a:t>
+            </a:r>
+            <a:br>
+              <a:rPr lang="en-IN" dirty="0"/>
+            </a:br>
+            <a:r>
+              <a:rPr lang="en-IN" dirty="0"/>
+              <a:t>          → transform (add metadata)</a:t>
+            </a:r>
+            <a:br>
+              <a:rPr lang="en-IN" dirty="0"/>
+            </a:br>
+            <a:r>
+              <a:rPr lang="en-IN" dirty="0"/>
+              <a:t>          → filter (valid orders only)</a:t>
+            </a:r>
+            <a:br>
+              <a:rPr lang="en-IN" dirty="0"/>
+            </a:br>
+            <a:r>
+              <a:rPr lang="en-IN" dirty="0"/>
+              <a:t>          → order-out-0</a:t>
+            </a:r>
+            <a:br>
+              <a:rPr lang="en-IN" dirty="0"/>
+            </a:br>
+            <a:r>
+              <a:rPr lang="en-IN" dirty="0"/>
+              <a:t>          → RabbitMQ exchange (orders)</a:t>
+            </a:r>
+          </a:p>
+          <a:p>
+            <a:pPr marL="0" indent="0">
+              <a:buNone/>
+            </a:pPr>
+            <a:r>
+              <a:rPr lang="en-IN" b="1" dirty="0"/>
+              <a:t>📥 Consumer Side</a:t>
+            </a:r>
+          </a:p>
+          <a:p>
+            <a:r>
+              <a:rPr lang="en-IN" dirty="0"/>
+              <a:t>RabbitMQ exchange</a:t>
+            </a:r>
+            <a:br>
+              <a:rPr lang="en-IN" dirty="0"/>
+            </a:br>
+            <a:r>
+              <a:rPr lang="en-IN" dirty="0"/>
+              <a:t>   → queue (</a:t>
+            </a:r>
+            <a:r>
+              <a:rPr lang="en-IN" dirty="0" err="1"/>
+              <a:t>orders.inventory</a:t>
+            </a:r>
+            <a:r>
+              <a:rPr lang="en-IN" dirty="0"/>
+              <a:t>)</a:t>
+            </a:r>
+            <a:br>
+              <a:rPr lang="en-IN" dirty="0"/>
+            </a:br>
+            <a:r>
+              <a:rPr lang="en-IN" dirty="0"/>
+              <a:t>   → order-in-0</a:t>
+            </a:r>
+            <a:br>
+              <a:rPr lang="en-IN" dirty="0"/>
+            </a:br>
+            <a:r>
+              <a:rPr lang="en-IN" dirty="0"/>
+              <a:t>   → transform (deserialize)</a:t>
+            </a:r>
+            <a:br>
+              <a:rPr lang="en-IN" dirty="0"/>
+            </a:br>
+            <a:r>
+              <a:rPr lang="en-IN" dirty="0"/>
+              <a:t>   → service activator</a:t>
+            </a:r>
+            <a:br>
+              <a:rPr lang="en-IN" dirty="0"/>
+            </a:br>
+            <a:r>
+              <a:rPr lang="en-IN" dirty="0"/>
+              <a:t>   → DB update</a:t>
+            </a:r>
+          </a:p>
+          <a:p>
+            <a:endParaRPr lang="en-IN" dirty="0"/>
+          </a:p>
+        </p:txBody>
+      </p:sp>
+    </p:spTree>
+    <p:extLst>
+      <p:ext uri="{BB962C8B-B14F-4D97-AF65-F5344CB8AC3E}">
+        <p14:creationId xmlns:p14="http://schemas.microsoft.com/office/powerpoint/2010/main" val="575254662"/>
+      </p:ext>
+    </p:extLst>
+  </p:cSld>
+  <p:clrMapOvr>
+    <a:masterClrMapping/>
+  </p:clrMapOvr>
+</p:sld>
+</file>
+
+<file path=ppt/slides/slide44.xml><?xml version="1.0" encoding="utf-8"?>
+<p:sld xmlns:a="http://schemas.openxmlformats.org/drawingml/2006/main" xmlns:r="http://schemas.openxmlformats.org/officeDocument/2006/relationships" xmlns:p="http://schemas.openxmlformats.org/presentationml/2006/main">
+  <p:cSld>
+    <p:spTree>
+      <p:nvGrpSpPr>
+        <p:cNvPr id="1" name="">
+          <a:extLst>
+            <a:ext uri="{FF2B5EF4-FFF2-40B4-BE49-F238E27FC236}">
+              <a16:creationId xmlns:a16="http://schemas.microsoft.com/office/drawing/2014/main" id="{21825A1D-D205-9C80-3667-170662E4D76C}"/>
+            </a:ext>
+          </a:extLst>
+        </p:cNvPr>
+        <p:cNvGrpSpPr/>
+        <p:nvPr/>
+      </p:nvGrpSpPr>
+      <p:grpSpPr>
+        <a:xfrm>
+          <a:off x="0" y="0"/>
+          <a:ext cx="0" cy="0"/>
+          <a:chOff x="0" y="0"/>
+          <a:chExt cx="0" cy="0"/>
+        </a:xfrm>
+      </p:grpSpPr>
+      <p:sp>
+        <p:nvSpPr>
+          <p:cNvPr id="2" name="Title 1">
+            <a:extLst>
+              <a:ext uri="{FF2B5EF4-FFF2-40B4-BE49-F238E27FC236}">
+                <a16:creationId xmlns:a16="http://schemas.microsoft.com/office/drawing/2014/main" id="{FB2AB030-33E0-22DD-8908-113351A036A1}"/>
+              </a:ext>
+            </a:extLst>
+          </p:cNvPr>
+          <p:cNvSpPr>
+            <a:spLocks noGrp="1"/>
+          </p:cNvSpPr>
+          <p:nvPr>
+            <p:ph type="title"/>
+          </p:nvPr>
+        </p:nvSpPr>
+        <p:spPr/>
+        <p:txBody>
+          <a:bodyPr/>
+          <a:lstStyle/>
+          <a:p>
+            <a:r>
+              <a:rPr lang="en-IN" b="1" dirty="0"/>
+              <a:t>What Happens Internally</a:t>
+            </a:r>
+            <a:endParaRPr lang="en-IN" dirty="0"/>
+          </a:p>
+        </p:txBody>
+      </p:sp>
+      <p:sp>
+        <p:nvSpPr>
+          <p:cNvPr id="3" name="Content Placeholder 2">
+            <a:extLst>
+              <a:ext uri="{FF2B5EF4-FFF2-40B4-BE49-F238E27FC236}">
+                <a16:creationId xmlns:a16="http://schemas.microsoft.com/office/drawing/2014/main" id="{CA2F46AF-A1DF-3940-3FB1-705A7DD94DE2}"/>
+              </a:ext>
+            </a:extLst>
+          </p:cNvPr>
+          <p:cNvSpPr>
+            <a:spLocks noGrp="1"/>
+          </p:cNvSpPr>
+          <p:nvPr>
+            <p:ph idx="1"/>
+          </p:nvPr>
+        </p:nvSpPr>
+        <p:spPr>
+          <a:xfrm>
+            <a:off x="1154954" y="2603500"/>
+            <a:ext cx="10394847" cy="3743512"/>
+          </a:xfrm>
+        </p:spPr>
+        <p:txBody>
+          <a:bodyPr>
+            <a:normAutofit/>
+          </a:bodyPr>
+          <a:lstStyle/>
+          <a:p>
+            <a:pPr marL="0" indent="0">
+              <a:buNone/>
+            </a:pPr>
+            <a:r>
+              <a:rPr lang="en-IN" b="1" dirty="0"/>
+              <a:t>🧠 Producer Side</a:t>
+            </a:r>
+          </a:p>
+          <a:p>
+            <a:r>
+              <a:rPr lang="en-IN" dirty="0"/>
+              <a:t>Message enters </a:t>
+            </a:r>
+            <a:r>
+              <a:rPr lang="en-IN" dirty="0" err="1"/>
+              <a:t>orderChannel</a:t>
+            </a:r>
+            <a:r>
+              <a:rPr lang="en-IN" dirty="0"/>
+              <a:t> </a:t>
+            </a:r>
+          </a:p>
+          <a:p>
+            <a:r>
+              <a:rPr lang="en-IN" dirty="0"/>
+              <a:t>Spring Integration processes it </a:t>
+            </a:r>
+          </a:p>
+          <a:p>
+            <a:r>
+              <a:rPr lang="en-IN" dirty="0"/>
+              <a:t>Routed to order-out-0 </a:t>
+            </a:r>
+          </a:p>
+          <a:p>
+            <a:r>
+              <a:rPr lang="en-IN" dirty="0"/>
+              <a:t>Binder sends to RabbitMQ exchange </a:t>
+            </a:r>
+          </a:p>
+          <a:p>
+            <a:pPr marL="0" indent="0">
+              <a:buNone/>
+            </a:pPr>
+            <a:r>
+              <a:rPr lang="en-IN" b="1" dirty="0"/>
+              <a:t>🧠 Consumer Side</a:t>
+            </a:r>
+          </a:p>
+          <a:p>
+            <a:r>
+              <a:rPr lang="en-IN" dirty="0"/>
+              <a:t>Binder reads from queue </a:t>
+            </a:r>
+          </a:p>
+          <a:p>
+            <a:r>
+              <a:rPr lang="en-IN" dirty="0"/>
+              <a:t>Pushes to order-in-0 channel </a:t>
+            </a:r>
+          </a:p>
+          <a:p>
+            <a:r>
+              <a:rPr lang="en-IN" dirty="0"/>
+              <a:t>Spring Integration flow processes it</a:t>
+            </a:r>
+          </a:p>
+          <a:p>
+            <a:endParaRPr lang="en-IN" dirty="0"/>
+          </a:p>
+        </p:txBody>
+      </p:sp>
+    </p:spTree>
+    <p:extLst>
+      <p:ext uri="{BB962C8B-B14F-4D97-AF65-F5344CB8AC3E}">
+        <p14:creationId xmlns:p14="http://schemas.microsoft.com/office/powerpoint/2010/main" val="1772938187"/>
+      </p:ext>
+    </p:extLst>
+  </p:cSld>
+  <p:clrMapOvr>
+    <a:masterClrMapping/>
+  </p:clrMapOvr>
+</p:sld>
+</file>
+
+<file path=ppt/slides/slide45.xml><?xml version="1.0" encoding="utf-8"?>
+<p:sld xmlns:a="http://schemas.openxmlformats.org/drawingml/2006/main" xmlns:r="http://schemas.openxmlformats.org/officeDocument/2006/relationships" xmlns:p="http://schemas.openxmlformats.org/presentationml/2006/main">
+  <p:cSld>
+    <p:spTree>
+      <p:nvGrpSpPr>
+        <p:cNvPr id="1" name="">
+          <a:extLst>
+            <a:ext uri="{FF2B5EF4-FFF2-40B4-BE49-F238E27FC236}">
+              <a16:creationId xmlns:a16="http://schemas.microsoft.com/office/drawing/2014/main" id="{B380C8A7-C754-486F-1A7D-3E8F4D9B85C1}"/>
+            </a:ext>
+          </a:extLst>
+        </p:cNvPr>
+        <p:cNvGrpSpPr/>
+        <p:nvPr/>
+      </p:nvGrpSpPr>
+      <p:grpSpPr>
+        <a:xfrm>
+          <a:off x="0" y="0"/>
+          <a:ext cx="0" cy="0"/>
+          <a:chOff x="0" y="0"/>
+          <a:chExt cx="0" cy="0"/>
+        </a:xfrm>
+      </p:grpSpPr>
+      <p:sp>
+        <p:nvSpPr>
+          <p:cNvPr id="2" name="Title 1">
+            <a:extLst>
+              <a:ext uri="{FF2B5EF4-FFF2-40B4-BE49-F238E27FC236}">
+                <a16:creationId xmlns:a16="http://schemas.microsoft.com/office/drawing/2014/main" id="{C1267E58-AD79-8A0E-D414-597105DA2516}"/>
+              </a:ext>
+            </a:extLst>
+          </p:cNvPr>
+          <p:cNvSpPr>
+            <a:spLocks noGrp="1"/>
+          </p:cNvSpPr>
+          <p:nvPr>
+            <p:ph type="title"/>
+          </p:nvPr>
+        </p:nvSpPr>
+        <p:spPr/>
+        <p:txBody>
+          <a:bodyPr/>
+          <a:lstStyle/>
+          <a:p>
+            <a:r>
+              <a:rPr lang="en-IN" b="1" dirty="0"/>
+              <a:t>Advanced Patterns</a:t>
+            </a:r>
+            <a:endParaRPr lang="en-IN" dirty="0"/>
+          </a:p>
+        </p:txBody>
+      </p:sp>
+      <p:sp>
+        <p:nvSpPr>
+          <p:cNvPr id="3" name="Content Placeholder 2">
+            <a:extLst>
+              <a:ext uri="{FF2B5EF4-FFF2-40B4-BE49-F238E27FC236}">
+                <a16:creationId xmlns:a16="http://schemas.microsoft.com/office/drawing/2014/main" id="{F1A66A64-C474-1504-8046-5B47B4F84C10}"/>
+              </a:ext>
+            </a:extLst>
+          </p:cNvPr>
+          <p:cNvSpPr>
+            <a:spLocks noGrp="1"/>
+          </p:cNvSpPr>
+          <p:nvPr>
+            <p:ph idx="1"/>
+          </p:nvPr>
+        </p:nvSpPr>
+        <p:spPr>
+          <a:xfrm>
+            <a:off x="1154954" y="2603500"/>
+            <a:ext cx="10394847" cy="3743512"/>
+          </a:xfrm>
+        </p:spPr>
+        <p:txBody>
+          <a:bodyPr/>
+          <a:lstStyle/>
+          <a:p>
+            <a:pPr marL="0" indent="0">
+              <a:buNone/>
+            </a:pPr>
+            <a:r>
+              <a:rPr lang="en-IN" b="1" dirty="0"/>
+              <a:t>Content-Based Routing</a:t>
+            </a:r>
+          </a:p>
+          <a:p>
+            <a:pPr marL="0" indent="0">
+              <a:buNone/>
+            </a:pPr>
+            <a:r>
+              <a:rPr lang="en-IN" b="1" dirty="0">
+                <a:solidFill>
+                  <a:srgbClr val="C00000"/>
+                </a:solidFill>
+              </a:rPr>
+              <a:t>.route(order -&gt; </a:t>
+            </a:r>
+            <a:r>
+              <a:rPr lang="en-IN" b="1" dirty="0" err="1">
+                <a:solidFill>
+                  <a:srgbClr val="C00000"/>
+                </a:solidFill>
+              </a:rPr>
+              <a:t>order.getType</a:t>
+            </a:r>
+            <a:r>
+              <a:rPr lang="en-IN" b="1" dirty="0">
+                <a:solidFill>
+                  <a:srgbClr val="C00000"/>
+                </a:solidFill>
+              </a:rPr>
+              <a:t>(), mapping -&gt; mapping</a:t>
+            </a:r>
+            <a:br>
+              <a:rPr lang="en-IN" b="1" dirty="0">
+                <a:solidFill>
+                  <a:srgbClr val="C00000"/>
+                </a:solidFill>
+              </a:rPr>
+            </a:br>
+            <a:r>
+              <a:rPr lang="en-IN" b="1" dirty="0">
+                <a:solidFill>
+                  <a:srgbClr val="C00000"/>
+                </a:solidFill>
+              </a:rPr>
+              <a:t>    .</a:t>
+            </a:r>
+            <a:r>
+              <a:rPr lang="en-IN" b="1" dirty="0" err="1">
+                <a:solidFill>
+                  <a:srgbClr val="C00000"/>
+                </a:solidFill>
+              </a:rPr>
+              <a:t>channelMapping</a:t>
+            </a:r>
+            <a:r>
+              <a:rPr lang="en-IN" b="1" dirty="0">
+                <a:solidFill>
+                  <a:srgbClr val="C00000"/>
+                </a:solidFill>
+              </a:rPr>
+              <a:t>("PRIORITY", "</a:t>
+            </a:r>
+            <a:r>
+              <a:rPr lang="en-IN" b="1" dirty="0" err="1">
+                <a:solidFill>
+                  <a:srgbClr val="C00000"/>
+                </a:solidFill>
+              </a:rPr>
+              <a:t>priorityChannel</a:t>
+            </a:r>
+            <a:r>
+              <a:rPr lang="en-IN" b="1" dirty="0">
+                <a:solidFill>
+                  <a:srgbClr val="C00000"/>
+                </a:solidFill>
+              </a:rPr>
+              <a:t>")</a:t>
+            </a:r>
+            <a:br>
+              <a:rPr lang="en-IN" b="1" dirty="0">
+                <a:solidFill>
+                  <a:srgbClr val="C00000"/>
+                </a:solidFill>
+              </a:rPr>
+            </a:br>
+            <a:r>
+              <a:rPr lang="en-IN" b="1" dirty="0">
+                <a:solidFill>
+                  <a:srgbClr val="C00000"/>
+                </a:solidFill>
+              </a:rPr>
+              <a:t>    .</a:t>
+            </a:r>
+            <a:r>
+              <a:rPr lang="en-IN" b="1" dirty="0" err="1">
+                <a:solidFill>
+                  <a:srgbClr val="C00000"/>
+                </a:solidFill>
+              </a:rPr>
+              <a:t>channelMapping</a:t>
+            </a:r>
+            <a:r>
+              <a:rPr lang="en-IN" b="1" dirty="0">
+                <a:solidFill>
+                  <a:srgbClr val="C00000"/>
+                </a:solidFill>
+              </a:rPr>
+              <a:t>("NORMAL", "</a:t>
+            </a:r>
+            <a:r>
+              <a:rPr lang="en-IN" b="1" dirty="0" err="1">
+                <a:solidFill>
+                  <a:srgbClr val="C00000"/>
+                </a:solidFill>
+              </a:rPr>
+              <a:t>normalChannel</a:t>
+            </a:r>
+            <a:r>
+              <a:rPr lang="en-IN" b="1" dirty="0">
+                <a:solidFill>
+                  <a:srgbClr val="C00000"/>
+                </a:solidFill>
+              </a:rPr>
+              <a:t>")</a:t>
+            </a:r>
+            <a:br>
+              <a:rPr lang="en-IN" b="1" dirty="0">
+                <a:solidFill>
+                  <a:srgbClr val="C00000"/>
+                </a:solidFill>
+              </a:rPr>
+            </a:br>
+            <a:r>
+              <a:rPr lang="en-IN" b="1" dirty="0">
+                <a:solidFill>
+                  <a:srgbClr val="C00000"/>
+                </a:solidFill>
+              </a:rPr>
+              <a:t>)</a:t>
+            </a:r>
+          </a:p>
+          <a:p>
+            <a:r>
+              <a:rPr lang="en-IN" dirty="0"/>
+              <a:t>👉 Different events → different bindings</a:t>
+            </a:r>
+          </a:p>
+          <a:p>
+            <a:endParaRPr lang="en-IN" dirty="0"/>
+          </a:p>
+        </p:txBody>
+      </p:sp>
+    </p:spTree>
+    <p:extLst>
+      <p:ext uri="{BB962C8B-B14F-4D97-AF65-F5344CB8AC3E}">
+        <p14:creationId xmlns:p14="http://schemas.microsoft.com/office/powerpoint/2010/main" val="412618729"/>
+      </p:ext>
+    </p:extLst>
+  </p:cSld>
+  <p:clrMapOvr>
+    <a:masterClrMapping/>
+  </p:clrMapOvr>
+</p:sld>
+</file>
+
+<file path=ppt/slides/slide46.xml><?xml version="1.0" encoding="utf-8"?>
+<p:sld xmlns:a="http://schemas.openxmlformats.org/drawingml/2006/main" xmlns:r="http://schemas.openxmlformats.org/officeDocument/2006/relationships" xmlns:p="http://schemas.openxmlformats.org/presentationml/2006/main">
+  <p:cSld>
+    <p:spTree>
+      <p:nvGrpSpPr>
+        <p:cNvPr id="1" name="">
+          <a:extLst>
+            <a:ext uri="{FF2B5EF4-FFF2-40B4-BE49-F238E27FC236}">
+              <a16:creationId xmlns:a16="http://schemas.microsoft.com/office/drawing/2014/main" id="{81CF40F5-9FE5-E80E-317B-44BE1185E4D4}"/>
+            </a:ext>
+          </a:extLst>
+        </p:cNvPr>
+        <p:cNvGrpSpPr/>
+        <p:nvPr/>
+      </p:nvGrpSpPr>
+      <p:grpSpPr>
+        <a:xfrm>
+          <a:off x="0" y="0"/>
+          <a:ext cx="0" cy="0"/>
+          <a:chOff x="0" y="0"/>
+          <a:chExt cx="0" cy="0"/>
+        </a:xfrm>
+      </p:grpSpPr>
+      <p:sp>
+        <p:nvSpPr>
+          <p:cNvPr id="2" name="Title 1">
+            <a:extLst>
+              <a:ext uri="{FF2B5EF4-FFF2-40B4-BE49-F238E27FC236}">
+                <a16:creationId xmlns:a16="http://schemas.microsoft.com/office/drawing/2014/main" id="{6824E21B-A16F-ADED-57C5-1B9832757298}"/>
+              </a:ext>
+            </a:extLst>
+          </p:cNvPr>
+          <p:cNvSpPr>
+            <a:spLocks noGrp="1"/>
+          </p:cNvSpPr>
+          <p:nvPr>
+            <p:ph type="title"/>
+          </p:nvPr>
+        </p:nvSpPr>
+        <p:spPr/>
+        <p:txBody>
+          <a:bodyPr/>
+          <a:lstStyle/>
+          <a:p>
+            <a:r>
+              <a:rPr lang="en-US" b="1" dirty="0"/>
+              <a:t>Splitter + Parallel Processing</a:t>
+            </a:r>
+            <a:endParaRPr lang="en-IN" dirty="0"/>
+          </a:p>
+        </p:txBody>
+      </p:sp>
+      <p:sp>
+        <p:nvSpPr>
+          <p:cNvPr id="3" name="Content Placeholder 2">
+            <a:extLst>
+              <a:ext uri="{FF2B5EF4-FFF2-40B4-BE49-F238E27FC236}">
+                <a16:creationId xmlns:a16="http://schemas.microsoft.com/office/drawing/2014/main" id="{DEC11EA2-2EB6-2535-CB28-FD7B940240D1}"/>
+              </a:ext>
+            </a:extLst>
+          </p:cNvPr>
+          <p:cNvSpPr>
+            <a:spLocks noGrp="1"/>
+          </p:cNvSpPr>
+          <p:nvPr>
+            <p:ph idx="1"/>
+          </p:nvPr>
+        </p:nvSpPr>
+        <p:spPr>
+          <a:xfrm>
+            <a:off x="1154954" y="2603500"/>
+            <a:ext cx="10394847" cy="3743512"/>
+          </a:xfrm>
+        </p:spPr>
+        <p:txBody>
+          <a:bodyPr/>
+          <a:lstStyle/>
+          <a:p>
+            <a:pPr marL="0" indent="0">
+              <a:buNone/>
+            </a:pPr>
+            <a:r>
+              <a:rPr lang="en-US" b="1" dirty="0">
+                <a:solidFill>
+                  <a:srgbClr val="C00000"/>
+                </a:solidFill>
+              </a:rPr>
+              <a:t>.split()</a:t>
+            </a:r>
+            <a:br>
+              <a:rPr lang="en-US" b="1" dirty="0">
+                <a:solidFill>
+                  <a:srgbClr val="C00000"/>
+                </a:solidFill>
+              </a:rPr>
+            </a:br>
+            <a:r>
+              <a:rPr lang="en-US" b="1" dirty="0">
+                <a:solidFill>
+                  <a:srgbClr val="C00000"/>
+                </a:solidFill>
+              </a:rPr>
+              <a:t>.channel("order-out-0")</a:t>
+            </a:r>
+          </a:p>
+          <a:p>
+            <a:r>
+              <a:rPr lang="en-US" dirty="0"/>
+              <a:t>Sends multiple messages to RabbitMQ</a:t>
+            </a:r>
+          </a:p>
+          <a:p>
+            <a:endParaRPr lang="en-IN" dirty="0"/>
+          </a:p>
+        </p:txBody>
+      </p:sp>
+    </p:spTree>
+    <p:extLst>
+      <p:ext uri="{BB962C8B-B14F-4D97-AF65-F5344CB8AC3E}">
+        <p14:creationId xmlns:p14="http://schemas.microsoft.com/office/powerpoint/2010/main" val="1616759397"/>
+      </p:ext>
+    </p:extLst>
+  </p:cSld>
+  <p:clrMapOvr>
+    <a:masterClrMapping/>
+  </p:clrMapOvr>
+</p:sld>
+</file>
+
+<file path=ppt/slides/slide47.xml><?xml version="1.0" encoding="utf-8"?>
+<p:sld xmlns:a="http://schemas.openxmlformats.org/drawingml/2006/main" xmlns:r="http://schemas.openxmlformats.org/officeDocument/2006/relationships" xmlns:p="http://schemas.openxmlformats.org/presentationml/2006/main">
+  <p:cSld>
+    <p:spTree>
+      <p:nvGrpSpPr>
+        <p:cNvPr id="1" name="">
+          <a:extLst>
+            <a:ext uri="{FF2B5EF4-FFF2-40B4-BE49-F238E27FC236}">
+              <a16:creationId xmlns:a16="http://schemas.microsoft.com/office/drawing/2014/main" id="{04218486-7736-6D1C-398A-EA91A44DDC41}"/>
+            </a:ext>
+          </a:extLst>
+        </p:cNvPr>
+        <p:cNvGrpSpPr/>
+        <p:nvPr/>
+      </p:nvGrpSpPr>
+      <p:grpSpPr>
+        <a:xfrm>
+          <a:off x="0" y="0"/>
+          <a:ext cx="0" cy="0"/>
+          <a:chOff x="0" y="0"/>
+          <a:chExt cx="0" cy="0"/>
+        </a:xfrm>
+      </p:grpSpPr>
+      <p:sp>
+        <p:nvSpPr>
+          <p:cNvPr id="2" name="Title 1">
+            <a:extLst>
+              <a:ext uri="{FF2B5EF4-FFF2-40B4-BE49-F238E27FC236}">
+                <a16:creationId xmlns:a16="http://schemas.microsoft.com/office/drawing/2014/main" id="{D2FC133A-C42B-60DD-F857-942F5C2B724C}"/>
+              </a:ext>
+            </a:extLst>
+          </p:cNvPr>
+          <p:cNvSpPr>
+            <a:spLocks noGrp="1"/>
+          </p:cNvSpPr>
+          <p:nvPr>
+            <p:ph type="title"/>
+          </p:nvPr>
+        </p:nvSpPr>
+        <p:spPr/>
+        <p:txBody>
+          <a:bodyPr/>
+          <a:lstStyle/>
+          <a:p>
+            <a:r>
+              <a:rPr lang="en-US" b="1" dirty="0"/>
+              <a:t>Aggregator (After Consumption)</a:t>
+            </a:r>
+            <a:endParaRPr lang="en-IN" dirty="0"/>
+          </a:p>
+        </p:txBody>
+      </p:sp>
+      <p:sp>
+        <p:nvSpPr>
+          <p:cNvPr id="3" name="Content Placeholder 2">
+            <a:extLst>
+              <a:ext uri="{FF2B5EF4-FFF2-40B4-BE49-F238E27FC236}">
+                <a16:creationId xmlns:a16="http://schemas.microsoft.com/office/drawing/2014/main" id="{49CC1A7F-C562-51A6-CC5A-14626D7BE8B6}"/>
+              </a:ext>
+            </a:extLst>
+          </p:cNvPr>
+          <p:cNvSpPr>
+            <a:spLocks noGrp="1"/>
+          </p:cNvSpPr>
+          <p:nvPr>
+            <p:ph idx="1"/>
+          </p:nvPr>
+        </p:nvSpPr>
+        <p:spPr>
+          <a:xfrm>
+            <a:off x="1154954" y="2603500"/>
+            <a:ext cx="10394847" cy="3743512"/>
+          </a:xfrm>
+        </p:spPr>
+        <p:txBody>
+          <a:bodyPr/>
+          <a:lstStyle/>
+          <a:p>
+            <a:r>
+              <a:rPr lang="en-US" dirty="0"/>
+              <a:t>.aggregate()</a:t>
+            </a:r>
+          </a:p>
+          <a:p>
+            <a:r>
+              <a:rPr lang="en-US" dirty="0"/>
+              <a:t>👉 Combine multiple events</a:t>
+            </a:r>
+          </a:p>
+          <a:p>
+            <a:endParaRPr lang="en-IN" dirty="0"/>
+          </a:p>
+        </p:txBody>
+      </p:sp>
+    </p:spTree>
+    <p:extLst>
+      <p:ext uri="{BB962C8B-B14F-4D97-AF65-F5344CB8AC3E}">
+        <p14:creationId xmlns:p14="http://schemas.microsoft.com/office/powerpoint/2010/main" val="2197068128"/>
+      </p:ext>
+    </p:extLst>
+  </p:cSld>
+  <p:clrMapOvr>
+    <a:masterClrMapping/>
+  </p:clrMapOvr>
+</p:sld>
+</file>
+
+<file path=ppt/slides/slide48.xml><?xml version="1.0" encoding="utf-8"?>
+<p:sld xmlns:a="http://schemas.openxmlformats.org/drawingml/2006/main" xmlns:r="http://schemas.openxmlformats.org/officeDocument/2006/relationships" xmlns:p="http://schemas.openxmlformats.org/presentationml/2006/main">
+  <p:cSld>
+    <p:spTree>
+      <p:nvGrpSpPr>
+        <p:cNvPr id="1" name="">
+          <a:extLst>
+            <a:ext uri="{FF2B5EF4-FFF2-40B4-BE49-F238E27FC236}">
+              <a16:creationId xmlns:a16="http://schemas.microsoft.com/office/drawing/2014/main" id="{4B3CD9B1-295D-4FC3-E2C0-E5B407BB6D9E}"/>
+            </a:ext>
+          </a:extLst>
+        </p:cNvPr>
+        <p:cNvGrpSpPr/>
+        <p:nvPr/>
+      </p:nvGrpSpPr>
+      <p:grpSpPr>
+        <a:xfrm>
+          <a:off x="0" y="0"/>
+          <a:ext cx="0" cy="0"/>
+          <a:chOff x="0" y="0"/>
+          <a:chExt cx="0" cy="0"/>
+        </a:xfrm>
+      </p:grpSpPr>
+      <p:sp>
+        <p:nvSpPr>
+          <p:cNvPr id="2" name="Title 1">
+            <a:extLst>
+              <a:ext uri="{FF2B5EF4-FFF2-40B4-BE49-F238E27FC236}">
+                <a16:creationId xmlns:a16="http://schemas.microsoft.com/office/drawing/2014/main" id="{34747EA1-3B51-6CD5-09E8-5116DA40138D}"/>
+              </a:ext>
+            </a:extLst>
+          </p:cNvPr>
+          <p:cNvSpPr>
+            <a:spLocks noGrp="1"/>
+          </p:cNvSpPr>
+          <p:nvPr>
+            <p:ph type="title"/>
+          </p:nvPr>
+        </p:nvSpPr>
+        <p:spPr/>
+        <p:txBody>
+          <a:bodyPr/>
+          <a:lstStyle/>
+          <a:p>
+            <a:r>
+              <a:rPr lang="en-IN" b="1" dirty="0"/>
+              <a:t>Error Channel + DLQ</a:t>
+            </a:r>
+            <a:endParaRPr lang="en-IN" dirty="0"/>
+          </a:p>
+        </p:txBody>
+      </p:sp>
+      <p:sp>
+        <p:nvSpPr>
+          <p:cNvPr id="3" name="Content Placeholder 2">
+            <a:extLst>
+              <a:ext uri="{FF2B5EF4-FFF2-40B4-BE49-F238E27FC236}">
+                <a16:creationId xmlns:a16="http://schemas.microsoft.com/office/drawing/2014/main" id="{34A16143-2E99-9598-425C-B5DE346B8F04}"/>
+              </a:ext>
+            </a:extLst>
+          </p:cNvPr>
+          <p:cNvSpPr>
+            <a:spLocks noGrp="1"/>
+          </p:cNvSpPr>
+          <p:nvPr>
+            <p:ph idx="1"/>
+          </p:nvPr>
+        </p:nvSpPr>
+        <p:spPr>
+          <a:xfrm>
+            <a:off x="1154954" y="2603500"/>
+            <a:ext cx="10394847" cy="3743512"/>
+          </a:xfrm>
+        </p:spPr>
+        <p:txBody>
+          <a:bodyPr/>
+          <a:lstStyle/>
+          <a:p>
+            <a:r>
+              <a:rPr lang="en-IN" dirty="0"/>
+              <a:t>consumer:</a:t>
+            </a:r>
+            <a:br>
+              <a:rPr lang="en-IN" dirty="0"/>
+            </a:br>
+            <a:r>
+              <a:rPr lang="en-IN" dirty="0"/>
+              <a:t>  </a:t>
+            </a:r>
+            <a:r>
+              <a:rPr lang="en-IN" dirty="0" err="1"/>
+              <a:t>autoBindDlq</a:t>
+            </a:r>
+            <a:r>
+              <a:rPr lang="en-IN" dirty="0"/>
+              <a:t>: true</a:t>
+            </a:r>
+          </a:p>
+          <a:p>
+            <a:pPr marL="0" indent="0">
+              <a:buNone/>
+            </a:pPr>
+            <a:r>
+              <a:rPr lang="en-IN" dirty="0"/>
+              <a:t>Flow:</a:t>
+            </a:r>
+          </a:p>
+          <a:p>
+            <a:r>
+              <a:rPr lang="en-IN" dirty="0"/>
+              <a:t>Failure → Retry → DLQ</a:t>
+            </a:r>
+          </a:p>
+          <a:p>
+            <a:endParaRPr lang="en-IN" dirty="0"/>
+          </a:p>
+        </p:txBody>
+      </p:sp>
+    </p:spTree>
+    <p:extLst>
+      <p:ext uri="{BB962C8B-B14F-4D97-AF65-F5344CB8AC3E}">
+        <p14:creationId xmlns:p14="http://schemas.microsoft.com/office/powerpoint/2010/main" val="607655702"/>
+      </p:ext>
+    </p:extLst>
+  </p:cSld>
+  <p:clrMapOvr>
+    <a:masterClrMapping/>
+  </p:clrMapOvr>
+</p:sld>
+</file>
+
+<file path=ppt/slides/slide49.xml><?xml version="1.0" encoding="utf-8"?>
+<p:sld xmlns:a="http://schemas.openxmlformats.org/drawingml/2006/main" xmlns:r="http://schemas.openxmlformats.org/officeDocument/2006/relationships" xmlns:p="http://schemas.openxmlformats.org/presentationml/2006/main">
+  <p:cSld>
+    <p:spTree>
+      <p:nvGrpSpPr>
+        <p:cNvPr id="1" name="">
+          <a:extLst>
+            <a:ext uri="{FF2B5EF4-FFF2-40B4-BE49-F238E27FC236}">
+              <a16:creationId xmlns:a16="http://schemas.microsoft.com/office/drawing/2014/main" id="{05C394DD-1E27-47B9-4764-ACE3EE83DE54}"/>
+            </a:ext>
+          </a:extLst>
+        </p:cNvPr>
+        <p:cNvGrpSpPr/>
+        <p:nvPr/>
+      </p:nvGrpSpPr>
+      <p:grpSpPr>
+        <a:xfrm>
+          <a:off x="0" y="0"/>
+          <a:ext cx="0" cy="0"/>
+          <a:chOff x="0" y="0"/>
+          <a:chExt cx="0" cy="0"/>
+        </a:xfrm>
+      </p:grpSpPr>
+      <p:sp>
+        <p:nvSpPr>
+          <p:cNvPr id="2" name="Title 1">
+            <a:extLst>
+              <a:ext uri="{FF2B5EF4-FFF2-40B4-BE49-F238E27FC236}">
+                <a16:creationId xmlns:a16="http://schemas.microsoft.com/office/drawing/2014/main" id="{4405875C-FA5C-A731-12DE-ADA50A3375FD}"/>
+              </a:ext>
+            </a:extLst>
+          </p:cNvPr>
+          <p:cNvSpPr>
+            <a:spLocks noGrp="1"/>
+          </p:cNvSpPr>
+          <p:nvPr>
+            <p:ph type="title"/>
+          </p:nvPr>
+        </p:nvSpPr>
+        <p:spPr/>
+        <p:txBody>
+          <a:bodyPr/>
+          <a:lstStyle/>
+          <a:p>
+            <a:r>
+              <a:rPr lang="en-IN" dirty="0"/>
+              <a:t>Spring Cloud Stream</a:t>
+            </a:r>
+          </a:p>
+        </p:txBody>
+      </p:sp>
+      <p:sp>
+        <p:nvSpPr>
+          <p:cNvPr id="3" name="Content Placeholder 2">
+            <a:extLst>
+              <a:ext uri="{FF2B5EF4-FFF2-40B4-BE49-F238E27FC236}">
+                <a16:creationId xmlns:a16="http://schemas.microsoft.com/office/drawing/2014/main" id="{578E5BCC-E517-C44F-4631-10441DBEC9FE}"/>
+              </a:ext>
+            </a:extLst>
+          </p:cNvPr>
+          <p:cNvSpPr>
+            <a:spLocks noGrp="1"/>
+          </p:cNvSpPr>
+          <p:nvPr>
+            <p:ph idx="1"/>
+          </p:nvPr>
+        </p:nvSpPr>
+        <p:spPr>
+          <a:xfrm>
+            <a:off x="1154954" y="2603500"/>
+            <a:ext cx="10394847" cy="3743512"/>
+          </a:xfrm>
+        </p:spPr>
+        <p:txBody>
+          <a:bodyPr/>
+          <a:lstStyle/>
+          <a:p>
+            <a:r>
+              <a:rPr lang="en-IN" dirty="0"/>
+              <a:t>Spring Integration handles internal message processing using EIP patterns like transformers, filters, and routers, </a:t>
+            </a:r>
+          </a:p>
+          <a:p>
+            <a:r>
+              <a:rPr lang="en-IN" dirty="0"/>
+              <a:t>Spring Cloud Stream connects those processed messages to external systems like RabbitMQ using binders. </a:t>
+            </a:r>
+          </a:p>
+          <a:p>
+            <a:r>
+              <a:rPr lang="en-IN" dirty="0"/>
+              <a:t>Integration flows produce and consume messages through channels, which are mapped to Stream bindings, enabling seamless event-driven microservice communication.</a:t>
+            </a:r>
+          </a:p>
+        </p:txBody>
+      </p:sp>
+    </p:spTree>
+    <p:extLst>
+      <p:ext uri="{BB962C8B-B14F-4D97-AF65-F5344CB8AC3E}">
+        <p14:creationId xmlns:p14="http://schemas.microsoft.com/office/powerpoint/2010/main" val="548791432"/>
       </p:ext>
     </p:extLst>
   </p:cSld>
@@ -18434,6 +21154,916 @@
 </p:sld>
 </file>
 
+<file path=ppt/slides/slide50.xml><?xml version="1.0" encoding="utf-8"?>
+<p:sld xmlns:a="http://schemas.openxmlformats.org/drawingml/2006/main" xmlns:r="http://schemas.openxmlformats.org/officeDocument/2006/relationships" xmlns:p="http://schemas.openxmlformats.org/presentationml/2006/main">
+  <p:cSld>
+    <p:spTree>
+      <p:nvGrpSpPr>
+        <p:cNvPr id="1" name="">
+          <a:extLst>
+            <a:ext uri="{FF2B5EF4-FFF2-40B4-BE49-F238E27FC236}">
+              <a16:creationId xmlns:a16="http://schemas.microsoft.com/office/drawing/2014/main" id="{FC190C01-B02F-10E4-9596-C354C5AA2B33}"/>
+            </a:ext>
+          </a:extLst>
+        </p:cNvPr>
+        <p:cNvGrpSpPr/>
+        <p:nvPr/>
+      </p:nvGrpSpPr>
+      <p:grpSpPr>
+        <a:xfrm>
+          <a:off x="0" y="0"/>
+          <a:ext cx="0" cy="0"/>
+          <a:chOff x="0" y="0"/>
+          <a:chExt cx="0" cy="0"/>
+        </a:xfrm>
+      </p:grpSpPr>
+      <p:sp>
+        <p:nvSpPr>
+          <p:cNvPr id="2" name="Title 1">
+            <a:extLst>
+              <a:ext uri="{FF2B5EF4-FFF2-40B4-BE49-F238E27FC236}">
+                <a16:creationId xmlns:a16="http://schemas.microsoft.com/office/drawing/2014/main" id="{5DA78E6F-31EF-4C1E-F909-015A23DDBD16}"/>
+              </a:ext>
+            </a:extLst>
+          </p:cNvPr>
+          <p:cNvSpPr>
+            <a:spLocks noGrp="1"/>
+          </p:cNvSpPr>
+          <p:nvPr>
+            <p:ph type="title"/>
+          </p:nvPr>
+        </p:nvSpPr>
+        <p:spPr/>
+        <p:txBody>
+          <a:bodyPr/>
+          <a:lstStyle/>
+          <a:p>
+            <a:endParaRPr lang="en-IN"/>
+          </a:p>
+        </p:txBody>
+      </p:sp>
+      <p:sp>
+        <p:nvSpPr>
+          <p:cNvPr id="3" name="Content Placeholder 2">
+            <a:extLst>
+              <a:ext uri="{FF2B5EF4-FFF2-40B4-BE49-F238E27FC236}">
+                <a16:creationId xmlns:a16="http://schemas.microsoft.com/office/drawing/2014/main" id="{59F13A74-F17E-BB49-7695-5601084DE859}"/>
+              </a:ext>
+            </a:extLst>
+          </p:cNvPr>
+          <p:cNvSpPr>
+            <a:spLocks noGrp="1"/>
+          </p:cNvSpPr>
+          <p:nvPr>
+            <p:ph idx="1"/>
+          </p:nvPr>
+        </p:nvSpPr>
+        <p:spPr>
+          <a:xfrm>
+            <a:off x="1154954" y="2603500"/>
+            <a:ext cx="10394847" cy="3743512"/>
+          </a:xfrm>
+        </p:spPr>
+        <p:txBody>
+          <a:bodyPr/>
+          <a:lstStyle/>
+          <a:p>
+            <a:endParaRPr lang="en-IN" dirty="0"/>
+          </a:p>
+        </p:txBody>
+      </p:sp>
+    </p:spTree>
+    <p:extLst>
+      <p:ext uri="{BB962C8B-B14F-4D97-AF65-F5344CB8AC3E}">
+        <p14:creationId xmlns:p14="http://schemas.microsoft.com/office/powerpoint/2010/main" val="299466426"/>
+      </p:ext>
+    </p:extLst>
+  </p:cSld>
+  <p:clrMapOvr>
+    <a:masterClrMapping/>
+  </p:clrMapOvr>
+</p:sld>
+</file>
+
+<file path=ppt/slides/slide51.xml><?xml version="1.0" encoding="utf-8"?>
+<p:sld xmlns:a="http://schemas.openxmlformats.org/drawingml/2006/main" xmlns:r="http://schemas.openxmlformats.org/officeDocument/2006/relationships" xmlns:p="http://schemas.openxmlformats.org/presentationml/2006/main">
+  <p:cSld>
+    <p:spTree>
+      <p:nvGrpSpPr>
+        <p:cNvPr id="1" name="">
+          <a:extLst>
+            <a:ext uri="{FF2B5EF4-FFF2-40B4-BE49-F238E27FC236}">
+              <a16:creationId xmlns:a16="http://schemas.microsoft.com/office/drawing/2014/main" id="{0FEBEC4E-5925-56A0-DA15-771E9D63694B}"/>
+            </a:ext>
+          </a:extLst>
+        </p:cNvPr>
+        <p:cNvGrpSpPr/>
+        <p:nvPr/>
+      </p:nvGrpSpPr>
+      <p:grpSpPr>
+        <a:xfrm>
+          <a:off x="0" y="0"/>
+          <a:ext cx="0" cy="0"/>
+          <a:chOff x="0" y="0"/>
+          <a:chExt cx="0" cy="0"/>
+        </a:xfrm>
+      </p:grpSpPr>
+      <p:sp>
+        <p:nvSpPr>
+          <p:cNvPr id="2" name="Title 1">
+            <a:extLst>
+              <a:ext uri="{FF2B5EF4-FFF2-40B4-BE49-F238E27FC236}">
+                <a16:creationId xmlns:a16="http://schemas.microsoft.com/office/drawing/2014/main" id="{DE6C9EA6-10B1-CE97-6991-978F34F31091}"/>
+              </a:ext>
+            </a:extLst>
+          </p:cNvPr>
+          <p:cNvSpPr>
+            <a:spLocks noGrp="1"/>
+          </p:cNvSpPr>
+          <p:nvPr>
+            <p:ph type="title"/>
+          </p:nvPr>
+        </p:nvSpPr>
+        <p:spPr/>
+        <p:txBody>
+          <a:bodyPr/>
+          <a:lstStyle/>
+          <a:p>
+            <a:endParaRPr lang="en-IN"/>
+          </a:p>
+        </p:txBody>
+      </p:sp>
+      <p:sp>
+        <p:nvSpPr>
+          <p:cNvPr id="3" name="Content Placeholder 2">
+            <a:extLst>
+              <a:ext uri="{FF2B5EF4-FFF2-40B4-BE49-F238E27FC236}">
+                <a16:creationId xmlns:a16="http://schemas.microsoft.com/office/drawing/2014/main" id="{C788CB98-3FD9-B63B-8472-257A8A5569DB}"/>
+              </a:ext>
+            </a:extLst>
+          </p:cNvPr>
+          <p:cNvSpPr>
+            <a:spLocks noGrp="1"/>
+          </p:cNvSpPr>
+          <p:nvPr>
+            <p:ph idx="1"/>
+          </p:nvPr>
+        </p:nvSpPr>
+        <p:spPr>
+          <a:xfrm>
+            <a:off x="1154954" y="2603500"/>
+            <a:ext cx="10394847" cy="3743512"/>
+          </a:xfrm>
+        </p:spPr>
+        <p:txBody>
+          <a:bodyPr/>
+          <a:lstStyle/>
+          <a:p>
+            <a:endParaRPr lang="en-IN" dirty="0"/>
+          </a:p>
+        </p:txBody>
+      </p:sp>
+    </p:spTree>
+    <p:extLst>
+      <p:ext uri="{BB962C8B-B14F-4D97-AF65-F5344CB8AC3E}">
+        <p14:creationId xmlns:p14="http://schemas.microsoft.com/office/powerpoint/2010/main" val="1165168271"/>
+      </p:ext>
+    </p:extLst>
+  </p:cSld>
+  <p:clrMapOvr>
+    <a:masterClrMapping/>
+  </p:clrMapOvr>
+</p:sld>
+</file>
+
+<file path=ppt/slides/slide52.xml><?xml version="1.0" encoding="utf-8"?>
+<p:sld xmlns:a="http://schemas.openxmlformats.org/drawingml/2006/main" xmlns:r="http://schemas.openxmlformats.org/officeDocument/2006/relationships" xmlns:p="http://schemas.openxmlformats.org/presentationml/2006/main">
+  <p:cSld>
+    <p:spTree>
+      <p:nvGrpSpPr>
+        <p:cNvPr id="1" name="">
+          <a:extLst>
+            <a:ext uri="{FF2B5EF4-FFF2-40B4-BE49-F238E27FC236}">
+              <a16:creationId xmlns:a16="http://schemas.microsoft.com/office/drawing/2014/main" id="{E50DB027-687F-76E2-3A9F-F30B8D1B0EDE}"/>
+            </a:ext>
+          </a:extLst>
+        </p:cNvPr>
+        <p:cNvGrpSpPr/>
+        <p:nvPr/>
+      </p:nvGrpSpPr>
+      <p:grpSpPr>
+        <a:xfrm>
+          <a:off x="0" y="0"/>
+          <a:ext cx="0" cy="0"/>
+          <a:chOff x="0" y="0"/>
+          <a:chExt cx="0" cy="0"/>
+        </a:xfrm>
+      </p:grpSpPr>
+      <p:sp>
+        <p:nvSpPr>
+          <p:cNvPr id="2" name="Title 1">
+            <a:extLst>
+              <a:ext uri="{FF2B5EF4-FFF2-40B4-BE49-F238E27FC236}">
+                <a16:creationId xmlns:a16="http://schemas.microsoft.com/office/drawing/2014/main" id="{43775369-E7FB-F6B9-9846-F324547D3FD9}"/>
+              </a:ext>
+            </a:extLst>
+          </p:cNvPr>
+          <p:cNvSpPr>
+            <a:spLocks noGrp="1"/>
+          </p:cNvSpPr>
+          <p:nvPr>
+            <p:ph type="title"/>
+          </p:nvPr>
+        </p:nvSpPr>
+        <p:spPr/>
+        <p:txBody>
+          <a:bodyPr/>
+          <a:lstStyle/>
+          <a:p>
+            <a:endParaRPr lang="en-IN"/>
+          </a:p>
+        </p:txBody>
+      </p:sp>
+      <p:sp>
+        <p:nvSpPr>
+          <p:cNvPr id="3" name="Content Placeholder 2">
+            <a:extLst>
+              <a:ext uri="{FF2B5EF4-FFF2-40B4-BE49-F238E27FC236}">
+                <a16:creationId xmlns:a16="http://schemas.microsoft.com/office/drawing/2014/main" id="{F72165EA-A02B-879F-7A4A-881EC205BF32}"/>
+              </a:ext>
+            </a:extLst>
+          </p:cNvPr>
+          <p:cNvSpPr>
+            <a:spLocks noGrp="1"/>
+          </p:cNvSpPr>
+          <p:nvPr>
+            <p:ph idx="1"/>
+          </p:nvPr>
+        </p:nvSpPr>
+        <p:spPr>
+          <a:xfrm>
+            <a:off x="1154954" y="2603500"/>
+            <a:ext cx="10394847" cy="3743512"/>
+          </a:xfrm>
+        </p:spPr>
+        <p:txBody>
+          <a:bodyPr/>
+          <a:lstStyle/>
+          <a:p>
+            <a:endParaRPr lang="en-IN" dirty="0"/>
+          </a:p>
+        </p:txBody>
+      </p:sp>
+    </p:spTree>
+    <p:extLst>
+      <p:ext uri="{BB962C8B-B14F-4D97-AF65-F5344CB8AC3E}">
+        <p14:creationId xmlns:p14="http://schemas.microsoft.com/office/powerpoint/2010/main" val="67907145"/>
+      </p:ext>
+    </p:extLst>
+  </p:cSld>
+  <p:clrMapOvr>
+    <a:masterClrMapping/>
+  </p:clrMapOvr>
+</p:sld>
+</file>
+
+<file path=ppt/slides/slide53.xml><?xml version="1.0" encoding="utf-8"?>
+<p:sld xmlns:a="http://schemas.openxmlformats.org/drawingml/2006/main" xmlns:r="http://schemas.openxmlformats.org/officeDocument/2006/relationships" xmlns:p="http://schemas.openxmlformats.org/presentationml/2006/main">
+  <p:cSld>
+    <p:spTree>
+      <p:nvGrpSpPr>
+        <p:cNvPr id="1" name="">
+          <a:extLst>
+            <a:ext uri="{FF2B5EF4-FFF2-40B4-BE49-F238E27FC236}">
+              <a16:creationId xmlns:a16="http://schemas.microsoft.com/office/drawing/2014/main" id="{1FCADC1D-B9FD-9261-A464-E7D5C8099EAA}"/>
+            </a:ext>
+          </a:extLst>
+        </p:cNvPr>
+        <p:cNvGrpSpPr/>
+        <p:nvPr/>
+      </p:nvGrpSpPr>
+      <p:grpSpPr>
+        <a:xfrm>
+          <a:off x="0" y="0"/>
+          <a:ext cx="0" cy="0"/>
+          <a:chOff x="0" y="0"/>
+          <a:chExt cx="0" cy="0"/>
+        </a:xfrm>
+      </p:grpSpPr>
+      <p:sp>
+        <p:nvSpPr>
+          <p:cNvPr id="2" name="Title 1">
+            <a:extLst>
+              <a:ext uri="{FF2B5EF4-FFF2-40B4-BE49-F238E27FC236}">
+                <a16:creationId xmlns:a16="http://schemas.microsoft.com/office/drawing/2014/main" id="{8E3BCA64-D960-D56A-42DC-19261902A3B8}"/>
+              </a:ext>
+            </a:extLst>
+          </p:cNvPr>
+          <p:cNvSpPr>
+            <a:spLocks noGrp="1"/>
+          </p:cNvSpPr>
+          <p:nvPr>
+            <p:ph type="title"/>
+          </p:nvPr>
+        </p:nvSpPr>
+        <p:spPr/>
+        <p:txBody>
+          <a:bodyPr/>
+          <a:lstStyle/>
+          <a:p>
+            <a:endParaRPr lang="en-IN"/>
+          </a:p>
+        </p:txBody>
+      </p:sp>
+      <p:sp>
+        <p:nvSpPr>
+          <p:cNvPr id="3" name="Content Placeholder 2">
+            <a:extLst>
+              <a:ext uri="{FF2B5EF4-FFF2-40B4-BE49-F238E27FC236}">
+                <a16:creationId xmlns:a16="http://schemas.microsoft.com/office/drawing/2014/main" id="{D24355F7-16AE-7BC2-A089-EFE74D30AE3D}"/>
+              </a:ext>
+            </a:extLst>
+          </p:cNvPr>
+          <p:cNvSpPr>
+            <a:spLocks noGrp="1"/>
+          </p:cNvSpPr>
+          <p:nvPr>
+            <p:ph idx="1"/>
+          </p:nvPr>
+        </p:nvSpPr>
+        <p:spPr>
+          <a:xfrm>
+            <a:off x="1154954" y="2603500"/>
+            <a:ext cx="10394847" cy="3743512"/>
+          </a:xfrm>
+        </p:spPr>
+        <p:txBody>
+          <a:bodyPr/>
+          <a:lstStyle/>
+          <a:p>
+            <a:endParaRPr lang="en-IN" dirty="0"/>
+          </a:p>
+        </p:txBody>
+      </p:sp>
+    </p:spTree>
+    <p:extLst>
+      <p:ext uri="{BB962C8B-B14F-4D97-AF65-F5344CB8AC3E}">
+        <p14:creationId xmlns:p14="http://schemas.microsoft.com/office/powerpoint/2010/main" val="1829272148"/>
+      </p:ext>
+    </p:extLst>
+  </p:cSld>
+  <p:clrMapOvr>
+    <a:masterClrMapping/>
+  </p:clrMapOvr>
+</p:sld>
+</file>
+
+<file path=ppt/slides/slide54.xml><?xml version="1.0" encoding="utf-8"?>
+<p:sld xmlns:a="http://schemas.openxmlformats.org/drawingml/2006/main" xmlns:r="http://schemas.openxmlformats.org/officeDocument/2006/relationships" xmlns:p="http://schemas.openxmlformats.org/presentationml/2006/main">
+  <p:cSld>
+    <p:spTree>
+      <p:nvGrpSpPr>
+        <p:cNvPr id="1" name="">
+          <a:extLst>
+            <a:ext uri="{FF2B5EF4-FFF2-40B4-BE49-F238E27FC236}">
+              <a16:creationId xmlns:a16="http://schemas.microsoft.com/office/drawing/2014/main" id="{0D178507-79C1-9D97-A32E-26D1E0D72E83}"/>
+            </a:ext>
+          </a:extLst>
+        </p:cNvPr>
+        <p:cNvGrpSpPr/>
+        <p:nvPr/>
+      </p:nvGrpSpPr>
+      <p:grpSpPr>
+        <a:xfrm>
+          <a:off x="0" y="0"/>
+          <a:ext cx="0" cy="0"/>
+          <a:chOff x="0" y="0"/>
+          <a:chExt cx="0" cy="0"/>
+        </a:xfrm>
+      </p:grpSpPr>
+      <p:sp>
+        <p:nvSpPr>
+          <p:cNvPr id="2" name="Title 1">
+            <a:extLst>
+              <a:ext uri="{FF2B5EF4-FFF2-40B4-BE49-F238E27FC236}">
+                <a16:creationId xmlns:a16="http://schemas.microsoft.com/office/drawing/2014/main" id="{4CF1562C-4B15-CAE6-C549-1A98A4BE7A37}"/>
+              </a:ext>
+            </a:extLst>
+          </p:cNvPr>
+          <p:cNvSpPr>
+            <a:spLocks noGrp="1"/>
+          </p:cNvSpPr>
+          <p:nvPr>
+            <p:ph type="title"/>
+          </p:nvPr>
+        </p:nvSpPr>
+        <p:spPr/>
+        <p:txBody>
+          <a:bodyPr/>
+          <a:lstStyle/>
+          <a:p>
+            <a:endParaRPr lang="en-IN"/>
+          </a:p>
+        </p:txBody>
+      </p:sp>
+      <p:sp>
+        <p:nvSpPr>
+          <p:cNvPr id="3" name="Content Placeholder 2">
+            <a:extLst>
+              <a:ext uri="{FF2B5EF4-FFF2-40B4-BE49-F238E27FC236}">
+                <a16:creationId xmlns:a16="http://schemas.microsoft.com/office/drawing/2014/main" id="{8720CDBB-89F3-F88B-A7A7-7CF1BDA938AD}"/>
+              </a:ext>
+            </a:extLst>
+          </p:cNvPr>
+          <p:cNvSpPr>
+            <a:spLocks noGrp="1"/>
+          </p:cNvSpPr>
+          <p:nvPr>
+            <p:ph idx="1"/>
+          </p:nvPr>
+        </p:nvSpPr>
+        <p:spPr>
+          <a:xfrm>
+            <a:off x="1154954" y="2603500"/>
+            <a:ext cx="10394847" cy="3743512"/>
+          </a:xfrm>
+        </p:spPr>
+        <p:txBody>
+          <a:bodyPr/>
+          <a:lstStyle/>
+          <a:p>
+            <a:endParaRPr lang="en-IN" dirty="0"/>
+          </a:p>
+        </p:txBody>
+      </p:sp>
+    </p:spTree>
+    <p:extLst>
+      <p:ext uri="{BB962C8B-B14F-4D97-AF65-F5344CB8AC3E}">
+        <p14:creationId xmlns:p14="http://schemas.microsoft.com/office/powerpoint/2010/main" val="1641390446"/>
+      </p:ext>
+    </p:extLst>
+  </p:cSld>
+  <p:clrMapOvr>
+    <a:masterClrMapping/>
+  </p:clrMapOvr>
+</p:sld>
+</file>
+
+<file path=ppt/slides/slide55.xml><?xml version="1.0" encoding="utf-8"?>
+<p:sld xmlns:a="http://schemas.openxmlformats.org/drawingml/2006/main" xmlns:r="http://schemas.openxmlformats.org/officeDocument/2006/relationships" xmlns:p="http://schemas.openxmlformats.org/presentationml/2006/main">
+  <p:cSld>
+    <p:spTree>
+      <p:nvGrpSpPr>
+        <p:cNvPr id="1" name="">
+          <a:extLst>
+            <a:ext uri="{FF2B5EF4-FFF2-40B4-BE49-F238E27FC236}">
+              <a16:creationId xmlns:a16="http://schemas.microsoft.com/office/drawing/2014/main" id="{D5B022D0-D4D8-E02F-81E8-FECB794C250B}"/>
+            </a:ext>
+          </a:extLst>
+        </p:cNvPr>
+        <p:cNvGrpSpPr/>
+        <p:nvPr/>
+      </p:nvGrpSpPr>
+      <p:grpSpPr>
+        <a:xfrm>
+          <a:off x="0" y="0"/>
+          <a:ext cx="0" cy="0"/>
+          <a:chOff x="0" y="0"/>
+          <a:chExt cx="0" cy="0"/>
+        </a:xfrm>
+      </p:grpSpPr>
+      <p:sp>
+        <p:nvSpPr>
+          <p:cNvPr id="2" name="Title 1">
+            <a:extLst>
+              <a:ext uri="{FF2B5EF4-FFF2-40B4-BE49-F238E27FC236}">
+                <a16:creationId xmlns:a16="http://schemas.microsoft.com/office/drawing/2014/main" id="{5791A5FD-59FD-415F-55C3-0E5A230CF037}"/>
+              </a:ext>
+            </a:extLst>
+          </p:cNvPr>
+          <p:cNvSpPr>
+            <a:spLocks noGrp="1"/>
+          </p:cNvSpPr>
+          <p:nvPr>
+            <p:ph type="title"/>
+          </p:nvPr>
+        </p:nvSpPr>
+        <p:spPr/>
+        <p:txBody>
+          <a:bodyPr/>
+          <a:lstStyle/>
+          <a:p>
+            <a:endParaRPr lang="en-IN"/>
+          </a:p>
+        </p:txBody>
+      </p:sp>
+      <p:sp>
+        <p:nvSpPr>
+          <p:cNvPr id="3" name="Content Placeholder 2">
+            <a:extLst>
+              <a:ext uri="{FF2B5EF4-FFF2-40B4-BE49-F238E27FC236}">
+                <a16:creationId xmlns:a16="http://schemas.microsoft.com/office/drawing/2014/main" id="{08E1E7FD-CAE2-7DE2-7806-8D36A4828504}"/>
+              </a:ext>
+            </a:extLst>
+          </p:cNvPr>
+          <p:cNvSpPr>
+            <a:spLocks noGrp="1"/>
+          </p:cNvSpPr>
+          <p:nvPr>
+            <p:ph idx="1"/>
+          </p:nvPr>
+        </p:nvSpPr>
+        <p:spPr>
+          <a:xfrm>
+            <a:off x="1154954" y="2603500"/>
+            <a:ext cx="10394847" cy="3743512"/>
+          </a:xfrm>
+        </p:spPr>
+        <p:txBody>
+          <a:bodyPr/>
+          <a:lstStyle/>
+          <a:p>
+            <a:endParaRPr lang="en-IN" dirty="0"/>
+          </a:p>
+        </p:txBody>
+      </p:sp>
+    </p:spTree>
+    <p:extLst>
+      <p:ext uri="{BB962C8B-B14F-4D97-AF65-F5344CB8AC3E}">
+        <p14:creationId xmlns:p14="http://schemas.microsoft.com/office/powerpoint/2010/main" val="3771106012"/>
+      </p:ext>
+    </p:extLst>
+  </p:cSld>
+  <p:clrMapOvr>
+    <a:masterClrMapping/>
+  </p:clrMapOvr>
+</p:sld>
+</file>
+
+<file path=ppt/slides/slide56.xml><?xml version="1.0" encoding="utf-8"?>
+<p:sld xmlns:a="http://schemas.openxmlformats.org/drawingml/2006/main" xmlns:r="http://schemas.openxmlformats.org/officeDocument/2006/relationships" xmlns:p="http://schemas.openxmlformats.org/presentationml/2006/main">
+  <p:cSld>
+    <p:spTree>
+      <p:nvGrpSpPr>
+        <p:cNvPr id="1" name="">
+          <a:extLst>
+            <a:ext uri="{FF2B5EF4-FFF2-40B4-BE49-F238E27FC236}">
+              <a16:creationId xmlns:a16="http://schemas.microsoft.com/office/drawing/2014/main" id="{7847A34F-26D5-2885-3350-D747AC8FA9CA}"/>
+            </a:ext>
+          </a:extLst>
+        </p:cNvPr>
+        <p:cNvGrpSpPr/>
+        <p:nvPr/>
+      </p:nvGrpSpPr>
+      <p:grpSpPr>
+        <a:xfrm>
+          <a:off x="0" y="0"/>
+          <a:ext cx="0" cy="0"/>
+          <a:chOff x="0" y="0"/>
+          <a:chExt cx="0" cy="0"/>
+        </a:xfrm>
+      </p:grpSpPr>
+      <p:sp>
+        <p:nvSpPr>
+          <p:cNvPr id="2" name="Title 1">
+            <a:extLst>
+              <a:ext uri="{FF2B5EF4-FFF2-40B4-BE49-F238E27FC236}">
+                <a16:creationId xmlns:a16="http://schemas.microsoft.com/office/drawing/2014/main" id="{96C92849-AFA4-27F2-4EFE-E5C8AFFEB087}"/>
+              </a:ext>
+            </a:extLst>
+          </p:cNvPr>
+          <p:cNvSpPr>
+            <a:spLocks noGrp="1"/>
+          </p:cNvSpPr>
+          <p:nvPr>
+            <p:ph type="title"/>
+          </p:nvPr>
+        </p:nvSpPr>
+        <p:spPr/>
+        <p:txBody>
+          <a:bodyPr/>
+          <a:lstStyle/>
+          <a:p>
+            <a:endParaRPr lang="en-IN"/>
+          </a:p>
+        </p:txBody>
+      </p:sp>
+      <p:sp>
+        <p:nvSpPr>
+          <p:cNvPr id="3" name="Content Placeholder 2">
+            <a:extLst>
+              <a:ext uri="{FF2B5EF4-FFF2-40B4-BE49-F238E27FC236}">
+                <a16:creationId xmlns:a16="http://schemas.microsoft.com/office/drawing/2014/main" id="{4C3C11E4-675D-D672-3A06-332B3343A1D9}"/>
+              </a:ext>
+            </a:extLst>
+          </p:cNvPr>
+          <p:cNvSpPr>
+            <a:spLocks noGrp="1"/>
+          </p:cNvSpPr>
+          <p:nvPr>
+            <p:ph idx="1"/>
+          </p:nvPr>
+        </p:nvSpPr>
+        <p:spPr>
+          <a:xfrm>
+            <a:off x="1154954" y="2603500"/>
+            <a:ext cx="10394847" cy="3743512"/>
+          </a:xfrm>
+        </p:spPr>
+        <p:txBody>
+          <a:bodyPr/>
+          <a:lstStyle/>
+          <a:p>
+            <a:endParaRPr lang="en-IN" dirty="0"/>
+          </a:p>
+        </p:txBody>
+      </p:sp>
+    </p:spTree>
+    <p:extLst>
+      <p:ext uri="{BB962C8B-B14F-4D97-AF65-F5344CB8AC3E}">
+        <p14:creationId xmlns:p14="http://schemas.microsoft.com/office/powerpoint/2010/main" val="4132550380"/>
+      </p:ext>
+    </p:extLst>
+  </p:cSld>
+  <p:clrMapOvr>
+    <a:masterClrMapping/>
+  </p:clrMapOvr>
+</p:sld>
+</file>
+
+<file path=ppt/slides/slide57.xml><?xml version="1.0" encoding="utf-8"?>
+<p:sld xmlns:a="http://schemas.openxmlformats.org/drawingml/2006/main" xmlns:r="http://schemas.openxmlformats.org/officeDocument/2006/relationships" xmlns:p="http://schemas.openxmlformats.org/presentationml/2006/main">
+  <p:cSld>
+    <p:spTree>
+      <p:nvGrpSpPr>
+        <p:cNvPr id="1" name="">
+          <a:extLst>
+            <a:ext uri="{FF2B5EF4-FFF2-40B4-BE49-F238E27FC236}">
+              <a16:creationId xmlns:a16="http://schemas.microsoft.com/office/drawing/2014/main" id="{E16AF6F0-AB8E-3D4C-DFCF-D1A28B9F6F7C}"/>
+            </a:ext>
+          </a:extLst>
+        </p:cNvPr>
+        <p:cNvGrpSpPr/>
+        <p:nvPr/>
+      </p:nvGrpSpPr>
+      <p:grpSpPr>
+        <a:xfrm>
+          <a:off x="0" y="0"/>
+          <a:ext cx="0" cy="0"/>
+          <a:chOff x="0" y="0"/>
+          <a:chExt cx="0" cy="0"/>
+        </a:xfrm>
+      </p:grpSpPr>
+      <p:sp>
+        <p:nvSpPr>
+          <p:cNvPr id="2" name="Title 1">
+            <a:extLst>
+              <a:ext uri="{FF2B5EF4-FFF2-40B4-BE49-F238E27FC236}">
+                <a16:creationId xmlns:a16="http://schemas.microsoft.com/office/drawing/2014/main" id="{F43B57F8-B5A2-B8D5-993D-E55F24F6FC1A}"/>
+              </a:ext>
+            </a:extLst>
+          </p:cNvPr>
+          <p:cNvSpPr>
+            <a:spLocks noGrp="1"/>
+          </p:cNvSpPr>
+          <p:nvPr>
+            <p:ph type="title"/>
+          </p:nvPr>
+        </p:nvSpPr>
+        <p:spPr/>
+        <p:txBody>
+          <a:bodyPr/>
+          <a:lstStyle/>
+          <a:p>
+            <a:endParaRPr lang="en-IN"/>
+          </a:p>
+        </p:txBody>
+      </p:sp>
+      <p:sp>
+        <p:nvSpPr>
+          <p:cNvPr id="3" name="Content Placeholder 2">
+            <a:extLst>
+              <a:ext uri="{FF2B5EF4-FFF2-40B4-BE49-F238E27FC236}">
+                <a16:creationId xmlns:a16="http://schemas.microsoft.com/office/drawing/2014/main" id="{DF810E46-63D8-11B3-7A39-160265F7F579}"/>
+              </a:ext>
+            </a:extLst>
+          </p:cNvPr>
+          <p:cNvSpPr>
+            <a:spLocks noGrp="1"/>
+          </p:cNvSpPr>
+          <p:nvPr>
+            <p:ph idx="1"/>
+          </p:nvPr>
+        </p:nvSpPr>
+        <p:spPr>
+          <a:xfrm>
+            <a:off x="1154954" y="2603500"/>
+            <a:ext cx="10394847" cy="3743512"/>
+          </a:xfrm>
+        </p:spPr>
+        <p:txBody>
+          <a:bodyPr/>
+          <a:lstStyle/>
+          <a:p>
+            <a:endParaRPr lang="en-IN" dirty="0"/>
+          </a:p>
+        </p:txBody>
+      </p:sp>
+    </p:spTree>
+    <p:extLst>
+      <p:ext uri="{BB962C8B-B14F-4D97-AF65-F5344CB8AC3E}">
+        <p14:creationId xmlns:p14="http://schemas.microsoft.com/office/powerpoint/2010/main" val="3091326088"/>
+      </p:ext>
+    </p:extLst>
+  </p:cSld>
+  <p:clrMapOvr>
+    <a:masterClrMapping/>
+  </p:clrMapOvr>
+</p:sld>
+</file>
+
+<file path=ppt/slides/slide58.xml><?xml version="1.0" encoding="utf-8"?>
+<p:sld xmlns:a="http://schemas.openxmlformats.org/drawingml/2006/main" xmlns:r="http://schemas.openxmlformats.org/officeDocument/2006/relationships" xmlns:p="http://schemas.openxmlformats.org/presentationml/2006/main">
+  <p:cSld>
+    <p:spTree>
+      <p:nvGrpSpPr>
+        <p:cNvPr id="1" name="">
+          <a:extLst>
+            <a:ext uri="{FF2B5EF4-FFF2-40B4-BE49-F238E27FC236}">
+              <a16:creationId xmlns:a16="http://schemas.microsoft.com/office/drawing/2014/main" id="{306B6BE9-6945-3C95-E972-DD906640B4FA}"/>
+            </a:ext>
+          </a:extLst>
+        </p:cNvPr>
+        <p:cNvGrpSpPr/>
+        <p:nvPr/>
+      </p:nvGrpSpPr>
+      <p:grpSpPr>
+        <a:xfrm>
+          <a:off x="0" y="0"/>
+          <a:ext cx="0" cy="0"/>
+          <a:chOff x="0" y="0"/>
+          <a:chExt cx="0" cy="0"/>
+        </a:xfrm>
+      </p:grpSpPr>
+      <p:sp>
+        <p:nvSpPr>
+          <p:cNvPr id="2" name="Title 1">
+            <a:extLst>
+              <a:ext uri="{FF2B5EF4-FFF2-40B4-BE49-F238E27FC236}">
+                <a16:creationId xmlns:a16="http://schemas.microsoft.com/office/drawing/2014/main" id="{E769C8E8-41DB-7E88-2F28-CDBFF1D42517}"/>
+              </a:ext>
+            </a:extLst>
+          </p:cNvPr>
+          <p:cNvSpPr>
+            <a:spLocks noGrp="1"/>
+          </p:cNvSpPr>
+          <p:nvPr>
+            <p:ph type="title"/>
+          </p:nvPr>
+        </p:nvSpPr>
+        <p:spPr/>
+        <p:txBody>
+          <a:bodyPr/>
+          <a:lstStyle/>
+          <a:p>
+            <a:endParaRPr lang="en-IN"/>
+          </a:p>
+        </p:txBody>
+      </p:sp>
+      <p:sp>
+        <p:nvSpPr>
+          <p:cNvPr id="3" name="Content Placeholder 2">
+            <a:extLst>
+              <a:ext uri="{FF2B5EF4-FFF2-40B4-BE49-F238E27FC236}">
+                <a16:creationId xmlns:a16="http://schemas.microsoft.com/office/drawing/2014/main" id="{61FF046D-E896-77E5-6CD3-0B4BD8633AF7}"/>
+              </a:ext>
+            </a:extLst>
+          </p:cNvPr>
+          <p:cNvSpPr>
+            <a:spLocks noGrp="1"/>
+          </p:cNvSpPr>
+          <p:nvPr>
+            <p:ph idx="1"/>
+          </p:nvPr>
+        </p:nvSpPr>
+        <p:spPr>
+          <a:xfrm>
+            <a:off x="1154954" y="2603500"/>
+            <a:ext cx="10394847" cy="3743512"/>
+          </a:xfrm>
+        </p:spPr>
+        <p:txBody>
+          <a:bodyPr/>
+          <a:lstStyle/>
+          <a:p>
+            <a:endParaRPr lang="en-IN" dirty="0"/>
+          </a:p>
+        </p:txBody>
+      </p:sp>
+    </p:spTree>
+    <p:extLst>
+      <p:ext uri="{BB962C8B-B14F-4D97-AF65-F5344CB8AC3E}">
+        <p14:creationId xmlns:p14="http://schemas.microsoft.com/office/powerpoint/2010/main" val="108756183"/>
+      </p:ext>
+    </p:extLst>
+  </p:cSld>
+  <p:clrMapOvr>
+    <a:masterClrMapping/>
+  </p:clrMapOvr>
+</p:sld>
+</file>
+
+<file path=ppt/slides/slide59.xml><?xml version="1.0" encoding="utf-8"?>
+<p:sld xmlns:a="http://schemas.openxmlformats.org/drawingml/2006/main" xmlns:r="http://schemas.openxmlformats.org/officeDocument/2006/relationships" xmlns:p="http://schemas.openxmlformats.org/presentationml/2006/main">
+  <p:cSld>
+    <p:spTree>
+      <p:nvGrpSpPr>
+        <p:cNvPr id="1" name="">
+          <a:extLst>
+            <a:ext uri="{FF2B5EF4-FFF2-40B4-BE49-F238E27FC236}">
+              <a16:creationId xmlns:a16="http://schemas.microsoft.com/office/drawing/2014/main" id="{EA2943CA-4FAA-4DD5-D6A4-3549A2FE806A}"/>
+            </a:ext>
+          </a:extLst>
+        </p:cNvPr>
+        <p:cNvGrpSpPr/>
+        <p:nvPr/>
+      </p:nvGrpSpPr>
+      <p:grpSpPr>
+        <a:xfrm>
+          <a:off x="0" y="0"/>
+          <a:ext cx="0" cy="0"/>
+          <a:chOff x="0" y="0"/>
+          <a:chExt cx="0" cy="0"/>
+        </a:xfrm>
+      </p:grpSpPr>
+      <p:sp>
+        <p:nvSpPr>
+          <p:cNvPr id="2" name="Title 1">
+            <a:extLst>
+              <a:ext uri="{FF2B5EF4-FFF2-40B4-BE49-F238E27FC236}">
+                <a16:creationId xmlns:a16="http://schemas.microsoft.com/office/drawing/2014/main" id="{5EDC063D-895A-0B8A-2CF8-29EA27D77FFD}"/>
+              </a:ext>
+            </a:extLst>
+          </p:cNvPr>
+          <p:cNvSpPr>
+            <a:spLocks noGrp="1"/>
+          </p:cNvSpPr>
+          <p:nvPr>
+            <p:ph type="title"/>
+          </p:nvPr>
+        </p:nvSpPr>
+        <p:spPr/>
+        <p:txBody>
+          <a:bodyPr/>
+          <a:lstStyle/>
+          <a:p>
+            <a:endParaRPr lang="en-IN"/>
+          </a:p>
+        </p:txBody>
+      </p:sp>
+      <p:sp>
+        <p:nvSpPr>
+          <p:cNvPr id="3" name="Content Placeholder 2">
+            <a:extLst>
+              <a:ext uri="{FF2B5EF4-FFF2-40B4-BE49-F238E27FC236}">
+                <a16:creationId xmlns:a16="http://schemas.microsoft.com/office/drawing/2014/main" id="{D49C1C6A-BD4D-740E-7B7E-6A500D542F79}"/>
+              </a:ext>
+            </a:extLst>
+          </p:cNvPr>
+          <p:cNvSpPr>
+            <a:spLocks noGrp="1"/>
+          </p:cNvSpPr>
+          <p:nvPr>
+            <p:ph idx="1"/>
+          </p:nvPr>
+        </p:nvSpPr>
+        <p:spPr>
+          <a:xfrm>
+            <a:off x="1154954" y="2603500"/>
+            <a:ext cx="10394847" cy="3743512"/>
+          </a:xfrm>
+        </p:spPr>
+        <p:txBody>
+          <a:bodyPr/>
+          <a:lstStyle/>
+          <a:p>
+            <a:endParaRPr lang="en-IN" dirty="0"/>
+          </a:p>
+        </p:txBody>
+      </p:sp>
+    </p:spTree>
+    <p:extLst>
+      <p:ext uri="{BB962C8B-B14F-4D97-AF65-F5344CB8AC3E}">
+        <p14:creationId xmlns:p14="http://schemas.microsoft.com/office/powerpoint/2010/main" val="3856977417"/>
+      </p:ext>
+    </p:extLst>
+  </p:cSld>
+  <p:clrMapOvr>
+    <a:masterClrMapping/>
+  </p:clrMapOvr>
+</p:sld>
+</file>
+
 <file path=ppt/slides/slide6.xml><?xml version="1.0" encoding="utf-8"?>
 <p:sld xmlns:a="http://schemas.openxmlformats.org/drawingml/2006/main" xmlns:r="http://schemas.openxmlformats.org/officeDocument/2006/relationships" xmlns:p="http://schemas.openxmlformats.org/presentationml/2006/main">
   <p:cSld>
@@ -18637,6 +22267,916 @@
     <p:extLst>
       <p:ext uri="{BB962C8B-B14F-4D97-AF65-F5344CB8AC3E}">
         <p14:creationId xmlns:p14="http://schemas.microsoft.com/office/powerpoint/2010/main" val="3564353260"/>
+      </p:ext>
+    </p:extLst>
+  </p:cSld>
+  <p:clrMapOvr>
+    <a:masterClrMapping/>
+  </p:clrMapOvr>
+</p:sld>
+</file>
+
+<file path=ppt/slides/slide60.xml><?xml version="1.0" encoding="utf-8"?>
+<p:sld xmlns:a="http://schemas.openxmlformats.org/drawingml/2006/main" xmlns:r="http://schemas.openxmlformats.org/officeDocument/2006/relationships" xmlns:p="http://schemas.openxmlformats.org/presentationml/2006/main">
+  <p:cSld>
+    <p:spTree>
+      <p:nvGrpSpPr>
+        <p:cNvPr id="1" name="">
+          <a:extLst>
+            <a:ext uri="{FF2B5EF4-FFF2-40B4-BE49-F238E27FC236}">
+              <a16:creationId xmlns:a16="http://schemas.microsoft.com/office/drawing/2014/main" id="{D03ECCD6-D92F-C3EE-3384-5C248B29C787}"/>
+            </a:ext>
+          </a:extLst>
+        </p:cNvPr>
+        <p:cNvGrpSpPr/>
+        <p:nvPr/>
+      </p:nvGrpSpPr>
+      <p:grpSpPr>
+        <a:xfrm>
+          <a:off x="0" y="0"/>
+          <a:ext cx="0" cy="0"/>
+          <a:chOff x="0" y="0"/>
+          <a:chExt cx="0" cy="0"/>
+        </a:xfrm>
+      </p:grpSpPr>
+      <p:sp>
+        <p:nvSpPr>
+          <p:cNvPr id="2" name="Title 1">
+            <a:extLst>
+              <a:ext uri="{FF2B5EF4-FFF2-40B4-BE49-F238E27FC236}">
+                <a16:creationId xmlns:a16="http://schemas.microsoft.com/office/drawing/2014/main" id="{271E14E0-A1C6-04D9-68BE-8B2D5D56237A}"/>
+              </a:ext>
+            </a:extLst>
+          </p:cNvPr>
+          <p:cNvSpPr>
+            <a:spLocks noGrp="1"/>
+          </p:cNvSpPr>
+          <p:nvPr>
+            <p:ph type="title"/>
+          </p:nvPr>
+        </p:nvSpPr>
+        <p:spPr/>
+        <p:txBody>
+          <a:bodyPr/>
+          <a:lstStyle/>
+          <a:p>
+            <a:endParaRPr lang="en-IN"/>
+          </a:p>
+        </p:txBody>
+      </p:sp>
+      <p:sp>
+        <p:nvSpPr>
+          <p:cNvPr id="3" name="Content Placeholder 2">
+            <a:extLst>
+              <a:ext uri="{FF2B5EF4-FFF2-40B4-BE49-F238E27FC236}">
+                <a16:creationId xmlns:a16="http://schemas.microsoft.com/office/drawing/2014/main" id="{71687DF9-C528-ACE6-B31A-1A963BED2DA6}"/>
+              </a:ext>
+            </a:extLst>
+          </p:cNvPr>
+          <p:cNvSpPr>
+            <a:spLocks noGrp="1"/>
+          </p:cNvSpPr>
+          <p:nvPr>
+            <p:ph idx="1"/>
+          </p:nvPr>
+        </p:nvSpPr>
+        <p:spPr>
+          <a:xfrm>
+            <a:off x="1154954" y="2603500"/>
+            <a:ext cx="10394847" cy="3743512"/>
+          </a:xfrm>
+        </p:spPr>
+        <p:txBody>
+          <a:bodyPr/>
+          <a:lstStyle/>
+          <a:p>
+            <a:endParaRPr lang="en-IN" dirty="0"/>
+          </a:p>
+        </p:txBody>
+      </p:sp>
+    </p:spTree>
+    <p:extLst>
+      <p:ext uri="{BB962C8B-B14F-4D97-AF65-F5344CB8AC3E}">
+        <p14:creationId xmlns:p14="http://schemas.microsoft.com/office/powerpoint/2010/main" val="2717509682"/>
+      </p:ext>
+    </p:extLst>
+  </p:cSld>
+  <p:clrMapOvr>
+    <a:masterClrMapping/>
+  </p:clrMapOvr>
+</p:sld>
+</file>
+
+<file path=ppt/slides/slide61.xml><?xml version="1.0" encoding="utf-8"?>
+<p:sld xmlns:a="http://schemas.openxmlformats.org/drawingml/2006/main" xmlns:r="http://schemas.openxmlformats.org/officeDocument/2006/relationships" xmlns:p="http://schemas.openxmlformats.org/presentationml/2006/main">
+  <p:cSld>
+    <p:spTree>
+      <p:nvGrpSpPr>
+        <p:cNvPr id="1" name="">
+          <a:extLst>
+            <a:ext uri="{FF2B5EF4-FFF2-40B4-BE49-F238E27FC236}">
+              <a16:creationId xmlns:a16="http://schemas.microsoft.com/office/drawing/2014/main" id="{89D28E88-A43F-C976-A00D-A927BF631EC7}"/>
+            </a:ext>
+          </a:extLst>
+        </p:cNvPr>
+        <p:cNvGrpSpPr/>
+        <p:nvPr/>
+      </p:nvGrpSpPr>
+      <p:grpSpPr>
+        <a:xfrm>
+          <a:off x="0" y="0"/>
+          <a:ext cx="0" cy="0"/>
+          <a:chOff x="0" y="0"/>
+          <a:chExt cx="0" cy="0"/>
+        </a:xfrm>
+      </p:grpSpPr>
+      <p:sp>
+        <p:nvSpPr>
+          <p:cNvPr id="2" name="Title 1">
+            <a:extLst>
+              <a:ext uri="{FF2B5EF4-FFF2-40B4-BE49-F238E27FC236}">
+                <a16:creationId xmlns:a16="http://schemas.microsoft.com/office/drawing/2014/main" id="{299BA85C-A356-26CB-F44E-A088E2DB3C97}"/>
+              </a:ext>
+            </a:extLst>
+          </p:cNvPr>
+          <p:cNvSpPr>
+            <a:spLocks noGrp="1"/>
+          </p:cNvSpPr>
+          <p:nvPr>
+            <p:ph type="title"/>
+          </p:nvPr>
+        </p:nvSpPr>
+        <p:spPr/>
+        <p:txBody>
+          <a:bodyPr/>
+          <a:lstStyle/>
+          <a:p>
+            <a:endParaRPr lang="en-IN"/>
+          </a:p>
+        </p:txBody>
+      </p:sp>
+      <p:sp>
+        <p:nvSpPr>
+          <p:cNvPr id="3" name="Content Placeholder 2">
+            <a:extLst>
+              <a:ext uri="{FF2B5EF4-FFF2-40B4-BE49-F238E27FC236}">
+                <a16:creationId xmlns:a16="http://schemas.microsoft.com/office/drawing/2014/main" id="{ABE7D04D-529D-A372-26BC-9F9764365E00}"/>
+              </a:ext>
+            </a:extLst>
+          </p:cNvPr>
+          <p:cNvSpPr>
+            <a:spLocks noGrp="1"/>
+          </p:cNvSpPr>
+          <p:nvPr>
+            <p:ph idx="1"/>
+          </p:nvPr>
+        </p:nvSpPr>
+        <p:spPr>
+          <a:xfrm>
+            <a:off x="1154954" y="2603500"/>
+            <a:ext cx="10394847" cy="3743512"/>
+          </a:xfrm>
+        </p:spPr>
+        <p:txBody>
+          <a:bodyPr/>
+          <a:lstStyle/>
+          <a:p>
+            <a:endParaRPr lang="en-IN" dirty="0"/>
+          </a:p>
+        </p:txBody>
+      </p:sp>
+    </p:spTree>
+    <p:extLst>
+      <p:ext uri="{BB962C8B-B14F-4D97-AF65-F5344CB8AC3E}">
+        <p14:creationId xmlns:p14="http://schemas.microsoft.com/office/powerpoint/2010/main" val="350844114"/>
+      </p:ext>
+    </p:extLst>
+  </p:cSld>
+  <p:clrMapOvr>
+    <a:masterClrMapping/>
+  </p:clrMapOvr>
+</p:sld>
+</file>
+
+<file path=ppt/slides/slide62.xml><?xml version="1.0" encoding="utf-8"?>
+<p:sld xmlns:a="http://schemas.openxmlformats.org/drawingml/2006/main" xmlns:r="http://schemas.openxmlformats.org/officeDocument/2006/relationships" xmlns:p="http://schemas.openxmlformats.org/presentationml/2006/main">
+  <p:cSld>
+    <p:spTree>
+      <p:nvGrpSpPr>
+        <p:cNvPr id="1" name="">
+          <a:extLst>
+            <a:ext uri="{FF2B5EF4-FFF2-40B4-BE49-F238E27FC236}">
+              <a16:creationId xmlns:a16="http://schemas.microsoft.com/office/drawing/2014/main" id="{E7707C66-43B9-71F2-F2DF-5B76CE3739DA}"/>
+            </a:ext>
+          </a:extLst>
+        </p:cNvPr>
+        <p:cNvGrpSpPr/>
+        <p:nvPr/>
+      </p:nvGrpSpPr>
+      <p:grpSpPr>
+        <a:xfrm>
+          <a:off x="0" y="0"/>
+          <a:ext cx="0" cy="0"/>
+          <a:chOff x="0" y="0"/>
+          <a:chExt cx="0" cy="0"/>
+        </a:xfrm>
+      </p:grpSpPr>
+      <p:sp>
+        <p:nvSpPr>
+          <p:cNvPr id="2" name="Title 1">
+            <a:extLst>
+              <a:ext uri="{FF2B5EF4-FFF2-40B4-BE49-F238E27FC236}">
+                <a16:creationId xmlns:a16="http://schemas.microsoft.com/office/drawing/2014/main" id="{0A390E8F-97E3-50AF-94DD-5D5B966E358C}"/>
+              </a:ext>
+            </a:extLst>
+          </p:cNvPr>
+          <p:cNvSpPr>
+            <a:spLocks noGrp="1"/>
+          </p:cNvSpPr>
+          <p:nvPr>
+            <p:ph type="title"/>
+          </p:nvPr>
+        </p:nvSpPr>
+        <p:spPr/>
+        <p:txBody>
+          <a:bodyPr/>
+          <a:lstStyle/>
+          <a:p>
+            <a:endParaRPr lang="en-IN"/>
+          </a:p>
+        </p:txBody>
+      </p:sp>
+      <p:sp>
+        <p:nvSpPr>
+          <p:cNvPr id="3" name="Content Placeholder 2">
+            <a:extLst>
+              <a:ext uri="{FF2B5EF4-FFF2-40B4-BE49-F238E27FC236}">
+                <a16:creationId xmlns:a16="http://schemas.microsoft.com/office/drawing/2014/main" id="{F197B5F7-D468-0DF0-CEA9-B3ADE5222096}"/>
+              </a:ext>
+            </a:extLst>
+          </p:cNvPr>
+          <p:cNvSpPr>
+            <a:spLocks noGrp="1"/>
+          </p:cNvSpPr>
+          <p:nvPr>
+            <p:ph idx="1"/>
+          </p:nvPr>
+        </p:nvSpPr>
+        <p:spPr>
+          <a:xfrm>
+            <a:off x="1154954" y="2603500"/>
+            <a:ext cx="10394847" cy="3743512"/>
+          </a:xfrm>
+        </p:spPr>
+        <p:txBody>
+          <a:bodyPr/>
+          <a:lstStyle/>
+          <a:p>
+            <a:endParaRPr lang="en-IN" dirty="0"/>
+          </a:p>
+        </p:txBody>
+      </p:sp>
+    </p:spTree>
+    <p:extLst>
+      <p:ext uri="{BB962C8B-B14F-4D97-AF65-F5344CB8AC3E}">
+        <p14:creationId xmlns:p14="http://schemas.microsoft.com/office/powerpoint/2010/main" val="422668827"/>
+      </p:ext>
+    </p:extLst>
+  </p:cSld>
+  <p:clrMapOvr>
+    <a:masterClrMapping/>
+  </p:clrMapOvr>
+</p:sld>
+</file>
+
+<file path=ppt/slides/slide63.xml><?xml version="1.0" encoding="utf-8"?>
+<p:sld xmlns:a="http://schemas.openxmlformats.org/drawingml/2006/main" xmlns:r="http://schemas.openxmlformats.org/officeDocument/2006/relationships" xmlns:p="http://schemas.openxmlformats.org/presentationml/2006/main">
+  <p:cSld>
+    <p:spTree>
+      <p:nvGrpSpPr>
+        <p:cNvPr id="1" name="">
+          <a:extLst>
+            <a:ext uri="{FF2B5EF4-FFF2-40B4-BE49-F238E27FC236}">
+              <a16:creationId xmlns:a16="http://schemas.microsoft.com/office/drawing/2014/main" id="{7A1D8BD4-1A75-614E-A733-F634414DA64F}"/>
+            </a:ext>
+          </a:extLst>
+        </p:cNvPr>
+        <p:cNvGrpSpPr/>
+        <p:nvPr/>
+      </p:nvGrpSpPr>
+      <p:grpSpPr>
+        <a:xfrm>
+          <a:off x="0" y="0"/>
+          <a:ext cx="0" cy="0"/>
+          <a:chOff x="0" y="0"/>
+          <a:chExt cx="0" cy="0"/>
+        </a:xfrm>
+      </p:grpSpPr>
+      <p:sp>
+        <p:nvSpPr>
+          <p:cNvPr id="2" name="Title 1">
+            <a:extLst>
+              <a:ext uri="{FF2B5EF4-FFF2-40B4-BE49-F238E27FC236}">
+                <a16:creationId xmlns:a16="http://schemas.microsoft.com/office/drawing/2014/main" id="{CFCD5478-A41C-9BEA-9CE3-B8ED1B2B55A2}"/>
+              </a:ext>
+            </a:extLst>
+          </p:cNvPr>
+          <p:cNvSpPr>
+            <a:spLocks noGrp="1"/>
+          </p:cNvSpPr>
+          <p:nvPr>
+            <p:ph type="title"/>
+          </p:nvPr>
+        </p:nvSpPr>
+        <p:spPr/>
+        <p:txBody>
+          <a:bodyPr/>
+          <a:lstStyle/>
+          <a:p>
+            <a:endParaRPr lang="en-IN"/>
+          </a:p>
+        </p:txBody>
+      </p:sp>
+      <p:sp>
+        <p:nvSpPr>
+          <p:cNvPr id="3" name="Content Placeholder 2">
+            <a:extLst>
+              <a:ext uri="{FF2B5EF4-FFF2-40B4-BE49-F238E27FC236}">
+                <a16:creationId xmlns:a16="http://schemas.microsoft.com/office/drawing/2014/main" id="{8F822199-68FA-CF9A-6979-FD1D6DF49C17}"/>
+              </a:ext>
+            </a:extLst>
+          </p:cNvPr>
+          <p:cNvSpPr>
+            <a:spLocks noGrp="1"/>
+          </p:cNvSpPr>
+          <p:nvPr>
+            <p:ph idx="1"/>
+          </p:nvPr>
+        </p:nvSpPr>
+        <p:spPr>
+          <a:xfrm>
+            <a:off x="1154954" y="2603500"/>
+            <a:ext cx="10394847" cy="3743512"/>
+          </a:xfrm>
+        </p:spPr>
+        <p:txBody>
+          <a:bodyPr/>
+          <a:lstStyle/>
+          <a:p>
+            <a:endParaRPr lang="en-IN" dirty="0"/>
+          </a:p>
+        </p:txBody>
+      </p:sp>
+    </p:spTree>
+    <p:extLst>
+      <p:ext uri="{BB962C8B-B14F-4D97-AF65-F5344CB8AC3E}">
+        <p14:creationId xmlns:p14="http://schemas.microsoft.com/office/powerpoint/2010/main" val="2322698389"/>
+      </p:ext>
+    </p:extLst>
+  </p:cSld>
+  <p:clrMapOvr>
+    <a:masterClrMapping/>
+  </p:clrMapOvr>
+</p:sld>
+</file>
+
+<file path=ppt/slides/slide64.xml><?xml version="1.0" encoding="utf-8"?>
+<p:sld xmlns:a="http://schemas.openxmlformats.org/drawingml/2006/main" xmlns:r="http://schemas.openxmlformats.org/officeDocument/2006/relationships" xmlns:p="http://schemas.openxmlformats.org/presentationml/2006/main">
+  <p:cSld>
+    <p:spTree>
+      <p:nvGrpSpPr>
+        <p:cNvPr id="1" name="">
+          <a:extLst>
+            <a:ext uri="{FF2B5EF4-FFF2-40B4-BE49-F238E27FC236}">
+              <a16:creationId xmlns:a16="http://schemas.microsoft.com/office/drawing/2014/main" id="{7B80C168-A52C-19BB-86A9-1C55C5CB0C8D}"/>
+            </a:ext>
+          </a:extLst>
+        </p:cNvPr>
+        <p:cNvGrpSpPr/>
+        <p:nvPr/>
+      </p:nvGrpSpPr>
+      <p:grpSpPr>
+        <a:xfrm>
+          <a:off x="0" y="0"/>
+          <a:ext cx="0" cy="0"/>
+          <a:chOff x="0" y="0"/>
+          <a:chExt cx="0" cy="0"/>
+        </a:xfrm>
+      </p:grpSpPr>
+      <p:sp>
+        <p:nvSpPr>
+          <p:cNvPr id="2" name="Title 1">
+            <a:extLst>
+              <a:ext uri="{FF2B5EF4-FFF2-40B4-BE49-F238E27FC236}">
+                <a16:creationId xmlns:a16="http://schemas.microsoft.com/office/drawing/2014/main" id="{FACC8F96-D04C-6403-A3AB-575592ED37B4}"/>
+              </a:ext>
+            </a:extLst>
+          </p:cNvPr>
+          <p:cNvSpPr>
+            <a:spLocks noGrp="1"/>
+          </p:cNvSpPr>
+          <p:nvPr>
+            <p:ph type="title"/>
+          </p:nvPr>
+        </p:nvSpPr>
+        <p:spPr/>
+        <p:txBody>
+          <a:bodyPr/>
+          <a:lstStyle/>
+          <a:p>
+            <a:endParaRPr lang="en-IN"/>
+          </a:p>
+        </p:txBody>
+      </p:sp>
+      <p:sp>
+        <p:nvSpPr>
+          <p:cNvPr id="3" name="Content Placeholder 2">
+            <a:extLst>
+              <a:ext uri="{FF2B5EF4-FFF2-40B4-BE49-F238E27FC236}">
+                <a16:creationId xmlns:a16="http://schemas.microsoft.com/office/drawing/2014/main" id="{1290BEE0-55B2-64F5-ADD8-D453CD3AFA35}"/>
+              </a:ext>
+            </a:extLst>
+          </p:cNvPr>
+          <p:cNvSpPr>
+            <a:spLocks noGrp="1"/>
+          </p:cNvSpPr>
+          <p:nvPr>
+            <p:ph idx="1"/>
+          </p:nvPr>
+        </p:nvSpPr>
+        <p:spPr>
+          <a:xfrm>
+            <a:off x="1154954" y="2603500"/>
+            <a:ext cx="10394847" cy="3743512"/>
+          </a:xfrm>
+        </p:spPr>
+        <p:txBody>
+          <a:bodyPr/>
+          <a:lstStyle/>
+          <a:p>
+            <a:endParaRPr lang="en-IN" dirty="0"/>
+          </a:p>
+        </p:txBody>
+      </p:sp>
+    </p:spTree>
+    <p:extLst>
+      <p:ext uri="{BB962C8B-B14F-4D97-AF65-F5344CB8AC3E}">
+        <p14:creationId xmlns:p14="http://schemas.microsoft.com/office/powerpoint/2010/main" val="1191345940"/>
+      </p:ext>
+    </p:extLst>
+  </p:cSld>
+  <p:clrMapOvr>
+    <a:masterClrMapping/>
+  </p:clrMapOvr>
+</p:sld>
+</file>
+
+<file path=ppt/slides/slide65.xml><?xml version="1.0" encoding="utf-8"?>
+<p:sld xmlns:a="http://schemas.openxmlformats.org/drawingml/2006/main" xmlns:r="http://schemas.openxmlformats.org/officeDocument/2006/relationships" xmlns:p="http://schemas.openxmlformats.org/presentationml/2006/main">
+  <p:cSld>
+    <p:spTree>
+      <p:nvGrpSpPr>
+        <p:cNvPr id="1" name="">
+          <a:extLst>
+            <a:ext uri="{FF2B5EF4-FFF2-40B4-BE49-F238E27FC236}">
+              <a16:creationId xmlns:a16="http://schemas.microsoft.com/office/drawing/2014/main" id="{1849FC98-3677-76BD-AC46-6D540032DC51}"/>
+            </a:ext>
+          </a:extLst>
+        </p:cNvPr>
+        <p:cNvGrpSpPr/>
+        <p:nvPr/>
+      </p:nvGrpSpPr>
+      <p:grpSpPr>
+        <a:xfrm>
+          <a:off x="0" y="0"/>
+          <a:ext cx="0" cy="0"/>
+          <a:chOff x="0" y="0"/>
+          <a:chExt cx="0" cy="0"/>
+        </a:xfrm>
+      </p:grpSpPr>
+      <p:sp>
+        <p:nvSpPr>
+          <p:cNvPr id="2" name="Title 1">
+            <a:extLst>
+              <a:ext uri="{FF2B5EF4-FFF2-40B4-BE49-F238E27FC236}">
+                <a16:creationId xmlns:a16="http://schemas.microsoft.com/office/drawing/2014/main" id="{208551F7-5654-F35E-B0EC-7F530709E9E1}"/>
+              </a:ext>
+            </a:extLst>
+          </p:cNvPr>
+          <p:cNvSpPr>
+            <a:spLocks noGrp="1"/>
+          </p:cNvSpPr>
+          <p:nvPr>
+            <p:ph type="title"/>
+          </p:nvPr>
+        </p:nvSpPr>
+        <p:spPr/>
+        <p:txBody>
+          <a:bodyPr/>
+          <a:lstStyle/>
+          <a:p>
+            <a:endParaRPr lang="en-IN"/>
+          </a:p>
+        </p:txBody>
+      </p:sp>
+      <p:sp>
+        <p:nvSpPr>
+          <p:cNvPr id="3" name="Content Placeholder 2">
+            <a:extLst>
+              <a:ext uri="{FF2B5EF4-FFF2-40B4-BE49-F238E27FC236}">
+                <a16:creationId xmlns:a16="http://schemas.microsoft.com/office/drawing/2014/main" id="{24DD95B1-20BB-13DA-C960-A1E97C418535}"/>
+              </a:ext>
+            </a:extLst>
+          </p:cNvPr>
+          <p:cNvSpPr>
+            <a:spLocks noGrp="1"/>
+          </p:cNvSpPr>
+          <p:nvPr>
+            <p:ph idx="1"/>
+          </p:nvPr>
+        </p:nvSpPr>
+        <p:spPr>
+          <a:xfrm>
+            <a:off x="1154954" y="2603500"/>
+            <a:ext cx="10394847" cy="3743512"/>
+          </a:xfrm>
+        </p:spPr>
+        <p:txBody>
+          <a:bodyPr/>
+          <a:lstStyle/>
+          <a:p>
+            <a:endParaRPr lang="en-IN" dirty="0"/>
+          </a:p>
+        </p:txBody>
+      </p:sp>
+    </p:spTree>
+    <p:extLst>
+      <p:ext uri="{BB962C8B-B14F-4D97-AF65-F5344CB8AC3E}">
+        <p14:creationId xmlns:p14="http://schemas.microsoft.com/office/powerpoint/2010/main" val="3103392538"/>
+      </p:ext>
+    </p:extLst>
+  </p:cSld>
+  <p:clrMapOvr>
+    <a:masterClrMapping/>
+  </p:clrMapOvr>
+</p:sld>
+</file>
+
+<file path=ppt/slides/slide66.xml><?xml version="1.0" encoding="utf-8"?>
+<p:sld xmlns:a="http://schemas.openxmlformats.org/drawingml/2006/main" xmlns:r="http://schemas.openxmlformats.org/officeDocument/2006/relationships" xmlns:p="http://schemas.openxmlformats.org/presentationml/2006/main">
+  <p:cSld>
+    <p:spTree>
+      <p:nvGrpSpPr>
+        <p:cNvPr id="1" name="">
+          <a:extLst>
+            <a:ext uri="{FF2B5EF4-FFF2-40B4-BE49-F238E27FC236}">
+              <a16:creationId xmlns:a16="http://schemas.microsoft.com/office/drawing/2014/main" id="{ECB4F123-F0FD-40BC-5E4D-B7FF4D2CE988}"/>
+            </a:ext>
+          </a:extLst>
+        </p:cNvPr>
+        <p:cNvGrpSpPr/>
+        <p:nvPr/>
+      </p:nvGrpSpPr>
+      <p:grpSpPr>
+        <a:xfrm>
+          <a:off x="0" y="0"/>
+          <a:ext cx="0" cy="0"/>
+          <a:chOff x="0" y="0"/>
+          <a:chExt cx="0" cy="0"/>
+        </a:xfrm>
+      </p:grpSpPr>
+      <p:sp>
+        <p:nvSpPr>
+          <p:cNvPr id="2" name="Title 1">
+            <a:extLst>
+              <a:ext uri="{FF2B5EF4-FFF2-40B4-BE49-F238E27FC236}">
+                <a16:creationId xmlns:a16="http://schemas.microsoft.com/office/drawing/2014/main" id="{D1ACD354-30CF-8633-FBA0-00D9986BC84F}"/>
+              </a:ext>
+            </a:extLst>
+          </p:cNvPr>
+          <p:cNvSpPr>
+            <a:spLocks noGrp="1"/>
+          </p:cNvSpPr>
+          <p:nvPr>
+            <p:ph type="title"/>
+          </p:nvPr>
+        </p:nvSpPr>
+        <p:spPr/>
+        <p:txBody>
+          <a:bodyPr/>
+          <a:lstStyle/>
+          <a:p>
+            <a:endParaRPr lang="en-IN"/>
+          </a:p>
+        </p:txBody>
+      </p:sp>
+      <p:sp>
+        <p:nvSpPr>
+          <p:cNvPr id="3" name="Content Placeholder 2">
+            <a:extLst>
+              <a:ext uri="{FF2B5EF4-FFF2-40B4-BE49-F238E27FC236}">
+                <a16:creationId xmlns:a16="http://schemas.microsoft.com/office/drawing/2014/main" id="{7FC95C78-7D73-9C54-90B1-4C358CFBCC24}"/>
+              </a:ext>
+            </a:extLst>
+          </p:cNvPr>
+          <p:cNvSpPr>
+            <a:spLocks noGrp="1"/>
+          </p:cNvSpPr>
+          <p:nvPr>
+            <p:ph idx="1"/>
+          </p:nvPr>
+        </p:nvSpPr>
+        <p:spPr>
+          <a:xfrm>
+            <a:off x="1154954" y="2603500"/>
+            <a:ext cx="10394847" cy="3743512"/>
+          </a:xfrm>
+        </p:spPr>
+        <p:txBody>
+          <a:bodyPr/>
+          <a:lstStyle/>
+          <a:p>
+            <a:endParaRPr lang="en-IN" dirty="0"/>
+          </a:p>
+        </p:txBody>
+      </p:sp>
+    </p:spTree>
+    <p:extLst>
+      <p:ext uri="{BB962C8B-B14F-4D97-AF65-F5344CB8AC3E}">
+        <p14:creationId xmlns:p14="http://schemas.microsoft.com/office/powerpoint/2010/main" val="76045060"/>
+      </p:ext>
+    </p:extLst>
+  </p:cSld>
+  <p:clrMapOvr>
+    <a:masterClrMapping/>
+  </p:clrMapOvr>
+</p:sld>
+</file>
+
+<file path=ppt/slides/slide67.xml><?xml version="1.0" encoding="utf-8"?>
+<p:sld xmlns:a="http://schemas.openxmlformats.org/drawingml/2006/main" xmlns:r="http://schemas.openxmlformats.org/officeDocument/2006/relationships" xmlns:p="http://schemas.openxmlformats.org/presentationml/2006/main">
+  <p:cSld>
+    <p:spTree>
+      <p:nvGrpSpPr>
+        <p:cNvPr id="1" name="">
+          <a:extLst>
+            <a:ext uri="{FF2B5EF4-FFF2-40B4-BE49-F238E27FC236}">
+              <a16:creationId xmlns:a16="http://schemas.microsoft.com/office/drawing/2014/main" id="{39F1C408-369A-01AF-CBD3-51134A3B9477}"/>
+            </a:ext>
+          </a:extLst>
+        </p:cNvPr>
+        <p:cNvGrpSpPr/>
+        <p:nvPr/>
+      </p:nvGrpSpPr>
+      <p:grpSpPr>
+        <a:xfrm>
+          <a:off x="0" y="0"/>
+          <a:ext cx="0" cy="0"/>
+          <a:chOff x="0" y="0"/>
+          <a:chExt cx="0" cy="0"/>
+        </a:xfrm>
+      </p:grpSpPr>
+      <p:sp>
+        <p:nvSpPr>
+          <p:cNvPr id="2" name="Title 1">
+            <a:extLst>
+              <a:ext uri="{FF2B5EF4-FFF2-40B4-BE49-F238E27FC236}">
+                <a16:creationId xmlns:a16="http://schemas.microsoft.com/office/drawing/2014/main" id="{A0C3DB39-806E-EE87-B854-2CFAE408458A}"/>
+              </a:ext>
+            </a:extLst>
+          </p:cNvPr>
+          <p:cNvSpPr>
+            <a:spLocks noGrp="1"/>
+          </p:cNvSpPr>
+          <p:nvPr>
+            <p:ph type="title"/>
+          </p:nvPr>
+        </p:nvSpPr>
+        <p:spPr/>
+        <p:txBody>
+          <a:bodyPr/>
+          <a:lstStyle/>
+          <a:p>
+            <a:endParaRPr lang="en-IN"/>
+          </a:p>
+        </p:txBody>
+      </p:sp>
+      <p:sp>
+        <p:nvSpPr>
+          <p:cNvPr id="3" name="Content Placeholder 2">
+            <a:extLst>
+              <a:ext uri="{FF2B5EF4-FFF2-40B4-BE49-F238E27FC236}">
+                <a16:creationId xmlns:a16="http://schemas.microsoft.com/office/drawing/2014/main" id="{955E42CC-6F2E-E534-6C21-90DDB1443201}"/>
+              </a:ext>
+            </a:extLst>
+          </p:cNvPr>
+          <p:cNvSpPr>
+            <a:spLocks noGrp="1"/>
+          </p:cNvSpPr>
+          <p:nvPr>
+            <p:ph idx="1"/>
+          </p:nvPr>
+        </p:nvSpPr>
+        <p:spPr>
+          <a:xfrm>
+            <a:off x="1154954" y="2603500"/>
+            <a:ext cx="10394847" cy="3743512"/>
+          </a:xfrm>
+        </p:spPr>
+        <p:txBody>
+          <a:bodyPr/>
+          <a:lstStyle/>
+          <a:p>
+            <a:endParaRPr lang="en-IN" dirty="0"/>
+          </a:p>
+        </p:txBody>
+      </p:sp>
+    </p:spTree>
+    <p:extLst>
+      <p:ext uri="{BB962C8B-B14F-4D97-AF65-F5344CB8AC3E}">
+        <p14:creationId xmlns:p14="http://schemas.microsoft.com/office/powerpoint/2010/main" val="3139149035"/>
+      </p:ext>
+    </p:extLst>
+  </p:cSld>
+  <p:clrMapOvr>
+    <a:masterClrMapping/>
+  </p:clrMapOvr>
+</p:sld>
+</file>
+
+<file path=ppt/slides/slide68.xml><?xml version="1.0" encoding="utf-8"?>
+<p:sld xmlns:a="http://schemas.openxmlformats.org/drawingml/2006/main" xmlns:r="http://schemas.openxmlformats.org/officeDocument/2006/relationships" xmlns:p="http://schemas.openxmlformats.org/presentationml/2006/main">
+  <p:cSld>
+    <p:spTree>
+      <p:nvGrpSpPr>
+        <p:cNvPr id="1" name="">
+          <a:extLst>
+            <a:ext uri="{FF2B5EF4-FFF2-40B4-BE49-F238E27FC236}">
+              <a16:creationId xmlns:a16="http://schemas.microsoft.com/office/drawing/2014/main" id="{AC8D9724-BDE8-D8E4-FB08-F8F4824D6C64}"/>
+            </a:ext>
+          </a:extLst>
+        </p:cNvPr>
+        <p:cNvGrpSpPr/>
+        <p:nvPr/>
+      </p:nvGrpSpPr>
+      <p:grpSpPr>
+        <a:xfrm>
+          <a:off x="0" y="0"/>
+          <a:ext cx="0" cy="0"/>
+          <a:chOff x="0" y="0"/>
+          <a:chExt cx="0" cy="0"/>
+        </a:xfrm>
+      </p:grpSpPr>
+      <p:sp>
+        <p:nvSpPr>
+          <p:cNvPr id="2" name="Title 1">
+            <a:extLst>
+              <a:ext uri="{FF2B5EF4-FFF2-40B4-BE49-F238E27FC236}">
+                <a16:creationId xmlns:a16="http://schemas.microsoft.com/office/drawing/2014/main" id="{BACCB986-4DF0-B624-5ACD-531B1A30196F}"/>
+              </a:ext>
+            </a:extLst>
+          </p:cNvPr>
+          <p:cNvSpPr>
+            <a:spLocks noGrp="1"/>
+          </p:cNvSpPr>
+          <p:nvPr>
+            <p:ph type="title"/>
+          </p:nvPr>
+        </p:nvSpPr>
+        <p:spPr/>
+        <p:txBody>
+          <a:bodyPr/>
+          <a:lstStyle/>
+          <a:p>
+            <a:endParaRPr lang="en-IN"/>
+          </a:p>
+        </p:txBody>
+      </p:sp>
+      <p:sp>
+        <p:nvSpPr>
+          <p:cNvPr id="3" name="Content Placeholder 2">
+            <a:extLst>
+              <a:ext uri="{FF2B5EF4-FFF2-40B4-BE49-F238E27FC236}">
+                <a16:creationId xmlns:a16="http://schemas.microsoft.com/office/drawing/2014/main" id="{61B20CEB-A85A-693F-A7B9-F74F52EB07F6}"/>
+              </a:ext>
+            </a:extLst>
+          </p:cNvPr>
+          <p:cNvSpPr>
+            <a:spLocks noGrp="1"/>
+          </p:cNvSpPr>
+          <p:nvPr>
+            <p:ph idx="1"/>
+          </p:nvPr>
+        </p:nvSpPr>
+        <p:spPr>
+          <a:xfrm>
+            <a:off x="1154954" y="2603500"/>
+            <a:ext cx="10394847" cy="3743512"/>
+          </a:xfrm>
+        </p:spPr>
+        <p:txBody>
+          <a:bodyPr/>
+          <a:lstStyle/>
+          <a:p>
+            <a:endParaRPr lang="en-IN" dirty="0"/>
+          </a:p>
+        </p:txBody>
+      </p:sp>
+    </p:spTree>
+    <p:extLst>
+      <p:ext uri="{BB962C8B-B14F-4D97-AF65-F5344CB8AC3E}">
+        <p14:creationId xmlns:p14="http://schemas.microsoft.com/office/powerpoint/2010/main" val="1980778495"/>
+      </p:ext>
+    </p:extLst>
+  </p:cSld>
+  <p:clrMapOvr>
+    <a:masterClrMapping/>
+  </p:clrMapOvr>
+</p:sld>
+</file>
+
+<file path=ppt/slides/slide69.xml><?xml version="1.0" encoding="utf-8"?>
+<p:sld xmlns:a="http://schemas.openxmlformats.org/drawingml/2006/main" xmlns:r="http://schemas.openxmlformats.org/officeDocument/2006/relationships" xmlns:p="http://schemas.openxmlformats.org/presentationml/2006/main">
+  <p:cSld>
+    <p:spTree>
+      <p:nvGrpSpPr>
+        <p:cNvPr id="1" name="">
+          <a:extLst>
+            <a:ext uri="{FF2B5EF4-FFF2-40B4-BE49-F238E27FC236}">
+              <a16:creationId xmlns:a16="http://schemas.microsoft.com/office/drawing/2014/main" id="{09201973-9B46-FC65-E432-3D75DAC51004}"/>
+            </a:ext>
+          </a:extLst>
+        </p:cNvPr>
+        <p:cNvGrpSpPr/>
+        <p:nvPr/>
+      </p:nvGrpSpPr>
+      <p:grpSpPr>
+        <a:xfrm>
+          <a:off x="0" y="0"/>
+          <a:ext cx="0" cy="0"/>
+          <a:chOff x="0" y="0"/>
+          <a:chExt cx="0" cy="0"/>
+        </a:xfrm>
+      </p:grpSpPr>
+      <p:sp>
+        <p:nvSpPr>
+          <p:cNvPr id="2" name="Title 1">
+            <a:extLst>
+              <a:ext uri="{FF2B5EF4-FFF2-40B4-BE49-F238E27FC236}">
+                <a16:creationId xmlns:a16="http://schemas.microsoft.com/office/drawing/2014/main" id="{A1354B24-9A5F-15D2-4F07-8E30321589E4}"/>
+              </a:ext>
+            </a:extLst>
+          </p:cNvPr>
+          <p:cNvSpPr>
+            <a:spLocks noGrp="1"/>
+          </p:cNvSpPr>
+          <p:nvPr>
+            <p:ph type="title"/>
+          </p:nvPr>
+        </p:nvSpPr>
+        <p:spPr/>
+        <p:txBody>
+          <a:bodyPr/>
+          <a:lstStyle/>
+          <a:p>
+            <a:endParaRPr lang="en-IN"/>
+          </a:p>
+        </p:txBody>
+      </p:sp>
+      <p:sp>
+        <p:nvSpPr>
+          <p:cNvPr id="3" name="Content Placeholder 2">
+            <a:extLst>
+              <a:ext uri="{FF2B5EF4-FFF2-40B4-BE49-F238E27FC236}">
+                <a16:creationId xmlns:a16="http://schemas.microsoft.com/office/drawing/2014/main" id="{AFE5C79E-148E-7493-817D-35B54A5166A0}"/>
+              </a:ext>
+            </a:extLst>
+          </p:cNvPr>
+          <p:cNvSpPr>
+            <a:spLocks noGrp="1"/>
+          </p:cNvSpPr>
+          <p:nvPr>
+            <p:ph idx="1"/>
+          </p:nvPr>
+        </p:nvSpPr>
+        <p:spPr>
+          <a:xfrm>
+            <a:off x="1154954" y="2603500"/>
+            <a:ext cx="10394847" cy="3743512"/>
+          </a:xfrm>
+        </p:spPr>
+        <p:txBody>
+          <a:bodyPr/>
+          <a:lstStyle/>
+          <a:p>
+            <a:endParaRPr lang="en-IN" dirty="0"/>
+          </a:p>
+        </p:txBody>
+      </p:sp>
+    </p:spTree>
+    <p:extLst>
+      <p:ext uri="{BB962C8B-B14F-4D97-AF65-F5344CB8AC3E}">
+        <p14:creationId xmlns:p14="http://schemas.microsoft.com/office/powerpoint/2010/main" val="497473945"/>
       </p:ext>
     </p:extLst>
   </p:cSld>
@@ -18762,6 +23302,916 @@
     <p:extLst>
       <p:ext uri="{BB962C8B-B14F-4D97-AF65-F5344CB8AC3E}">
         <p14:creationId xmlns:p14="http://schemas.microsoft.com/office/powerpoint/2010/main" val="398116548"/>
+      </p:ext>
+    </p:extLst>
+  </p:cSld>
+  <p:clrMapOvr>
+    <a:masterClrMapping/>
+  </p:clrMapOvr>
+</p:sld>
+</file>
+
+<file path=ppt/slides/slide70.xml><?xml version="1.0" encoding="utf-8"?>
+<p:sld xmlns:a="http://schemas.openxmlformats.org/drawingml/2006/main" xmlns:r="http://schemas.openxmlformats.org/officeDocument/2006/relationships" xmlns:p="http://schemas.openxmlformats.org/presentationml/2006/main">
+  <p:cSld>
+    <p:spTree>
+      <p:nvGrpSpPr>
+        <p:cNvPr id="1" name="">
+          <a:extLst>
+            <a:ext uri="{FF2B5EF4-FFF2-40B4-BE49-F238E27FC236}">
+              <a16:creationId xmlns:a16="http://schemas.microsoft.com/office/drawing/2014/main" id="{73140590-086D-19B8-6C67-ED84BFE7626B}"/>
+            </a:ext>
+          </a:extLst>
+        </p:cNvPr>
+        <p:cNvGrpSpPr/>
+        <p:nvPr/>
+      </p:nvGrpSpPr>
+      <p:grpSpPr>
+        <a:xfrm>
+          <a:off x="0" y="0"/>
+          <a:ext cx="0" cy="0"/>
+          <a:chOff x="0" y="0"/>
+          <a:chExt cx="0" cy="0"/>
+        </a:xfrm>
+      </p:grpSpPr>
+      <p:sp>
+        <p:nvSpPr>
+          <p:cNvPr id="2" name="Title 1">
+            <a:extLst>
+              <a:ext uri="{FF2B5EF4-FFF2-40B4-BE49-F238E27FC236}">
+                <a16:creationId xmlns:a16="http://schemas.microsoft.com/office/drawing/2014/main" id="{CE62C719-AAF4-00D8-5A18-C6B4701A2152}"/>
+              </a:ext>
+            </a:extLst>
+          </p:cNvPr>
+          <p:cNvSpPr>
+            <a:spLocks noGrp="1"/>
+          </p:cNvSpPr>
+          <p:nvPr>
+            <p:ph type="title"/>
+          </p:nvPr>
+        </p:nvSpPr>
+        <p:spPr/>
+        <p:txBody>
+          <a:bodyPr/>
+          <a:lstStyle/>
+          <a:p>
+            <a:endParaRPr lang="en-IN"/>
+          </a:p>
+        </p:txBody>
+      </p:sp>
+      <p:sp>
+        <p:nvSpPr>
+          <p:cNvPr id="3" name="Content Placeholder 2">
+            <a:extLst>
+              <a:ext uri="{FF2B5EF4-FFF2-40B4-BE49-F238E27FC236}">
+                <a16:creationId xmlns:a16="http://schemas.microsoft.com/office/drawing/2014/main" id="{3298C7C4-FB72-ABF6-CCB4-2BCEB94EFE52}"/>
+              </a:ext>
+            </a:extLst>
+          </p:cNvPr>
+          <p:cNvSpPr>
+            <a:spLocks noGrp="1"/>
+          </p:cNvSpPr>
+          <p:nvPr>
+            <p:ph idx="1"/>
+          </p:nvPr>
+        </p:nvSpPr>
+        <p:spPr>
+          <a:xfrm>
+            <a:off x="1154954" y="2603500"/>
+            <a:ext cx="10394847" cy="3743512"/>
+          </a:xfrm>
+        </p:spPr>
+        <p:txBody>
+          <a:bodyPr/>
+          <a:lstStyle/>
+          <a:p>
+            <a:endParaRPr lang="en-IN" dirty="0"/>
+          </a:p>
+        </p:txBody>
+      </p:sp>
+    </p:spTree>
+    <p:extLst>
+      <p:ext uri="{BB962C8B-B14F-4D97-AF65-F5344CB8AC3E}">
+        <p14:creationId xmlns:p14="http://schemas.microsoft.com/office/powerpoint/2010/main" val="889811974"/>
+      </p:ext>
+    </p:extLst>
+  </p:cSld>
+  <p:clrMapOvr>
+    <a:masterClrMapping/>
+  </p:clrMapOvr>
+</p:sld>
+</file>
+
+<file path=ppt/slides/slide71.xml><?xml version="1.0" encoding="utf-8"?>
+<p:sld xmlns:a="http://schemas.openxmlformats.org/drawingml/2006/main" xmlns:r="http://schemas.openxmlformats.org/officeDocument/2006/relationships" xmlns:p="http://schemas.openxmlformats.org/presentationml/2006/main">
+  <p:cSld>
+    <p:spTree>
+      <p:nvGrpSpPr>
+        <p:cNvPr id="1" name="">
+          <a:extLst>
+            <a:ext uri="{FF2B5EF4-FFF2-40B4-BE49-F238E27FC236}">
+              <a16:creationId xmlns:a16="http://schemas.microsoft.com/office/drawing/2014/main" id="{3E3DE9C0-3512-1312-2F97-9A2AD26A5055}"/>
+            </a:ext>
+          </a:extLst>
+        </p:cNvPr>
+        <p:cNvGrpSpPr/>
+        <p:nvPr/>
+      </p:nvGrpSpPr>
+      <p:grpSpPr>
+        <a:xfrm>
+          <a:off x="0" y="0"/>
+          <a:ext cx="0" cy="0"/>
+          <a:chOff x="0" y="0"/>
+          <a:chExt cx="0" cy="0"/>
+        </a:xfrm>
+      </p:grpSpPr>
+      <p:sp>
+        <p:nvSpPr>
+          <p:cNvPr id="2" name="Title 1">
+            <a:extLst>
+              <a:ext uri="{FF2B5EF4-FFF2-40B4-BE49-F238E27FC236}">
+                <a16:creationId xmlns:a16="http://schemas.microsoft.com/office/drawing/2014/main" id="{64A7C1ED-940F-66E9-3946-8132A8F925F9}"/>
+              </a:ext>
+            </a:extLst>
+          </p:cNvPr>
+          <p:cNvSpPr>
+            <a:spLocks noGrp="1"/>
+          </p:cNvSpPr>
+          <p:nvPr>
+            <p:ph type="title"/>
+          </p:nvPr>
+        </p:nvSpPr>
+        <p:spPr/>
+        <p:txBody>
+          <a:bodyPr/>
+          <a:lstStyle/>
+          <a:p>
+            <a:endParaRPr lang="en-IN"/>
+          </a:p>
+        </p:txBody>
+      </p:sp>
+      <p:sp>
+        <p:nvSpPr>
+          <p:cNvPr id="3" name="Content Placeholder 2">
+            <a:extLst>
+              <a:ext uri="{FF2B5EF4-FFF2-40B4-BE49-F238E27FC236}">
+                <a16:creationId xmlns:a16="http://schemas.microsoft.com/office/drawing/2014/main" id="{3F7113CF-F4E1-A785-3447-542631CC3862}"/>
+              </a:ext>
+            </a:extLst>
+          </p:cNvPr>
+          <p:cNvSpPr>
+            <a:spLocks noGrp="1"/>
+          </p:cNvSpPr>
+          <p:nvPr>
+            <p:ph idx="1"/>
+          </p:nvPr>
+        </p:nvSpPr>
+        <p:spPr>
+          <a:xfrm>
+            <a:off x="1154954" y="2603500"/>
+            <a:ext cx="10394847" cy="3743512"/>
+          </a:xfrm>
+        </p:spPr>
+        <p:txBody>
+          <a:bodyPr/>
+          <a:lstStyle/>
+          <a:p>
+            <a:endParaRPr lang="en-IN" dirty="0"/>
+          </a:p>
+        </p:txBody>
+      </p:sp>
+    </p:spTree>
+    <p:extLst>
+      <p:ext uri="{BB962C8B-B14F-4D97-AF65-F5344CB8AC3E}">
+        <p14:creationId xmlns:p14="http://schemas.microsoft.com/office/powerpoint/2010/main" val="975144457"/>
+      </p:ext>
+    </p:extLst>
+  </p:cSld>
+  <p:clrMapOvr>
+    <a:masterClrMapping/>
+  </p:clrMapOvr>
+</p:sld>
+</file>
+
+<file path=ppt/slides/slide72.xml><?xml version="1.0" encoding="utf-8"?>
+<p:sld xmlns:a="http://schemas.openxmlformats.org/drawingml/2006/main" xmlns:r="http://schemas.openxmlformats.org/officeDocument/2006/relationships" xmlns:p="http://schemas.openxmlformats.org/presentationml/2006/main">
+  <p:cSld>
+    <p:spTree>
+      <p:nvGrpSpPr>
+        <p:cNvPr id="1" name="">
+          <a:extLst>
+            <a:ext uri="{FF2B5EF4-FFF2-40B4-BE49-F238E27FC236}">
+              <a16:creationId xmlns:a16="http://schemas.microsoft.com/office/drawing/2014/main" id="{8C327652-9709-EFA7-DFFA-1BAFF839F49F}"/>
+            </a:ext>
+          </a:extLst>
+        </p:cNvPr>
+        <p:cNvGrpSpPr/>
+        <p:nvPr/>
+      </p:nvGrpSpPr>
+      <p:grpSpPr>
+        <a:xfrm>
+          <a:off x="0" y="0"/>
+          <a:ext cx="0" cy="0"/>
+          <a:chOff x="0" y="0"/>
+          <a:chExt cx="0" cy="0"/>
+        </a:xfrm>
+      </p:grpSpPr>
+      <p:sp>
+        <p:nvSpPr>
+          <p:cNvPr id="2" name="Title 1">
+            <a:extLst>
+              <a:ext uri="{FF2B5EF4-FFF2-40B4-BE49-F238E27FC236}">
+                <a16:creationId xmlns:a16="http://schemas.microsoft.com/office/drawing/2014/main" id="{AB2BFF6F-F9AC-D649-0AF9-1D01C3945B2B}"/>
+              </a:ext>
+            </a:extLst>
+          </p:cNvPr>
+          <p:cNvSpPr>
+            <a:spLocks noGrp="1"/>
+          </p:cNvSpPr>
+          <p:nvPr>
+            <p:ph type="title"/>
+          </p:nvPr>
+        </p:nvSpPr>
+        <p:spPr/>
+        <p:txBody>
+          <a:bodyPr/>
+          <a:lstStyle/>
+          <a:p>
+            <a:endParaRPr lang="en-IN"/>
+          </a:p>
+        </p:txBody>
+      </p:sp>
+      <p:sp>
+        <p:nvSpPr>
+          <p:cNvPr id="3" name="Content Placeholder 2">
+            <a:extLst>
+              <a:ext uri="{FF2B5EF4-FFF2-40B4-BE49-F238E27FC236}">
+                <a16:creationId xmlns:a16="http://schemas.microsoft.com/office/drawing/2014/main" id="{D87462A0-B365-2801-D1C8-72A12790683E}"/>
+              </a:ext>
+            </a:extLst>
+          </p:cNvPr>
+          <p:cNvSpPr>
+            <a:spLocks noGrp="1"/>
+          </p:cNvSpPr>
+          <p:nvPr>
+            <p:ph idx="1"/>
+          </p:nvPr>
+        </p:nvSpPr>
+        <p:spPr>
+          <a:xfrm>
+            <a:off x="1154954" y="2603500"/>
+            <a:ext cx="10394847" cy="3743512"/>
+          </a:xfrm>
+        </p:spPr>
+        <p:txBody>
+          <a:bodyPr/>
+          <a:lstStyle/>
+          <a:p>
+            <a:endParaRPr lang="en-IN" dirty="0"/>
+          </a:p>
+        </p:txBody>
+      </p:sp>
+    </p:spTree>
+    <p:extLst>
+      <p:ext uri="{BB962C8B-B14F-4D97-AF65-F5344CB8AC3E}">
+        <p14:creationId xmlns:p14="http://schemas.microsoft.com/office/powerpoint/2010/main" val="4149743780"/>
+      </p:ext>
+    </p:extLst>
+  </p:cSld>
+  <p:clrMapOvr>
+    <a:masterClrMapping/>
+  </p:clrMapOvr>
+</p:sld>
+</file>
+
+<file path=ppt/slides/slide73.xml><?xml version="1.0" encoding="utf-8"?>
+<p:sld xmlns:a="http://schemas.openxmlformats.org/drawingml/2006/main" xmlns:r="http://schemas.openxmlformats.org/officeDocument/2006/relationships" xmlns:p="http://schemas.openxmlformats.org/presentationml/2006/main">
+  <p:cSld>
+    <p:spTree>
+      <p:nvGrpSpPr>
+        <p:cNvPr id="1" name="">
+          <a:extLst>
+            <a:ext uri="{FF2B5EF4-FFF2-40B4-BE49-F238E27FC236}">
+              <a16:creationId xmlns:a16="http://schemas.microsoft.com/office/drawing/2014/main" id="{34A04686-CC6F-ABA7-2F8A-ABBA333F60BA}"/>
+            </a:ext>
+          </a:extLst>
+        </p:cNvPr>
+        <p:cNvGrpSpPr/>
+        <p:nvPr/>
+      </p:nvGrpSpPr>
+      <p:grpSpPr>
+        <a:xfrm>
+          <a:off x="0" y="0"/>
+          <a:ext cx="0" cy="0"/>
+          <a:chOff x="0" y="0"/>
+          <a:chExt cx="0" cy="0"/>
+        </a:xfrm>
+      </p:grpSpPr>
+      <p:sp>
+        <p:nvSpPr>
+          <p:cNvPr id="2" name="Title 1">
+            <a:extLst>
+              <a:ext uri="{FF2B5EF4-FFF2-40B4-BE49-F238E27FC236}">
+                <a16:creationId xmlns:a16="http://schemas.microsoft.com/office/drawing/2014/main" id="{FE7B201D-71C8-6A91-D3FD-B96655B932FB}"/>
+              </a:ext>
+            </a:extLst>
+          </p:cNvPr>
+          <p:cNvSpPr>
+            <a:spLocks noGrp="1"/>
+          </p:cNvSpPr>
+          <p:nvPr>
+            <p:ph type="title"/>
+          </p:nvPr>
+        </p:nvSpPr>
+        <p:spPr/>
+        <p:txBody>
+          <a:bodyPr/>
+          <a:lstStyle/>
+          <a:p>
+            <a:endParaRPr lang="en-IN"/>
+          </a:p>
+        </p:txBody>
+      </p:sp>
+      <p:sp>
+        <p:nvSpPr>
+          <p:cNvPr id="3" name="Content Placeholder 2">
+            <a:extLst>
+              <a:ext uri="{FF2B5EF4-FFF2-40B4-BE49-F238E27FC236}">
+                <a16:creationId xmlns:a16="http://schemas.microsoft.com/office/drawing/2014/main" id="{B1FBF166-BC57-BB37-2779-EE460963D06E}"/>
+              </a:ext>
+            </a:extLst>
+          </p:cNvPr>
+          <p:cNvSpPr>
+            <a:spLocks noGrp="1"/>
+          </p:cNvSpPr>
+          <p:nvPr>
+            <p:ph idx="1"/>
+          </p:nvPr>
+        </p:nvSpPr>
+        <p:spPr>
+          <a:xfrm>
+            <a:off x="1154954" y="2603500"/>
+            <a:ext cx="10394847" cy="3743512"/>
+          </a:xfrm>
+        </p:spPr>
+        <p:txBody>
+          <a:bodyPr/>
+          <a:lstStyle/>
+          <a:p>
+            <a:endParaRPr lang="en-IN" dirty="0"/>
+          </a:p>
+        </p:txBody>
+      </p:sp>
+    </p:spTree>
+    <p:extLst>
+      <p:ext uri="{BB962C8B-B14F-4D97-AF65-F5344CB8AC3E}">
+        <p14:creationId xmlns:p14="http://schemas.microsoft.com/office/powerpoint/2010/main" val="376865280"/>
+      </p:ext>
+    </p:extLst>
+  </p:cSld>
+  <p:clrMapOvr>
+    <a:masterClrMapping/>
+  </p:clrMapOvr>
+</p:sld>
+</file>
+
+<file path=ppt/slides/slide74.xml><?xml version="1.0" encoding="utf-8"?>
+<p:sld xmlns:a="http://schemas.openxmlformats.org/drawingml/2006/main" xmlns:r="http://schemas.openxmlformats.org/officeDocument/2006/relationships" xmlns:p="http://schemas.openxmlformats.org/presentationml/2006/main">
+  <p:cSld>
+    <p:spTree>
+      <p:nvGrpSpPr>
+        <p:cNvPr id="1" name="">
+          <a:extLst>
+            <a:ext uri="{FF2B5EF4-FFF2-40B4-BE49-F238E27FC236}">
+              <a16:creationId xmlns:a16="http://schemas.microsoft.com/office/drawing/2014/main" id="{5054CCD1-FCD2-938F-18F2-201EBDB80BC9}"/>
+            </a:ext>
+          </a:extLst>
+        </p:cNvPr>
+        <p:cNvGrpSpPr/>
+        <p:nvPr/>
+      </p:nvGrpSpPr>
+      <p:grpSpPr>
+        <a:xfrm>
+          <a:off x="0" y="0"/>
+          <a:ext cx="0" cy="0"/>
+          <a:chOff x="0" y="0"/>
+          <a:chExt cx="0" cy="0"/>
+        </a:xfrm>
+      </p:grpSpPr>
+      <p:sp>
+        <p:nvSpPr>
+          <p:cNvPr id="2" name="Title 1">
+            <a:extLst>
+              <a:ext uri="{FF2B5EF4-FFF2-40B4-BE49-F238E27FC236}">
+                <a16:creationId xmlns:a16="http://schemas.microsoft.com/office/drawing/2014/main" id="{09A925FF-7A3D-A915-F70A-CCB063B11406}"/>
+              </a:ext>
+            </a:extLst>
+          </p:cNvPr>
+          <p:cNvSpPr>
+            <a:spLocks noGrp="1"/>
+          </p:cNvSpPr>
+          <p:nvPr>
+            <p:ph type="title"/>
+          </p:nvPr>
+        </p:nvSpPr>
+        <p:spPr/>
+        <p:txBody>
+          <a:bodyPr/>
+          <a:lstStyle/>
+          <a:p>
+            <a:endParaRPr lang="en-IN"/>
+          </a:p>
+        </p:txBody>
+      </p:sp>
+      <p:sp>
+        <p:nvSpPr>
+          <p:cNvPr id="3" name="Content Placeholder 2">
+            <a:extLst>
+              <a:ext uri="{FF2B5EF4-FFF2-40B4-BE49-F238E27FC236}">
+                <a16:creationId xmlns:a16="http://schemas.microsoft.com/office/drawing/2014/main" id="{926A0E24-BE27-B43C-7142-979B5D32D74D}"/>
+              </a:ext>
+            </a:extLst>
+          </p:cNvPr>
+          <p:cNvSpPr>
+            <a:spLocks noGrp="1"/>
+          </p:cNvSpPr>
+          <p:nvPr>
+            <p:ph idx="1"/>
+          </p:nvPr>
+        </p:nvSpPr>
+        <p:spPr>
+          <a:xfrm>
+            <a:off x="1154954" y="2603500"/>
+            <a:ext cx="10394847" cy="3743512"/>
+          </a:xfrm>
+        </p:spPr>
+        <p:txBody>
+          <a:bodyPr/>
+          <a:lstStyle/>
+          <a:p>
+            <a:endParaRPr lang="en-IN" dirty="0"/>
+          </a:p>
+        </p:txBody>
+      </p:sp>
+    </p:spTree>
+    <p:extLst>
+      <p:ext uri="{BB962C8B-B14F-4D97-AF65-F5344CB8AC3E}">
+        <p14:creationId xmlns:p14="http://schemas.microsoft.com/office/powerpoint/2010/main" val="4236194493"/>
+      </p:ext>
+    </p:extLst>
+  </p:cSld>
+  <p:clrMapOvr>
+    <a:masterClrMapping/>
+  </p:clrMapOvr>
+</p:sld>
+</file>
+
+<file path=ppt/slides/slide75.xml><?xml version="1.0" encoding="utf-8"?>
+<p:sld xmlns:a="http://schemas.openxmlformats.org/drawingml/2006/main" xmlns:r="http://schemas.openxmlformats.org/officeDocument/2006/relationships" xmlns:p="http://schemas.openxmlformats.org/presentationml/2006/main">
+  <p:cSld>
+    <p:spTree>
+      <p:nvGrpSpPr>
+        <p:cNvPr id="1" name="">
+          <a:extLst>
+            <a:ext uri="{FF2B5EF4-FFF2-40B4-BE49-F238E27FC236}">
+              <a16:creationId xmlns:a16="http://schemas.microsoft.com/office/drawing/2014/main" id="{50DDEF3A-7AAC-A77A-E91F-9DC049D0C9C9}"/>
+            </a:ext>
+          </a:extLst>
+        </p:cNvPr>
+        <p:cNvGrpSpPr/>
+        <p:nvPr/>
+      </p:nvGrpSpPr>
+      <p:grpSpPr>
+        <a:xfrm>
+          <a:off x="0" y="0"/>
+          <a:ext cx="0" cy="0"/>
+          <a:chOff x="0" y="0"/>
+          <a:chExt cx="0" cy="0"/>
+        </a:xfrm>
+      </p:grpSpPr>
+      <p:sp>
+        <p:nvSpPr>
+          <p:cNvPr id="2" name="Title 1">
+            <a:extLst>
+              <a:ext uri="{FF2B5EF4-FFF2-40B4-BE49-F238E27FC236}">
+                <a16:creationId xmlns:a16="http://schemas.microsoft.com/office/drawing/2014/main" id="{27EABFFF-A186-4247-0F13-D3EB5FBF08E4}"/>
+              </a:ext>
+            </a:extLst>
+          </p:cNvPr>
+          <p:cNvSpPr>
+            <a:spLocks noGrp="1"/>
+          </p:cNvSpPr>
+          <p:nvPr>
+            <p:ph type="title"/>
+          </p:nvPr>
+        </p:nvSpPr>
+        <p:spPr/>
+        <p:txBody>
+          <a:bodyPr/>
+          <a:lstStyle/>
+          <a:p>
+            <a:endParaRPr lang="en-IN"/>
+          </a:p>
+        </p:txBody>
+      </p:sp>
+      <p:sp>
+        <p:nvSpPr>
+          <p:cNvPr id="3" name="Content Placeholder 2">
+            <a:extLst>
+              <a:ext uri="{FF2B5EF4-FFF2-40B4-BE49-F238E27FC236}">
+                <a16:creationId xmlns:a16="http://schemas.microsoft.com/office/drawing/2014/main" id="{F7EE52B7-25E8-DA71-6321-DB1EE88E23E4}"/>
+              </a:ext>
+            </a:extLst>
+          </p:cNvPr>
+          <p:cNvSpPr>
+            <a:spLocks noGrp="1"/>
+          </p:cNvSpPr>
+          <p:nvPr>
+            <p:ph idx="1"/>
+          </p:nvPr>
+        </p:nvSpPr>
+        <p:spPr>
+          <a:xfrm>
+            <a:off x="1154954" y="2603500"/>
+            <a:ext cx="10394847" cy="3743512"/>
+          </a:xfrm>
+        </p:spPr>
+        <p:txBody>
+          <a:bodyPr/>
+          <a:lstStyle/>
+          <a:p>
+            <a:endParaRPr lang="en-IN" dirty="0"/>
+          </a:p>
+        </p:txBody>
+      </p:sp>
+    </p:spTree>
+    <p:extLst>
+      <p:ext uri="{BB962C8B-B14F-4D97-AF65-F5344CB8AC3E}">
+        <p14:creationId xmlns:p14="http://schemas.microsoft.com/office/powerpoint/2010/main" val="995349146"/>
+      </p:ext>
+    </p:extLst>
+  </p:cSld>
+  <p:clrMapOvr>
+    <a:masterClrMapping/>
+  </p:clrMapOvr>
+</p:sld>
+</file>
+
+<file path=ppt/slides/slide76.xml><?xml version="1.0" encoding="utf-8"?>
+<p:sld xmlns:a="http://schemas.openxmlformats.org/drawingml/2006/main" xmlns:r="http://schemas.openxmlformats.org/officeDocument/2006/relationships" xmlns:p="http://schemas.openxmlformats.org/presentationml/2006/main">
+  <p:cSld>
+    <p:spTree>
+      <p:nvGrpSpPr>
+        <p:cNvPr id="1" name="">
+          <a:extLst>
+            <a:ext uri="{FF2B5EF4-FFF2-40B4-BE49-F238E27FC236}">
+              <a16:creationId xmlns:a16="http://schemas.microsoft.com/office/drawing/2014/main" id="{1A6DBCF8-229F-EBCB-FD52-C8B23770C86C}"/>
+            </a:ext>
+          </a:extLst>
+        </p:cNvPr>
+        <p:cNvGrpSpPr/>
+        <p:nvPr/>
+      </p:nvGrpSpPr>
+      <p:grpSpPr>
+        <a:xfrm>
+          <a:off x="0" y="0"/>
+          <a:ext cx="0" cy="0"/>
+          <a:chOff x="0" y="0"/>
+          <a:chExt cx="0" cy="0"/>
+        </a:xfrm>
+      </p:grpSpPr>
+      <p:sp>
+        <p:nvSpPr>
+          <p:cNvPr id="2" name="Title 1">
+            <a:extLst>
+              <a:ext uri="{FF2B5EF4-FFF2-40B4-BE49-F238E27FC236}">
+                <a16:creationId xmlns:a16="http://schemas.microsoft.com/office/drawing/2014/main" id="{911834E9-6F24-275F-0336-FC53F9CD6D59}"/>
+              </a:ext>
+            </a:extLst>
+          </p:cNvPr>
+          <p:cNvSpPr>
+            <a:spLocks noGrp="1"/>
+          </p:cNvSpPr>
+          <p:nvPr>
+            <p:ph type="title"/>
+          </p:nvPr>
+        </p:nvSpPr>
+        <p:spPr/>
+        <p:txBody>
+          <a:bodyPr/>
+          <a:lstStyle/>
+          <a:p>
+            <a:endParaRPr lang="en-IN"/>
+          </a:p>
+        </p:txBody>
+      </p:sp>
+      <p:sp>
+        <p:nvSpPr>
+          <p:cNvPr id="3" name="Content Placeholder 2">
+            <a:extLst>
+              <a:ext uri="{FF2B5EF4-FFF2-40B4-BE49-F238E27FC236}">
+                <a16:creationId xmlns:a16="http://schemas.microsoft.com/office/drawing/2014/main" id="{D9C26C8F-F40B-EF13-C6C1-902937D87122}"/>
+              </a:ext>
+            </a:extLst>
+          </p:cNvPr>
+          <p:cNvSpPr>
+            <a:spLocks noGrp="1"/>
+          </p:cNvSpPr>
+          <p:nvPr>
+            <p:ph idx="1"/>
+          </p:nvPr>
+        </p:nvSpPr>
+        <p:spPr>
+          <a:xfrm>
+            <a:off x="1154954" y="2603500"/>
+            <a:ext cx="10394847" cy="3743512"/>
+          </a:xfrm>
+        </p:spPr>
+        <p:txBody>
+          <a:bodyPr/>
+          <a:lstStyle/>
+          <a:p>
+            <a:endParaRPr lang="en-IN" dirty="0"/>
+          </a:p>
+        </p:txBody>
+      </p:sp>
+    </p:spTree>
+    <p:extLst>
+      <p:ext uri="{BB962C8B-B14F-4D97-AF65-F5344CB8AC3E}">
+        <p14:creationId xmlns:p14="http://schemas.microsoft.com/office/powerpoint/2010/main" val="3485327878"/>
+      </p:ext>
+    </p:extLst>
+  </p:cSld>
+  <p:clrMapOvr>
+    <a:masterClrMapping/>
+  </p:clrMapOvr>
+</p:sld>
+</file>
+
+<file path=ppt/slides/slide77.xml><?xml version="1.0" encoding="utf-8"?>
+<p:sld xmlns:a="http://schemas.openxmlformats.org/drawingml/2006/main" xmlns:r="http://schemas.openxmlformats.org/officeDocument/2006/relationships" xmlns:p="http://schemas.openxmlformats.org/presentationml/2006/main">
+  <p:cSld>
+    <p:spTree>
+      <p:nvGrpSpPr>
+        <p:cNvPr id="1" name="">
+          <a:extLst>
+            <a:ext uri="{FF2B5EF4-FFF2-40B4-BE49-F238E27FC236}">
+              <a16:creationId xmlns:a16="http://schemas.microsoft.com/office/drawing/2014/main" id="{5449A334-454E-6F69-CB72-1AE11B7FC959}"/>
+            </a:ext>
+          </a:extLst>
+        </p:cNvPr>
+        <p:cNvGrpSpPr/>
+        <p:nvPr/>
+      </p:nvGrpSpPr>
+      <p:grpSpPr>
+        <a:xfrm>
+          <a:off x="0" y="0"/>
+          <a:ext cx="0" cy="0"/>
+          <a:chOff x="0" y="0"/>
+          <a:chExt cx="0" cy="0"/>
+        </a:xfrm>
+      </p:grpSpPr>
+      <p:sp>
+        <p:nvSpPr>
+          <p:cNvPr id="2" name="Title 1">
+            <a:extLst>
+              <a:ext uri="{FF2B5EF4-FFF2-40B4-BE49-F238E27FC236}">
+                <a16:creationId xmlns:a16="http://schemas.microsoft.com/office/drawing/2014/main" id="{343FED16-438A-EFD7-C971-DADB8B5C324F}"/>
+              </a:ext>
+            </a:extLst>
+          </p:cNvPr>
+          <p:cNvSpPr>
+            <a:spLocks noGrp="1"/>
+          </p:cNvSpPr>
+          <p:nvPr>
+            <p:ph type="title"/>
+          </p:nvPr>
+        </p:nvSpPr>
+        <p:spPr/>
+        <p:txBody>
+          <a:bodyPr/>
+          <a:lstStyle/>
+          <a:p>
+            <a:endParaRPr lang="en-IN"/>
+          </a:p>
+        </p:txBody>
+      </p:sp>
+      <p:sp>
+        <p:nvSpPr>
+          <p:cNvPr id="3" name="Content Placeholder 2">
+            <a:extLst>
+              <a:ext uri="{FF2B5EF4-FFF2-40B4-BE49-F238E27FC236}">
+                <a16:creationId xmlns:a16="http://schemas.microsoft.com/office/drawing/2014/main" id="{3BCA7A78-1A1E-5C06-12AC-1D3CA381D854}"/>
+              </a:ext>
+            </a:extLst>
+          </p:cNvPr>
+          <p:cNvSpPr>
+            <a:spLocks noGrp="1"/>
+          </p:cNvSpPr>
+          <p:nvPr>
+            <p:ph idx="1"/>
+          </p:nvPr>
+        </p:nvSpPr>
+        <p:spPr>
+          <a:xfrm>
+            <a:off x="1154954" y="2603500"/>
+            <a:ext cx="10394847" cy="3743512"/>
+          </a:xfrm>
+        </p:spPr>
+        <p:txBody>
+          <a:bodyPr/>
+          <a:lstStyle/>
+          <a:p>
+            <a:endParaRPr lang="en-IN" dirty="0"/>
+          </a:p>
+        </p:txBody>
+      </p:sp>
+    </p:spTree>
+    <p:extLst>
+      <p:ext uri="{BB962C8B-B14F-4D97-AF65-F5344CB8AC3E}">
+        <p14:creationId xmlns:p14="http://schemas.microsoft.com/office/powerpoint/2010/main" val="3648003034"/>
+      </p:ext>
+    </p:extLst>
+  </p:cSld>
+  <p:clrMapOvr>
+    <a:masterClrMapping/>
+  </p:clrMapOvr>
+</p:sld>
+</file>
+
+<file path=ppt/slides/slide78.xml><?xml version="1.0" encoding="utf-8"?>
+<p:sld xmlns:a="http://schemas.openxmlformats.org/drawingml/2006/main" xmlns:r="http://schemas.openxmlformats.org/officeDocument/2006/relationships" xmlns:p="http://schemas.openxmlformats.org/presentationml/2006/main">
+  <p:cSld>
+    <p:spTree>
+      <p:nvGrpSpPr>
+        <p:cNvPr id="1" name="">
+          <a:extLst>
+            <a:ext uri="{FF2B5EF4-FFF2-40B4-BE49-F238E27FC236}">
+              <a16:creationId xmlns:a16="http://schemas.microsoft.com/office/drawing/2014/main" id="{072D7F9B-9A62-0B0A-D765-BFA9F8F28CF6}"/>
+            </a:ext>
+          </a:extLst>
+        </p:cNvPr>
+        <p:cNvGrpSpPr/>
+        <p:nvPr/>
+      </p:nvGrpSpPr>
+      <p:grpSpPr>
+        <a:xfrm>
+          <a:off x="0" y="0"/>
+          <a:ext cx="0" cy="0"/>
+          <a:chOff x="0" y="0"/>
+          <a:chExt cx="0" cy="0"/>
+        </a:xfrm>
+      </p:grpSpPr>
+      <p:sp>
+        <p:nvSpPr>
+          <p:cNvPr id="2" name="Title 1">
+            <a:extLst>
+              <a:ext uri="{FF2B5EF4-FFF2-40B4-BE49-F238E27FC236}">
+                <a16:creationId xmlns:a16="http://schemas.microsoft.com/office/drawing/2014/main" id="{6C8AEB61-C767-9D0C-B322-EA569D1D7EE3}"/>
+              </a:ext>
+            </a:extLst>
+          </p:cNvPr>
+          <p:cNvSpPr>
+            <a:spLocks noGrp="1"/>
+          </p:cNvSpPr>
+          <p:nvPr>
+            <p:ph type="title"/>
+          </p:nvPr>
+        </p:nvSpPr>
+        <p:spPr/>
+        <p:txBody>
+          <a:bodyPr/>
+          <a:lstStyle/>
+          <a:p>
+            <a:endParaRPr lang="en-IN"/>
+          </a:p>
+        </p:txBody>
+      </p:sp>
+      <p:sp>
+        <p:nvSpPr>
+          <p:cNvPr id="3" name="Content Placeholder 2">
+            <a:extLst>
+              <a:ext uri="{FF2B5EF4-FFF2-40B4-BE49-F238E27FC236}">
+                <a16:creationId xmlns:a16="http://schemas.microsoft.com/office/drawing/2014/main" id="{00D0ED20-6968-A1DB-26F6-0E9F20B3D1C0}"/>
+              </a:ext>
+            </a:extLst>
+          </p:cNvPr>
+          <p:cNvSpPr>
+            <a:spLocks noGrp="1"/>
+          </p:cNvSpPr>
+          <p:nvPr>
+            <p:ph idx="1"/>
+          </p:nvPr>
+        </p:nvSpPr>
+        <p:spPr>
+          <a:xfrm>
+            <a:off x="1154954" y="2603500"/>
+            <a:ext cx="10394847" cy="3743512"/>
+          </a:xfrm>
+        </p:spPr>
+        <p:txBody>
+          <a:bodyPr/>
+          <a:lstStyle/>
+          <a:p>
+            <a:endParaRPr lang="en-IN" dirty="0"/>
+          </a:p>
+        </p:txBody>
+      </p:sp>
+    </p:spTree>
+    <p:extLst>
+      <p:ext uri="{BB962C8B-B14F-4D97-AF65-F5344CB8AC3E}">
+        <p14:creationId xmlns:p14="http://schemas.microsoft.com/office/powerpoint/2010/main" val="4243996742"/>
+      </p:ext>
+    </p:extLst>
+  </p:cSld>
+  <p:clrMapOvr>
+    <a:masterClrMapping/>
+  </p:clrMapOvr>
+</p:sld>
+</file>
+
+<file path=ppt/slides/slide79.xml><?xml version="1.0" encoding="utf-8"?>
+<p:sld xmlns:a="http://schemas.openxmlformats.org/drawingml/2006/main" xmlns:r="http://schemas.openxmlformats.org/officeDocument/2006/relationships" xmlns:p="http://schemas.openxmlformats.org/presentationml/2006/main">
+  <p:cSld>
+    <p:spTree>
+      <p:nvGrpSpPr>
+        <p:cNvPr id="1" name="">
+          <a:extLst>
+            <a:ext uri="{FF2B5EF4-FFF2-40B4-BE49-F238E27FC236}">
+              <a16:creationId xmlns:a16="http://schemas.microsoft.com/office/drawing/2014/main" id="{E79A8A94-F377-5341-8DB3-56AF8BDD26AA}"/>
+            </a:ext>
+          </a:extLst>
+        </p:cNvPr>
+        <p:cNvGrpSpPr/>
+        <p:nvPr/>
+      </p:nvGrpSpPr>
+      <p:grpSpPr>
+        <a:xfrm>
+          <a:off x="0" y="0"/>
+          <a:ext cx="0" cy="0"/>
+          <a:chOff x="0" y="0"/>
+          <a:chExt cx="0" cy="0"/>
+        </a:xfrm>
+      </p:grpSpPr>
+      <p:sp>
+        <p:nvSpPr>
+          <p:cNvPr id="2" name="Title 1">
+            <a:extLst>
+              <a:ext uri="{FF2B5EF4-FFF2-40B4-BE49-F238E27FC236}">
+                <a16:creationId xmlns:a16="http://schemas.microsoft.com/office/drawing/2014/main" id="{D934F553-7781-275B-D442-EBAECF56EE8E}"/>
+              </a:ext>
+            </a:extLst>
+          </p:cNvPr>
+          <p:cNvSpPr>
+            <a:spLocks noGrp="1"/>
+          </p:cNvSpPr>
+          <p:nvPr>
+            <p:ph type="title"/>
+          </p:nvPr>
+        </p:nvSpPr>
+        <p:spPr/>
+        <p:txBody>
+          <a:bodyPr/>
+          <a:lstStyle/>
+          <a:p>
+            <a:endParaRPr lang="en-IN"/>
+          </a:p>
+        </p:txBody>
+      </p:sp>
+      <p:sp>
+        <p:nvSpPr>
+          <p:cNvPr id="3" name="Content Placeholder 2">
+            <a:extLst>
+              <a:ext uri="{FF2B5EF4-FFF2-40B4-BE49-F238E27FC236}">
+                <a16:creationId xmlns:a16="http://schemas.microsoft.com/office/drawing/2014/main" id="{22C565F8-7C05-667D-72F6-829003C8C748}"/>
+              </a:ext>
+            </a:extLst>
+          </p:cNvPr>
+          <p:cNvSpPr>
+            <a:spLocks noGrp="1"/>
+          </p:cNvSpPr>
+          <p:nvPr>
+            <p:ph idx="1"/>
+          </p:nvPr>
+        </p:nvSpPr>
+        <p:spPr>
+          <a:xfrm>
+            <a:off x="1154954" y="2603500"/>
+            <a:ext cx="10394847" cy="3743512"/>
+          </a:xfrm>
+        </p:spPr>
+        <p:txBody>
+          <a:bodyPr/>
+          <a:lstStyle/>
+          <a:p>
+            <a:endParaRPr lang="en-IN" dirty="0"/>
+          </a:p>
+        </p:txBody>
+      </p:sp>
+    </p:spTree>
+    <p:extLst>
+      <p:ext uri="{BB962C8B-B14F-4D97-AF65-F5344CB8AC3E}">
+        <p14:creationId xmlns:p14="http://schemas.microsoft.com/office/powerpoint/2010/main" val="2901159855"/>
       </p:ext>
     </p:extLst>
   </p:cSld>
@@ -19400,6 +24850,461 @@
 </p:sld>
 </file>
 
+<file path=ppt/slides/slide80.xml><?xml version="1.0" encoding="utf-8"?>
+<p:sld xmlns:a="http://schemas.openxmlformats.org/drawingml/2006/main" xmlns:r="http://schemas.openxmlformats.org/officeDocument/2006/relationships" xmlns:p="http://schemas.openxmlformats.org/presentationml/2006/main">
+  <p:cSld>
+    <p:spTree>
+      <p:nvGrpSpPr>
+        <p:cNvPr id="1" name="">
+          <a:extLst>
+            <a:ext uri="{FF2B5EF4-FFF2-40B4-BE49-F238E27FC236}">
+              <a16:creationId xmlns:a16="http://schemas.microsoft.com/office/drawing/2014/main" id="{A44E2DEF-B6B8-73CE-B68E-1ACA87D7A94B}"/>
+            </a:ext>
+          </a:extLst>
+        </p:cNvPr>
+        <p:cNvGrpSpPr/>
+        <p:nvPr/>
+      </p:nvGrpSpPr>
+      <p:grpSpPr>
+        <a:xfrm>
+          <a:off x="0" y="0"/>
+          <a:ext cx="0" cy="0"/>
+          <a:chOff x="0" y="0"/>
+          <a:chExt cx="0" cy="0"/>
+        </a:xfrm>
+      </p:grpSpPr>
+      <p:sp>
+        <p:nvSpPr>
+          <p:cNvPr id="2" name="Title 1">
+            <a:extLst>
+              <a:ext uri="{FF2B5EF4-FFF2-40B4-BE49-F238E27FC236}">
+                <a16:creationId xmlns:a16="http://schemas.microsoft.com/office/drawing/2014/main" id="{6442F8CE-760A-F548-7504-0CD6620B101F}"/>
+              </a:ext>
+            </a:extLst>
+          </p:cNvPr>
+          <p:cNvSpPr>
+            <a:spLocks noGrp="1"/>
+          </p:cNvSpPr>
+          <p:nvPr>
+            <p:ph type="title"/>
+          </p:nvPr>
+        </p:nvSpPr>
+        <p:spPr/>
+        <p:txBody>
+          <a:bodyPr/>
+          <a:lstStyle/>
+          <a:p>
+            <a:endParaRPr lang="en-IN"/>
+          </a:p>
+        </p:txBody>
+      </p:sp>
+      <p:sp>
+        <p:nvSpPr>
+          <p:cNvPr id="3" name="Content Placeholder 2">
+            <a:extLst>
+              <a:ext uri="{FF2B5EF4-FFF2-40B4-BE49-F238E27FC236}">
+                <a16:creationId xmlns:a16="http://schemas.microsoft.com/office/drawing/2014/main" id="{038E1B34-4768-10DB-FBC9-0A6436DFF38A}"/>
+              </a:ext>
+            </a:extLst>
+          </p:cNvPr>
+          <p:cNvSpPr>
+            <a:spLocks noGrp="1"/>
+          </p:cNvSpPr>
+          <p:nvPr>
+            <p:ph idx="1"/>
+          </p:nvPr>
+        </p:nvSpPr>
+        <p:spPr>
+          <a:xfrm>
+            <a:off x="1154954" y="2603500"/>
+            <a:ext cx="10394847" cy="3743512"/>
+          </a:xfrm>
+        </p:spPr>
+        <p:txBody>
+          <a:bodyPr/>
+          <a:lstStyle/>
+          <a:p>
+            <a:endParaRPr lang="en-IN" dirty="0"/>
+          </a:p>
+        </p:txBody>
+      </p:sp>
+    </p:spTree>
+    <p:extLst>
+      <p:ext uri="{BB962C8B-B14F-4D97-AF65-F5344CB8AC3E}">
+        <p14:creationId xmlns:p14="http://schemas.microsoft.com/office/powerpoint/2010/main" val="3962958569"/>
+      </p:ext>
+    </p:extLst>
+  </p:cSld>
+  <p:clrMapOvr>
+    <a:masterClrMapping/>
+  </p:clrMapOvr>
+</p:sld>
+</file>
+
+<file path=ppt/slides/slide81.xml><?xml version="1.0" encoding="utf-8"?>
+<p:sld xmlns:a="http://schemas.openxmlformats.org/drawingml/2006/main" xmlns:r="http://schemas.openxmlformats.org/officeDocument/2006/relationships" xmlns:p="http://schemas.openxmlformats.org/presentationml/2006/main">
+  <p:cSld>
+    <p:spTree>
+      <p:nvGrpSpPr>
+        <p:cNvPr id="1" name="">
+          <a:extLst>
+            <a:ext uri="{FF2B5EF4-FFF2-40B4-BE49-F238E27FC236}">
+              <a16:creationId xmlns:a16="http://schemas.microsoft.com/office/drawing/2014/main" id="{06ACE761-6815-F2B8-7DD0-BC0170BDE81E}"/>
+            </a:ext>
+          </a:extLst>
+        </p:cNvPr>
+        <p:cNvGrpSpPr/>
+        <p:nvPr/>
+      </p:nvGrpSpPr>
+      <p:grpSpPr>
+        <a:xfrm>
+          <a:off x="0" y="0"/>
+          <a:ext cx="0" cy="0"/>
+          <a:chOff x="0" y="0"/>
+          <a:chExt cx="0" cy="0"/>
+        </a:xfrm>
+      </p:grpSpPr>
+      <p:sp>
+        <p:nvSpPr>
+          <p:cNvPr id="2" name="Title 1">
+            <a:extLst>
+              <a:ext uri="{FF2B5EF4-FFF2-40B4-BE49-F238E27FC236}">
+                <a16:creationId xmlns:a16="http://schemas.microsoft.com/office/drawing/2014/main" id="{CB26EA45-880E-DAAB-9C46-E2472728C1D6}"/>
+              </a:ext>
+            </a:extLst>
+          </p:cNvPr>
+          <p:cNvSpPr>
+            <a:spLocks noGrp="1"/>
+          </p:cNvSpPr>
+          <p:nvPr>
+            <p:ph type="title"/>
+          </p:nvPr>
+        </p:nvSpPr>
+        <p:spPr/>
+        <p:txBody>
+          <a:bodyPr/>
+          <a:lstStyle/>
+          <a:p>
+            <a:endParaRPr lang="en-IN"/>
+          </a:p>
+        </p:txBody>
+      </p:sp>
+      <p:sp>
+        <p:nvSpPr>
+          <p:cNvPr id="3" name="Content Placeholder 2">
+            <a:extLst>
+              <a:ext uri="{FF2B5EF4-FFF2-40B4-BE49-F238E27FC236}">
+                <a16:creationId xmlns:a16="http://schemas.microsoft.com/office/drawing/2014/main" id="{DDD8DD24-53E6-FB2E-E2EF-4754A4101612}"/>
+              </a:ext>
+            </a:extLst>
+          </p:cNvPr>
+          <p:cNvSpPr>
+            <a:spLocks noGrp="1"/>
+          </p:cNvSpPr>
+          <p:nvPr>
+            <p:ph idx="1"/>
+          </p:nvPr>
+        </p:nvSpPr>
+        <p:spPr>
+          <a:xfrm>
+            <a:off x="1154954" y="2603500"/>
+            <a:ext cx="10394847" cy="3743512"/>
+          </a:xfrm>
+        </p:spPr>
+        <p:txBody>
+          <a:bodyPr/>
+          <a:lstStyle/>
+          <a:p>
+            <a:endParaRPr lang="en-IN" dirty="0"/>
+          </a:p>
+        </p:txBody>
+      </p:sp>
+    </p:spTree>
+    <p:extLst>
+      <p:ext uri="{BB962C8B-B14F-4D97-AF65-F5344CB8AC3E}">
+        <p14:creationId xmlns:p14="http://schemas.microsoft.com/office/powerpoint/2010/main" val="989326838"/>
+      </p:ext>
+    </p:extLst>
+  </p:cSld>
+  <p:clrMapOvr>
+    <a:masterClrMapping/>
+  </p:clrMapOvr>
+</p:sld>
+</file>
+
+<file path=ppt/slides/slide82.xml><?xml version="1.0" encoding="utf-8"?>
+<p:sld xmlns:a="http://schemas.openxmlformats.org/drawingml/2006/main" xmlns:r="http://schemas.openxmlformats.org/officeDocument/2006/relationships" xmlns:p="http://schemas.openxmlformats.org/presentationml/2006/main">
+  <p:cSld>
+    <p:spTree>
+      <p:nvGrpSpPr>
+        <p:cNvPr id="1" name="">
+          <a:extLst>
+            <a:ext uri="{FF2B5EF4-FFF2-40B4-BE49-F238E27FC236}">
+              <a16:creationId xmlns:a16="http://schemas.microsoft.com/office/drawing/2014/main" id="{7F513693-6B06-81E9-B76C-40AAEA5F5028}"/>
+            </a:ext>
+          </a:extLst>
+        </p:cNvPr>
+        <p:cNvGrpSpPr/>
+        <p:nvPr/>
+      </p:nvGrpSpPr>
+      <p:grpSpPr>
+        <a:xfrm>
+          <a:off x="0" y="0"/>
+          <a:ext cx="0" cy="0"/>
+          <a:chOff x="0" y="0"/>
+          <a:chExt cx="0" cy="0"/>
+        </a:xfrm>
+      </p:grpSpPr>
+      <p:sp>
+        <p:nvSpPr>
+          <p:cNvPr id="2" name="Title 1">
+            <a:extLst>
+              <a:ext uri="{FF2B5EF4-FFF2-40B4-BE49-F238E27FC236}">
+                <a16:creationId xmlns:a16="http://schemas.microsoft.com/office/drawing/2014/main" id="{058B65F6-9EB4-62CE-4D8E-CDF1A993F49C}"/>
+              </a:ext>
+            </a:extLst>
+          </p:cNvPr>
+          <p:cNvSpPr>
+            <a:spLocks noGrp="1"/>
+          </p:cNvSpPr>
+          <p:nvPr>
+            <p:ph type="title"/>
+          </p:nvPr>
+        </p:nvSpPr>
+        <p:spPr/>
+        <p:txBody>
+          <a:bodyPr/>
+          <a:lstStyle/>
+          <a:p>
+            <a:endParaRPr lang="en-IN"/>
+          </a:p>
+        </p:txBody>
+      </p:sp>
+      <p:sp>
+        <p:nvSpPr>
+          <p:cNvPr id="3" name="Content Placeholder 2">
+            <a:extLst>
+              <a:ext uri="{FF2B5EF4-FFF2-40B4-BE49-F238E27FC236}">
+                <a16:creationId xmlns:a16="http://schemas.microsoft.com/office/drawing/2014/main" id="{CF1DF49C-F7DA-B311-3D69-6BDFD727A23E}"/>
+              </a:ext>
+            </a:extLst>
+          </p:cNvPr>
+          <p:cNvSpPr>
+            <a:spLocks noGrp="1"/>
+          </p:cNvSpPr>
+          <p:nvPr>
+            <p:ph idx="1"/>
+          </p:nvPr>
+        </p:nvSpPr>
+        <p:spPr>
+          <a:xfrm>
+            <a:off x="1154954" y="2603500"/>
+            <a:ext cx="10394847" cy="3743512"/>
+          </a:xfrm>
+        </p:spPr>
+        <p:txBody>
+          <a:bodyPr/>
+          <a:lstStyle/>
+          <a:p>
+            <a:endParaRPr lang="en-IN" dirty="0"/>
+          </a:p>
+        </p:txBody>
+      </p:sp>
+    </p:spTree>
+    <p:extLst>
+      <p:ext uri="{BB962C8B-B14F-4D97-AF65-F5344CB8AC3E}">
+        <p14:creationId xmlns:p14="http://schemas.microsoft.com/office/powerpoint/2010/main" val="3017952194"/>
+      </p:ext>
+    </p:extLst>
+  </p:cSld>
+  <p:clrMapOvr>
+    <a:masterClrMapping/>
+  </p:clrMapOvr>
+</p:sld>
+</file>
+
+<file path=ppt/slides/slide83.xml><?xml version="1.0" encoding="utf-8"?>
+<p:sld xmlns:a="http://schemas.openxmlformats.org/drawingml/2006/main" xmlns:r="http://schemas.openxmlformats.org/officeDocument/2006/relationships" xmlns:p="http://schemas.openxmlformats.org/presentationml/2006/main">
+  <p:cSld>
+    <p:spTree>
+      <p:nvGrpSpPr>
+        <p:cNvPr id="1" name="">
+          <a:extLst>
+            <a:ext uri="{FF2B5EF4-FFF2-40B4-BE49-F238E27FC236}">
+              <a16:creationId xmlns:a16="http://schemas.microsoft.com/office/drawing/2014/main" id="{2B5C7F00-AAFA-D03F-03C4-A0F0AFEEEE83}"/>
+            </a:ext>
+          </a:extLst>
+        </p:cNvPr>
+        <p:cNvGrpSpPr/>
+        <p:nvPr/>
+      </p:nvGrpSpPr>
+      <p:grpSpPr>
+        <a:xfrm>
+          <a:off x="0" y="0"/>
+          <a:ext cx="0" cy="0"/>
+          <a:chOff x="0" y="0"/>
+          <a:chExt cx="0" cy="0"/>
+        </a:xfrm>
+      </p:grpSpPr>
+      <p:sp>
+        <p:nvSpPr>
+          <p:cNvPr id="2" name="Title 1">
+            <a:extLst>
+              <a:ext uri="{FF2B5EF4-FFF2-40B4-BE49-F238E27FC236}">
+                <a16:creationId xmlns:a16="http://schemas.microsoft.com/office/drawing/2014/main" id="{01DA10E6-2D56-B07A-E9DC-848C339C3B03}"/>
+              </a:ext>
+            </a:extLst>
+          </p:cNvPr>
+          <p:cNvSpPr>
+            <a:spLocks noGrp="1"/>
+          </p:cNvSpPr>
+          <p:nvPr>
+            <p:ph type="title"/>
+          </p:nvPr>
+        </p:nvSpPr>
+        <p:spPr/>
+        <p:txBody>
+          <a:bodyPr/>
+          <a:lstStyle/>
+          <a:p>
+            <a:endParaRPr lang="en-IN"/>
+          </a:p>
+        </p:txBody>
+      </p:sp>
+      <p:sp>
+        <p:nvSpPr>
+          <p:cNvPr id="3" name="Content Placeholder 2">
+            <a:extLst>
+              <a:ext uri="{FF2B5EF4-FFF2-40B4-BE49-F238E27FC236}">
+                <a16:creationId xmlns:a16="http://schemas.microsoft.com/office/drawing/2014/main" id="{75D5E670-1DE7-1884-91B7-CD74B5256A7A}"/>
+              </a:ext>
+            </a:extLst>
+          </p:cNvPr>
+          <p:cNvSpPr>
+            <a:spLocks noGrp="1"/>
+          </p:cNvSpPr>
+          <p:nvPr>
+            <p:ph idx="1"/>
+          </p:nvPr>
+        </p:nvSpPr>
+        <p:spPr>
+          <a:xfrm>
+            <a:off x="1154954" y="2603500"/>
+            <a:ext cx="10394847" cy="3743512"/>
+          </a:xfrm>
+        </p:spPr>
+        <p:txBody>
+          <a:bodyPr/>
+          <a:lstStyle/>
+          <a:p>
+            <a:endParaRPr lang="en-IN" dirty="0"/>
+          </a:p>
+        </p:txBody>
+      </p:sp>
+    </p:spTree>
+    <p:extLst>
+      <p:ext uri="{BB962C8B-B14F-4D97-AF65-F5344CB8AC3E}">
+        <p14:creationId xmlns:p14="http://schemas.microsoft.com/office/powerpoint/2010/main" val="667297388"/>
+      </p:ext>
+    </p:extLst>
+  </p:cSld>
+  <p:clrMapOvr>
+    <a:masterClrMapping/>
+  </p:clrMapOvr>
+</p:sld>
+</file>
+
+<file path=ppt/slides/slide84.xml><?xml version="1.0" encoding="utf-8"?>
+<p:sld xmlns:a="http://schemas.openxmlformats.org/drawingml/2006/main" xmlns:r="http://schemas.openxmlformats.org/officeDocument/2006/relationships" xmlns:p="http://schemas.openxmlformats.org/presentationml/2006/main">
+  <p:cSld>
+    <p:spTree>
+      <p:nvGrpSpPr>
+        <p:cNvPr id="1" name="">
+          <a:extLst>
+            <a:ext uri="{FF2B5EF4-FFF2-40B4-BE49-F238E27FC236}">
+              <a16:creationId xmlns:a16="http://schemas.microsoft.com/office/drawing/2014/main" id="{25522C47-F671-FFEC-754D-81993F4293D4}"/>
+            </a:ext>
+          </a:extLst>
+        </p:cNvPr>
+        <p:cNvGrpSpPr/>
+        <p:nvPr/>
+      </p:nvGrpSpPr>
+      <p:grpSpPr>
+        <a:xfrm>
+          <a:off x="0" y="0"/>
+          <a:ext cx="0" cy="0"/>
+          <a:chOff x="0" y="0"/>
+          <a:chExt cx="0" cy="0"/>
+        </a:xfrm>
+      </p:grpSpPr>
+      <p:sp>
+        <p:nvSpPr>
+          <p:cNvPr id="2" name="Title 1">
+            <a:extLst>
+              <a:ext uri="{FF2B5EF4-FFF2-40B4-BE49-F238E27FC236}">
+                <a16:creationId xmlns:a16="http://schemas.microsoft.com/office/drawing/2014/main" id="{1EB9B86D-ECE7-A578-7FEF-E9D76BDE75E1}"/>
+              </a:ext>
+            </a:extLst>
+          </p:cNvPr>
+          <p:cNvSpPr>
+            <a:spLocks noGrp="1"/>
+          </p:cNvSpPr>
+          <p:nvPr>
+            <p:ph type="title"/>
+          </p:nvPr>
+        </p:nvSpPr>
+        <p:spPr/>
+        <p:txBody>
+          <a:bodyPr/>
+          <a:lstStyle/>
+          <a:p>
+            <a:endParaRPr lang="en-IN"/>
+          </a:p>
+        </p:txBody>
+      </p:sp>
+      <p:sp>
+        <p:nvSpPr>
+          <p:cNvPr id="3" name="Content Placeholder 2">
+            <a:extLst>
+              <a:ext uri="{FF2B5EF4-FFF2-40B4-BE49-F238E27FC236}">
+                <a16:creationId xmlns:a16="http://schemas.microsoft.com/office/drawing/2014/main" id="{11DCCD73-83EC-998F-9412-9E1A05F32902}"/>
+              </a:ext>
+            </a:extLst>
+          </p:cNvPr>
+          <p:cNvSpPr>
+            <a:spLocks noGrp="1"/>
+          </p:cNvSpPr>
+          <p:nvPr>
+            <p:ph idx="1"/>
+          </p:nvPr>
+        </p:nvSpPr>
+        <p:spPr>
+          <a:xfrm>
+            <a:off x="1154954" y="2603500"/>
+            <a:ext cx="10394847" cy="3743512"/>
+          </a:xfrm>
+        </p:spPr>
+        <p:txBody>
+          <a:bodyPr/>
+          <a:lstStyle/>
+          <a:p>
+            <a:endParaRPr lang="en-IN" dirty="0"/>
+          </a:p>
+        </p:txBody>
+      </p:sp>
+    </p:spTree>
+    <p:extLst>
+      <p:ext uri="{BB962C8B-B14F-4D97-AF65-F5344CB8AC3E}">
+        <p14:creationId xmlns:p14="http://schemas.microsoft.com/office/powerpoint/2010/main" val="1993536691"/>
+      </p:ext>
+    </p:extLst>
+  </p:cSld>
+  <p:clrMapOvr>
+    <a:masterClrMapping/>
+  </p:clrMapOvr>
+</p:sld>
+</file>
+
 <file path=ppt/slides/slide9.xml><?xml version="1.0" encoding="utf-8"?>
 <p:sld xmlns:a="http://schemas.openxmlformats.org/drawingml/2006/main" xmlns:r="http://schemas.openxmlformats.org/officeDocument/2006/relationships" xmlns:p="http://schemas.openxmlformats.org/presentationml/2006/main">
   <p:cSld>
